--- a/dist/weeks-포트폴리오제작/포트폴리오제작_09주차_비주얼아이덴티티.pptx
+++ b/dist/weeks-포트폴리오제작/포트폴리오제작_09주차_비주얼아이덴티티.pptx
@@ -14,10 +14,9 @@
     <p:sldId id="262" r:id="rId8"/>
     <p:sldId id="263" r:id="rId9"/>
     <p:sldId id="264" r:id="rId10"/>
-    <p:sldId id="265" r:id="rId11"/>
   </p:sldIdLst>
   <p:notesMasterIdLst>
-    <p:notesMasterId r:id="rId12"/>
+    <p:notesMasterId r:id="rId11"/>
   </p:notesMasterIdLst>
   <p:sldSz cx="12192000" cy="6858000"/>
   <p:notesSz cx="6858000" cy="12192000"/>
@@ -554,95 +553,6 @@
 </p:notes>
 </file>
 
-<file path=ppt/notesSlides/notesSlide10.xml><?xml version="1.0" encoding="utf-8"?>
-<p:notes xmlns:a="http://schemas.openxmlformats.org/drawingml/2006/main" xmlns:r="http://schemas.openxmlformats.org/officeDocument/2006/relationships" xmlns:p="http://schemas.openxmlformats.org/presentationml/2006/main">
-  <p:cSld>
-    <p:spTree>
-      <p:nvGrpSpPr>
-        <p:cNvPr id="1" name=""/>
-        <p:cNvGrpSpPr/>
-        <p:nvPr/>
-      </p:nvGrpSpPr>
-      <p:grpSpPr>
-        <a:xfrm>
-          <a:off x="0" y="0"/>
-          <a:ext cx="0" cy="0"/>
-          <a:chOff x="0" y="0"/>
-          <a:chExt cx="0" cy="0"/>
-        </a:xfrm>
-      </p:grpSpPr>
-      <p:sp>
-        <p:nvSpPr>
-          <p:cNvPr id="2" name="Slide Image Placeholder 1"/>
-          <p:cNvSpPr>
-            <a:spLocks noGrp="1" noRot="1" noChangeAspect="1"/>
-          </p:cNvSpPr>
-          <p:nvPr>
-            <p:ph type="sldImg"/>
-          </p:nvPr>
-        </p:nvSpPr>
-        <p:spPr/>
-      </p:sp>
-      <p:sp>
-        <p:nvSpPr>
-          <p:cNvPr id="3" name="Notes Placeholder 2"/>
-          <p:cNvSpPr>
-            <a:spLocks noGrp="1"/>
-          </p:cNvSpPr>
-          <p:nvPr>
-            <p:ph type="body" idx="1"/>
-          </p:nvPr>
-        </p:nvSpPr>
-        <p:spPr/>
-        <p:txBody>
-          <a:bodyPr/>
-          <a:lstStyle/>
-          <a:p>
-            <a:r>
-              <a:rPr lang="en-US" dirty="0"/>
-              <a:t>[운영 메모]
-표지·소개를 미리 만들게 하면 시스템의 문제가 10주차 전에 드러난다.</a:t>
-            </a:r>
-            <a:endParaRPr lang="en-US" dirty="0"/>
-          </a:p>
-        </p:txBody>
-      </p:sp>
-      <p:sp>
-        <p:nvSpPr>
-          <p:cNvPr id="4" name="Slide Number Placeholder 3"/>
-          <p:cNvSpPr>
-            <a:spLocks noGrp="1"/>
-          </p:cNvSpPr>
-          <p:nvPr>
-            <p:ph type="sldNum" sz="quarter" idx="10"/>
-          </p:nvPr>
-        </p:nvSpPr>
-        <p:spPr/>
-        <p:txBody>
-          <a:bodyPr/>
-          <a:lstStyle/>
-          <a:p>
-            <a:fld id="{F7021451-1387-4CA6-816F-3879F97B5CBC}" type="slidenum">
-              <a:rPr lang="en-US"/>
-              <a:t>10</a:t>
-            </a:fld>
-            <a:endParaRPr lang="en-US"/>
-          </a:p>
-        </p:txBody>
-      </p:sp>
-    </p:spTree>
-    <p:extLst>
-      <p:ext uri="{BB962C8B-B14F-4D97-AF65-F5344CB8AC3E}">
-        <p14:creationId xmlns:p14="http://schemas.microsoft.com/office/powerpoint/2010/main" val="1024086991"/>
-      </p:ext>
-    </p:extLst>
-  </p:cSld>
-  <p:clrMapOvr>
-    <a:masterClrMapping/>
-  </p:clrMapOvr>
-</p:notes>
-</file>
-
 <file path=ppt/notesSlides/notesSlide2.xml><?xml version="1.0" encoding="utf-8"?>
 <p:notes xmlns:a="http://schemas.openxmlformats.org/drawingml/2006/main" xmlns:r="http://schemas.openxmlformats.org/officeDocument/2006/relationships" xmlns:p="http://schemas.openxmlformats.org/presentationml/2006/main">
   <p:cSld>
@@ -690,7 +600,7 @@
             <a:r>
               <a:rPr lang="en-US" dirty="0"/>
               <a:t>[운영 메모]
-'시스템 = 판단 횟수를 줄이는 장치'라는 프레임으로 설명하면 학생들이 필요성을 이해한다.</a:t>
+2주차 '어떤 인상으로 남을 것인가'와 연결해서 설명할 것.</a:t>
             </a:r>
             <a:endParaRPr lang="en-US" dirty="0"/>
           </a:p>
@@ -779,7 +689,7 @@
             <a:r>
               <a:rPr lang="en-US" dirty="0"/>
               <a:t>[운영 메모]
-2주차 '어떤 인상으로 남을 것인가'와 연결해서 설명할 것.</a:t>
+학생들이 배경과 장식에 힘을 주다 작업이 안 보이는 경우가 매년 나온다.</a:t>
             </a:r>
             <a:endParaRPr lang="en-US" dirty="0"/>
           </a:p>
@@ -868,7 +778,7 @@
             <a:r>
               <a:rPr lang="en-US" dirty="0"/>
               <a:t>[운영 메모]
-학생들이 배경과 장식에 힘을 주다 작업이 안 보이는 경우가 매년 나온다.</a:t>
+'강조색 하나' 원칙은 학생들이 가장 자주 어긴다. 실습 순회에서 확인할 것.</a:t>
             </a:r>
             <a:endParaRPr lang="en-US" dirty="0"/>
           </a:p>
@@ -957,7 +867,7 @@
             <a:r>
               <a:rPr lang="en-US" dirty="0"/>
               <a:t>[운영 메모]
-'강조색 하나' 원칙은 학생들이 가장 자주 어긴다. 실습 순회에서 확인할 것.</a:t>
+학생들이 서체를 3~4벌 섞는 경우가 많다. 굵기 차이로 충분하다는 점을 예시로 보일 것.</a:t>
             </a:r>
             <a:endParaRPr lang="en-US" dirty="0"/>
           </a:p>
@@ -1046,7 +956,7 @@
             <a:r>
               <a:rPr lang="en-US" dirty="0"/>
               <a:t>[운영 메모]
-학생들이 서체를 3~4벌 섞는 경우가 많다. 굵기 차이로 충분하다는 점을 예시로 보일 것.</a:t>
+템플릿을 화면에 띄우고 마진·단 수를 조정해 보이며 설명.</a:t>
             </a:r>
             <a:endParaRPr lang="en-US" dirty="0"/>
           </a:p>
@@ -1135,7 +1045,7 @@
             <a:r>
               <a:rPr lang="en-US" dirty="0"/>
               <a:t>[운영 메모]
-템플릿을 화면에 띄우고 마진·단 수를 조정해 보이며 설명.</a:t>
+그리드를 만들고 안 쓰는 학생이 많다. 10주차 실습에서 가이드를 켜둔 채 작업하게 할 것.</a:t>
             </a:r>
             <a:endParaRPr lang="en-US" dirty="0"/>
           </a:p>
@@ -1224,7 +1134,7 @@
             <a:r>
               <a:rPr lang="en-US" dirty="0"/>
               <a:t>[운영 메모]
-그리드를 만들고 안 쓰는 학생이 많다. 10주차 실습에서 가이드를 켜둔 채 작업하게 할 것.</a:t>
+마지막 적용 테스트가 검증 장치다. 여기서 안 맞으면 10주차에 전부 다시 해야 한다.</a:t>
             </a:r>
             <a:endParaRPr lang="en-US" dirty="0"/>
           </a:p>
@@ -1313,7 +1223,7 @@
             <a:r>
               <a:rPr lang="en-US" dirty="0"/>
               <a:t>[운영 메모]
-마지막 적용 테스트가 검증 장치다. 여기서 안 맞으면 10주차에 전부 다시 해야 한다.</a:t>
+표지·소개를 미리 만들게 하면 시스템의 문제가 10주차 전에 드러난다.</a:t>
             </a:r>
             <a:endParaRPr lang="en-US" dirty="0"/>
           </a:p>
@@ -2332,13 +2242,13 @@
 </p:sld>
 </file>
 
-<file path=ppt/slides/slide10.xml><?xml version="1.0" encoding="utf-8"?>
+<file path=ppt/slides/slide2.xml><?xml version="1.0" encoding="utf-8"?>
 <p:sld xmlns:a="http://schemas.openxmlformats.org/drawingml/2006/main" xmlns:r="http://schemas.openxmlformats.org/officeDocument/2006/relationships" xmlns:p="http://schemas.openxmlformats.org/presentationml/2006/main">
-  <p:cSld name="Slide 10">
+  <p:cSld name="Slide 2">
     <p:bg>
       <p:bgPr>
         <a:solidFill>
-          <a:srgbClr val="FFFFFF"/>
+          <a:srgbClr val="111111"/>
         </a:solidFill>
       </p:bgPr>
     </p:bg>
@@ -2383,7 +2293,7 @@
             <a:r>
               <a:rPr lang="en-US" sz="900" spc="120" kern="0" dirty="0">
                 <a:solidFill>
-                  <a:srgbClr val="8A8A8A"/>
+                  <a:srgbClr val="9A9A9A"/>
                 </a:solidFill>
                 <a:latin typeface="Pretendard" pitchFamily="34" charset="0"/>
                 <a:ea typeface="Pretendard" pitchFamily="34" charset="-122"/>
@@ -2422,7 +2332,7 @@
             <a:r>
               <a:rPr lang="en-US" sz="900" spc="120" kern="0" dirty="0">
                 <a:solidFill>
-                  <a:srgbClr val="8A8A8A"/>
+                  <a:srgbClr val="9A9A9A"/>
                 </a:solidFill>
                 <a:latin typeface="Pretendard" pitchFamily="34" charset="0"/>
                 <a:ea typeface="Pretendard" pitchFamily="34" charset="-122"/>
@@ -2461,7 +2371,7 @@
             <a:r>
               <a:rPr lang="en-US" sz="900" spc="200" kern="0" dirty="0">
                 <a:solidFill>
-                  <a:srgbClr val="8A8A8A"/>
+                  <a:srgbClr val="9A9A9A"/>
                 </a:solidFill>
                 <a:latin typeface="Pretendard" pitchFamily="34" charset="0"/>
                 <a:ea typeface="Pretendard" pitchFamily="34" charset="-122"/>
@@ -2483,697 +2393,6 @@
           <a:xfrm>
             <a:off x="640080" y="548640"/>
             <a:ext cx="10911535" cy="7315"/>
-          </a:xfrm>
-          <a:prstGeom prst="rect">
-            <a:avLst/>
-          </a:prstGeom>
-          <a:solidFill>
-            <a:srgbClr val="DCDCDC"/>
-          </a:solidFill>
-          <a:ln w="12700">
-            <a:solidFill>
-              <a:srgbClr val="DCDCDC"/>
-            </a:solidFill>
-            <a:prstDash val="solid"/>
-          </a:ln>
-        </p:spPr>
-      </p:sp>
-      <p:sp>
-        <p:nvSpPr>
-          <p:cNvPr id="6" name="Text 4"/>
-          <p:cNvSpPr/>
-          <p:nvPr/>
-        </p:nvSpPr>
-        <p:spPr>
-          <a:xfrm>
-            <a:off x="640080" y="640080"/>
-            <a:ext cx="10911535" cy="219456"/>
-          </a:xfrm>
-          <a:prstGeom prst="rect">
-            <a:avLst/>
-          </a:prstGeom>
-          <a:noFill/>
-          <a:ln/>
-        </p:spPr>
-        <p:txBody>
-          <a:bodyPr wrap="square" lIns="0" tIns="0" rIns="0" bIns="0" rtlCol="0" anchor="ctr"/>
-          <a:lstStyle/>
-          <a:p>
-            <a:pPr indent="0" marL="0">
-              <a:buNone/>
-            </a:pPr>
-            <a:r>
-              <a:rPr lang="en-US" sz="950" spc="260" kern="0" dirty="0">
-                <a:solidFill>
-                  <a:srgbClr val="8A8A8A"/>
-                </a:solidFill>
-                <a:latin typeface="Pretendard" pitchFamily="34" charset="0"/>
-                <a:ea typeface="Pretendard" pitchFamily="34" charset="-122"/>
-                <a:cs typeface="Pretendard" pitchFamily="34" charset="-120"/>
-              </a:rPr>
-              <a:t>HOMEWORK</a:t>
-            </a:r>
-            <a:endParaRPr lang="en-US" sz="950" dirty="0"/>
-          </a:p>
-        </p:txBody>
-      </p:sp>
-      <p:sp>
-        <p:nvSpPr>
-          <p:cNvPr id="7" name="Text 5"/>
-          <p:cNvSpPr/>
-          <p:nvPr/>
-        </p:nvSpPr>
-        <p:spPr>
-          <a:xfrm>
-            <a:off x="640080" y="859536"/>
-            <a:ext cx="10911535" cy="475488"/>
-          </a:xfrm>
-          <a:prstGeom prst="rect">
-            <a:avLst/>
-          </a:prstGeom>
-          <a:noFill/>
-          <a:ln/>
-        </p:spPr>
-        <p:txBody>
-          <a:bodyPr wrap="square" lIns="0" tIns="0" rIns="0" bIns="0" rtlCol="0" anchor="ctr"/>
-          <a:lstStyle/>
-          <a:p>
-            <a:pPr indent="0" marL="0">
-              <a:buNone/>
-            </a:pPr>
-            <a:r>
-              <a:rPr lang="en-US" sz="3000" dirty="0">
-                <a:solidFill>
-                  <a:srgbClr val="111111"/>
-                </a:solidFill>
-                <a:latin typeface="Pretendard SemiBold" pitchFamily="34" charset="0"/>
-                <a:ea typeface="Pretendard SemiBold" pitchFamily="34" charset="-122"/>
-                <a:cs typeface="Pretendard SemiBold" pitchFamily="34" charset="-120"/>
-              </a:rPr>
-              <a:t>과제와 다음 주</a:t>
-            </a:r>
-            <a:endParaRPr lang="en-US" sz="3000" dirty="0"/>
-          </a:p>
-        </p:txBody>
-      </p:sp>
-      <p:sp>
-        <p:nvSpPr>
-          <p:cNvPr id="8" name="Text 6"/>
-          <p:cNvSpPr/>
-          <p:nvPr/>
-        </p:nvSpPr>
-        <p:spPr>
-          <a:xfrm>
-            <a:off x="640080" y="1371600"/>
-            <a:ext cx="10911535" cy="219456"/>
-          </a:xfrm>
-          <a:prstGeom prst="rect">
-            <a:avLst/>
-          </a:prstGeom>
-          <a:noFill/>
-          <a:ln/>
-        </p:spPr>
-        <p:txBody>
-          <a:bodyPr wrap="square" lIns="0" tIns="0" rIns="0" bIns="0" rtlCol="0" anchor="ctr"/>
-          <a:lstStyle/>
-          <a:p>
-            <a:pPr indent="0" marL="0">
-              <a:buNone/>
-            </a:pPr>
-            <a:r>
-              <a:rPr lang="en-US" sz="1150" dirty="0">
-                <a:solidFill>
-                  <a:srgbClr val="6E6E6E"/>
-                </a:solidFill>
-                <a:latin typeface="Pretendard" pitchFamily="34" charset="0"/>
-                <a:ea typeface="Pretendard" pitchFamily="34" charset="-122"/>
-                <a:cs typeface="Pretendard" pitchFamily="34" charset="-120"/>
-              </a:rPr>
-              <a:t>10주차부터 실제 페이지를 만듭니다.</a:t>
-            </a:r>
-            <a:endParaRPr lang="en-US" sz="1150" dirty="0"/>
-          </a:p>
-        </p:txBody>
-      </p:sp>
-      <p:sp>
-        <p:nvSpPr>
-          <p:cNvPr id="9" name="Shape 7"/>
-          <p:cNvSpPr/>
-          <p:nvPr/>
-        </p:nvSpPr>
-        <p:spPr>
-          <a:xfrm>
-            <a:off x="640080" y="1719072"/>
-            <a:ext cx="6309360" cy="896112"/>
-          </a:xfrm>
-          <a:prstGeom prst="rect">
-            <a:avLst/>
-          </a:prstGeom>
-          <a:solidFill>
-            <a:srgbClr val="FFFFFF"/>
-          </a:solidFill>
-          <a:ln w="12700">
-            <a:solidFill>
-              <a:srgbClr val="DCDCDC"/>
-            </a:solidFill>
-            <a:prstDash val="solid"/>
-          </a:ln>
-        </p:spPr>
-      </p:sp>
-      <p:sp>
-        <p:nvSpPr>
-          <p:cNvPr id="10" name="Shape 8"/>
-          <p:cNvSpPr/>
-          <p:nvPr/>
-        </p:nvSpPr>
-        <p:spPr>
-          <a:xfrm>
-            <a:off x="969264" y="1993392"/>
-            <a:ext cx="329184" cy="329184"/>
-          </a:xfrm>
-          <a:prstGeom prst="ellipse">
-            <a:avLst/>
-          </a:prstGeom>
-          <a:solidFill>
-            <a:srgbClr val="111111"/>
-          </a:solidFill>
-          <a:ln w="12700">
-            <a:solidFill>
-              <a:srgbClr val="111111"/>
-            </a:solidFill>
-            <a:prstDash val="solid"/>
-          </a:ln>
-        </p:spPr>
-      </p:sp>
-      <p:sp>
-        <p:nvSpPr>
-          <p:cNvPr id="11" name="Text 9"/>
-          <p:cNvSpPr/>
-          <p:nvPr/>
-        </p:nvSpPr>
-        <p:spPr>
-          <a:xfrm>
-            <a:off x="969264" y="1993392"/>
-            <a:ext cx="329184" cy="329184"/>
-          </a:xfrm>
-          <a:prstGeom prst="rect">
-            <a:avLst/>
-          </a:prstGeom>
-          <a:noFill/>
-          <a:ln/>
-        </p:spPr>
-        <p:txBody>
-          <a:bodyPr wrap="square" lIns="0" tIns="0" rIns="0" bIns="0" rtlCol="0" anchor="ctr"/>
-          <a:lstStyle/>
-          <a:p>
-            <a:pPr algn="ctr" indent="0" marL="0">
-              <a:buNone/>
-            </a:pPr>
-            <a:r>
-              <a:rPr lang="en-US" sz="1100" b="1" dirty="0">
-                <a:solidFill>
-                  <a:srgbClr val="FFFFFF"/>
-                </a:solidFill>
-                <a:latin typeface="Pretendard" pitchFamily="34" charset="0"/>
-                <a:ea typeface="Pretendard" pitchFamily="34" charset="-122"/>
-                <a:cs typeface="Pretendard" pitchFamily="34" charset="-120"/>
-              </a:rPr>
-              <a:t>1</a:t>
-            </a:r>
-            <a:endParaRPr lang="en-US" sz="1100" dirty="0"/>
-          </a:p>
-        </p:txBody>
-      </p:sp>
-      <p:sp>
-        <p:nvSpPr>
-          <p:cNvPr id="12" name="Text 10"/>
-          <p:cNvSpPr/>
-          <p:nvPr/>
-        </p:nvSpPr>
-        <p:spPr>
-          <a:xfrm>
-            <a:off x="1426464" y="1810512"/>
-            <a:ext cx="5175504" cy="329184"/>
-          </a:xfrm>
-          <a:prstGeom prst="rect">
-            <a:avLst/>
-          </a:prstGeom>
-          <a:noFill/>
-          <a:ln/>
-        </p:spPr>
-        <p:txBody>
-          <a:bodyPr wrap="square" lIns="0" tIns="0" rIns="0" bIns="0" rtlCol="0" anchor="ctr"/>
-          <a:lstStyle/>
-          <a:p>
-            <a:pPr indent="0" marL="0">
-              <a:buNone/>
-            </a:pPr>
-            <a:r>
-              <a:rPr lang="en-US" sz="1400" dirty="0">
-                <a:solidFill>
-                  <a:srgbClr val="111111"/>
-                </a:solidFill>
-                <a:latin typeface="Pretendard SemiBold" pitchFamily="34" charset="0"/>
-                <a:ea typeface="Pretendard SemiBold" pitchFamily="34" charset="-122"/>
-                <a:cs typeface="Pretendard SemiBold" pitchFamily="34" charset="-120"/>
-              </a:rPr>
-              <a:t>무드보드 · 레이아웃 시스템 제작</a:t>
-            </a:r>
-            <a:endParaRPr lang="en-US" sz="1400" dirty="0"/>
-          </a:p>
-        </p:txBody>
-      </p:sp>
-      <p:sp>
-        <p:nvSpPr>
-          <p:cNvPr id="13" name="Text 11"/>
-          <p:cNvSpPr/>
-          <p:nvPr/>
-        </p:nvSpPr>
-        <p:spPr>
-          <a:xfrm>
-            <a:off x="1426464" y="2121408"/>
-            <a:ext cx="5175504" cy="420624"/>
-          </a:xfrm>
-          <a:prstGeom prst="rect">
-            <a:avLst/>
-          </a:prstGeom>
-          <a:noFill/>
-          <a:ln/>
-        </p:spPr>
-        <p:txBody>
-          <a:bodyPr wrap="square" lIns="0" tIns="0" rIns="0" bIns="0" rtlCol="0" anchor="t"/>
-          <a:lstStyle/>
-          <a:p>
-            <a:pPr indent="0" marL="0">
-              <a:lnSpc>
-                <a:spcPct val="122000"/>
-              </a:lnSpc>
-              <a:buNone/>
-            </a:pPr>
-            <a:r>
-              <a:rPr lang="en-US" sz="1100" dirty="0">
-                <a:solidFill>
-                  <a:srgbClr val="6E6E6E"/>
-                </a:solidFill>
-                <a:latin typeface="Pretendard" pitchFamily="34" charset="0"/>
-                <a:ea typeface="Pretendard" pitchFamily="34" charset="-122"/>
-                <a:cs typeface="Pretendard" pitchFamily="34" charset="-120"/>
-              </a:rPr>
-              <a:t>컬러 팔레트 · 타이포 스케일 · 그리드 규격을 한 장으로 정리합니다. 이 한 장이 학기 후반의 기준 문서입니다.</a:t>
-            </a:r>
-            <a:endParaRPr lang="en-US" sz="1100" dirty="0"/>
-          </a:p>
-        </p:txBody>
-      </p:sp>
-      <p:sp>
-        <p:nvSpPr>
-          <p:cNvPr id="14" name="Shape 12"/>
-          <p:cNvSpPr/>
-          <p:nvPr/>
-        </p:nvSpPr>
-        <p:spPr>
-          <a:xfrm>
-            <a:off x="640080" y="2743200"/>
-            <a:ext cx="6309360" cy="896112"/>
-          </a:xfrm>
-          <a:prstGeom prst="rect">
-            <a:avLst/>
-          </a:prstGeom>
-          <a:solidFill>
-            <a:srgbClr val="FFFFFF"/>
-          </a:solidFill>
-          <a:ln w="12700">
-            <a:solidFill>
-              <a:srgbClr val="DCDCDC"/>
-            </a:solidFill>
-            <a:prstDash val="solid"/>
-          </a:ln>
-        </p:spPr>
-      </p:sp>
-      <p:sp>
-        <p:nvSpPr>
-          <p:cNvPr id="15" name="Shape 13"/>
-          <p:cNvSpPr/>
-          <p:nvPr/>
-        </p:nvSpPr>
-        <p:spPr>
-          <a:xfrm>
-            <a:off x="969264" y="3017520"/>
-            <a:ext cx="329184" cy="329184"/>
-          </a:xfrm>
-          <a:prstGeom prst="ellipse">
-            <a:avLst/>
-          </a:prstGeom>
-          <a:solidFill>
-            <a:srgbClr val="111111"/>
-          </a:solidFill>
-          <a:ln w="12700">
-            <a:solidFill>
-              <a:srgbClr val="111111"/>
-            </a:solidFill>
-            <a:prstDash val="solid"/>
-          </a:ln>
-        </p:spPr>
-      </p:sp>
-      <p:sp>
-        <p:nvSpPr>
-          <p:cNvPr id="16" name="Text 14"/>
-          <p:cNvSpPr/>
-          <p:nvPr/>
-        </p:nvSpPr>
-        <p:spPr>
-          <a:xfrm>
-            <a:off x="969264" y="3017520"/>
-            <a:ext cx="329184" cy="329184"/>
-          </a:xfrm>
-          <a:prstGeom prst="rect">
-            <a:avLst/>
-          </a:prstGeom>
-          <a:noFill/>
-          <a:ln/>
-        </p:spPr>
-        <p:txBody>
-          <a:bodyPr wrap="square" lIns="0" tIns="0" rIns="0" bIns="0" rtlCol="0" anchor="ctr"/>
-          <a:lstStyle/>
-          <a:p>
-            <a:pPr algn="ctr" indent="0" marL="0">
-              <a:buNone/>
-            </a:pPr>
-            <a:r>
-              <a:rPr lang="en-US" sz="1100" b="1" dirty="0">
-                <a:solidFill>
-                  <a:srgbClr val="FFFFFF"/>
-                </a:solidFill>
-                <a:latin typeface="Pretendard" pitchFamily="34" charset="0"/>
-                <a:ea typeface="Pretendard" pitchFamily="34" charset="-122"/>
-                <a:cs typeface="Pretendard" pitchFamily="34" charset="-120"/>
-              </a:rPr>
-              <a:t>2</a:t>
-            </a:r>
-            <a:endParaRPr lang="en-US" sz="1100" dirty="0"/>
-          </a:p>
-        </p:txBody>
-      </p:sp>
-      <p:sp>
-        <p:nvSpPr>
-          <p:cNvPr id="17" name="Text 15"/>
-          <p:cNvSpPr/>
-          <p:nvPr/>
-        </p:nvSpPr>
-        <p:spPr>
-          <a:xfrm>
-            <a:off x="1426464" y="2834640"/>
-            <a:ext cx="5175504" cy="329184"/>
-          </a:xfrm>
-          <a:prstGeom prst="rect">
-            <a:avLst/>
-          </a:prstGeom>
-          <a:noFill/>
-          <a:ln/>
-        </p:spPr>
-        <p:txBody>
-          <a:bodyPr wrap="square" lIns="0" tIns="0" rIns="0" bIns="0" rtlCol="0" anchor="ctr"/>
-          <a:lstStyle/>
-          <a:p>
-            <a:pPr indent="0" marL="0">
-              <a:buNone/>
-            </a:pPr>
-            <a:r>
-              <a:rPr lang="en-US" sz="1400" dirty="0">
-                <a:solidFill>
-                  <a:srgbClr val="111111"/>
-                </a:solidFill>
-                <a:latin typeface="Pretendard SemiBold" pitchFamily="34" charset="0"/>
-                <a:ea typeface="Pretendard SemiBold" pitchFamily="34" charset="-122"/>
-                <a:cs typeface="Pretendard SemiBold" pitchFamily="34" charset="-120"/>
-              </a:rPr>
-              <a:t>표지와 소개 페이지 시안</a:t>
-            </a:r>
-            <a:endParaRPr lang="en-US" sz="1400" dirty="0"/>
-          </a:p>
-        </p:txBody>
-      </p:sp>
-      <p:sp>
-        <p:nvSpPr>
-          <p:cNvPr id="18" name="Text 16"/>
-          <p:cNvSpPr/>
-          <p:nvPr/>
-        </p:nvSpPr>
-        <p:spPr>
-          <a:xfrm>
-            <a:off x="1426464" y="3145536"/>
-            <a:ext cx="5175504" cy="420624"/>
-          </a:xfrm>
-          <a:prstGeom prst="rect">
-            <a:avLst/>
-          </a:prstGeom>
-          <a:noFill/>
-          <a:ln/>
-        </p:spPr>
-        <p:txBody>
-          <a:bodyPr wrap="square" lIns="0" tIns="0" rIns="0" bIns="0" rtlCol="0" anchor="t"/>
-          <a:lstStyle/>
-          <a:p>
-            <a:pPr indent="0" marL="0">
-              <a:lnSpc>
-                <a:spcPct val="122000"/>
-              </a:lnSpc>
-              <a:buNone/>
-            </a:pPr>
-            <a:r>
-              <a:rPr lang="en-US" sz="1100" dirty="0">
-                <a:solidFill>
-                  <a:srgbClr val="6E6E6E"/>
-                </a:solidFill>
-                <a:latin typeface="Pretendard" pitchFamily="34" charset="0"/>
-                <a:ea typeface="Pretendard" pitchFamily="34" charset="-122"/>
-                <a:cs typeface="Pretendard" pitchFamily="34" charset="-120"/>
-              </a:rPr>
-              <a:t>만든 시스템을 적용해 표지 1장, 소개 1장을 만들어 봅니다. 시스템이 실제로 작동하는지 확인하는 용도입니다.</a:t>
-            </a:r>
-            <a:endParaRPr lang="en-US" sz="1100" dirty="0"/>
-          </a:p>
-        </p:txBody>
-      </p:sp>
-      <p:sp>
-        <p:nvSpPr>
-          <p:cNvPr id="19" name="Shape 17"/>
-          <p:cNvSpPr/>
-          <p:nvPr/>
-        </p:nvSpPr>
-        <p:spPr>
-          <a:xfrm>
-            <a:off x="640080" y="3785616"/>
-            <a:ext cx="6309360" cy="7315"/>
-          </a:xfrm>
-          <a:prstGeom prst="rect">
-            <a:avLst/>
-          </a:prstGeom>
-          <a:solidFill>
-            <a:srgbClr val="111111"/>
-          </a:solidFill>
-          <a:ln w="12700">
-            <a:solidFill>
-              <a:srgbClr val="111111"/>
-            </a:solidFill>
-            <a:prstDash val="solid"/>
-          </a:ln>
-        </p:spPr>
-      </p:sp>
-      <p:sp>
-        <p:nvSpPr>
-          <p:cNvPr id="20" name="Text 18"/>
-          <p:cNvSpPr/>
-          <p:nvPr/>
-        </p:nvSpPr>
-        <p:spPr>
-          <a:xfrm>
-            <a:off x="640080" y="3877056"/>
-            <a:ext cx="6309360" cy="329184"/>
-          </a:xfrm>
-          <a:prstGeom prst="rect">
-            <a:avLst/>
-          </a:prstGeom>
-          <a:noFill/>
-          <a:ln/>
-        </p:spPr>
-        <p:txBody>
-          <a:bodyPr wrap="square" lIns="0" tIns="0" rIns="0" bIns="0" rtlCol="0" anchor="ctr"/>
-          <a:lstStyle/>
-          <a:p>
-            <a:pPr indent="0" marL="0">
-              <a:buNone/>
-            </a:pPr>
-            <a:r>
-              <a:rPr lang="en-US" sz="1200" b="1" dirty="0">
-                <a:solidFill>
-                  <a:srgbClr val="111111"/>
-                </a:solidFill>
-                <a:latin typeface="Pretendard" pitchFamily="34" charset="0"/>
-                <a:ea typeface="Pretendard" pitchFamily="34" charset="-122"/>
-                <a:cs typeface="Pretendard" pitchFamily="34" charset="-120"/>
-              </a:rPr>
-              <a:t>제출 — 10주차 수업 전까지 · 클래스룸 업로드</a:t>
-            </a:r>
-            <a:endParaRPr lang="en-US" sz="1200" dirty="0"/>
-          </a:p>
-        </p:txBody>
-      </p:sp>
-      <p:sp>
-        <p:nvSpPr>
-          <p:cNvPr id="21" name="Shape 19"/>
-          <p:cNvSpPr/>
-          <p:nvPr/>
-        </p:nvSpPr>
-        <p:spPr>
-          <a:xfrm>
-            <a:off x="7351776" y="1719072"/>
-            <a:ext cx="4199839" cy="3803904"/>
-          </a:xfrm>
-          <a:prstGeom prst="rect">
-            <a:avLst/>
-          </a:prstGeom>
-          <a:solidFill>
-            <a:srgbClr val="111111"/>
-          </a:solidFill>
-          <a:ln w="12700">
-            <a:solidFill>
-              <a:srgbClr val="111111"/>
-            </a:solidFill>
-            <a:prstDash val="solid"/>
-          </a:ln>
-        </p:spPr>
-      </p:sp>
-      <p:sp>
-        <p:nvSpPr>
-          <p:cNvPr id="22" name="Text 20"/>
-          <p:cNvSpPr/>
-          <p:nvPr/>
-        </p:nvSpPr>
-        <p:spPr>
-          <a:xfrm>
-            <a:off x="7735824" y="1993392"/>
-            <a:ext cx="3431743" cy="256032"/>
-          </a:xfrm>
-          <a:prstGeom prst="rect">
-            <a:avLst/>
-          </a:prstGeom>
-          <a:noFill/>
-          <a:ln/>
-        </p:spPr>
-        <p:txBody>
-          <a:bodyPr wrap="square" lIns="0" tIns="0" rIns="0" bIns="0" rtlCol="0" anchor="ctr"/>
-          <a:lstStyle/>
-          <a:p>
-            <a:pPr indent="0" marL="0">
-              <a:buNone/>
-            </a:pPr>
-            <a:r>
-              <a:rPr lang="en-US" sz="950" spc="260" kern="0" dirty="0">
-                <a:solidFill>
-                  <a:srgbClr val="9A9A9A"/>
-                </a:solidFill>
-                <a:latin typeface="Pretendard" pitchFamily="34" charset="0"/>
-                <a:ea typeface="Pretendard" pitchFamily="34" charset="-122"/>
-                <a:cs typeface="Pretendard" pitchFamily="34" charset="-120"/>
-              </a:rPr>
-              <a:t>NEXT WEEK</a:t>
-            </a:r>
-            <a:endParaRPr lang="en-US" sz="950" dirty="0"/>
-          </a:p>
-        </p:txBody>
-      </p:sp>
-      <p:sp>
-        <p:nvSpPr>
-          <p:cNvPr id="23" name="Text 21"/>
-          <p:cNvSpPr/>
-          <p:nvPr/>
-        </p:nvSpPr>
-        <p:spPr>
-          <a:xfrm>
-            <a:off x="7735824" y="2286000"/>
-            <a:ext cx="3431743" cy="402336"/>
-          </a:xfrm>
-          <a:prstGeom prst="rect">
-            <a:avLst/>
-          </a:prstGeom>
-          <a:noFill/>
-          <a:ln/>
-        </p:spPr>
-        <p:txBody>
-          <a:bodyPr wrap="square" lIns="0" tIns="0" rIns="0" bIns="0" rtlCol="0" anchor="ctr"/>
-          <a:lstStyle/>
-          <a:p>
-            <a:pPr indent="0" marL="0">
-              <a:buNone/>
-            </a:pPr>
-            <a:r>
-              <a:rPr lang="en-US" sz="2600" dirty="0">
-                <a:solidFill>
-                  <a:srgbClr val="FFFFFF"/>
-                </a:solidFill>
-                <a:latin typeface="Pretendard Light" pitchFamily="34" charset="0"/>
-                <a:ea typeface="Pretendard Light" pitchFamily="34" charset="-122"/>
-                <a:cs typeface="Pretendard Light" pitchFamily="34" charset="-120"/>
-              </a:rPr>
-              <a:t>10주차</a:t>
-            </a:r>
-            <a:endParaRPr lang="en-US" sz="2600" dirty="0"/>
-          </a:p>
-        </p:txBody>
-      </p:sp>
-      <p:sp>
-        <p:nvSpPr>
-          <p:cNvPr id="24" name="Text 22"/>
-          <p:cNvSpPr/>
-          <p:nvPr/>
-        </p:nvSpPr>
-        <p:spPr>
-          <a:xfrm>
-            <a:off x="7735824" y="2743200"/>
-            <a:ext cx="3431743" cy="512064"/>
-          </a:xfrm>
-          <a:prstGeom prst="rect">
-            <a:avLst/>
-          </a:prstGeom>
-          <a:noFill/>
-          <a:ln/>
-        </p:spPr>
-        <p:txBody>
-          <a:bodyPr wrap="square" lIns="0" tIns="0" rIns="0" bIns="0" rtlCol="0" anchor="t"/>
-          <a:lstStyle/>
-          <a:p>
-            <a:pPr indent="0" marL="0">
-              <a:lnSpc>
-                <a:spcPct val="116000"/>
-              </a:lnSpc>
-              <a:buNone/>
-            </a:pPr>
-            <a:r>
-              <a:rPr lang="en-US" sz="1700" dirty="0">
-                <a:solidFill>
-                  <a:srgbClr val="FFFFFF"/>
-                </a:solidFill>
-                <a:latin typeface="Pretendard SemiBold" pitchFamily="34" charset="0"/>
-                <a:ea typeface="Pretendard SemiBold" pitchFamily="34" charset="-122"/>
-                <a:cs typeface="Pretendard SemiBold" pitchFamily="34" charset="-120"/>
-              </a:rPr>
-              <a:t>편집디자인 실습 Ⅰ</a:t>
-            </a:r>
-            <a:endParaRPr lang="en-US" sz="1700" dirty="0"/>
-          </a:p>
-        </p:txBody>
-      </p:sp>
-      <p:sp>
-        <p:nvSpPr>
-          <p:cNvPr id="25" name="Shape 23"/>
-          <p:cNvSpPr/>
-          <p:nvPr/>
-        </p:nvSpPr>
-        <p:spPr>
-          <a:xfrm>
-            <a:off x="7735824" y="3346704"/>
-            <a:ext cx="3431743" cy="7315"/>
           </a:xfrm>
           <a:prstGeom prst="rect">
             <a:avLst/>
@@ -3191,142 +2410,61 @@
       </p:sp>
       <p:sp>
         <p:nvSpPr>
-          <p:cNvPr id="26" name="Text 24"/>
-          <p:cNvSpPr/>
-          <p:nvPr/>
-        </p:nvSpPr>
-        <p:spPr>
-          <a:xfrm>
-            <a:off x="7735824" y="3493008"/>
-            <a:ext cx="3431743" cy="1170432"/>
-          </a:xfrm>
-          <a:prstGeom prst="rect">
-            <a:avLst/>
-          </a:prstGeom>
-          <a:noFill/>
-          <a:ln/>
-        </p:spPr>
-        <p:txBody>
-          <a:bodyPr wrap="square" lIns="0" tIns="0" rIns="0" bIns="0" rtlCol="0" anchor="t"/>
-          <a:lstStyle/>
-          <a:p>
-            <a:pPr marL="177800" indent="-177800">
-              <a:lnSpc>
-                <a:spcPct val="120000"/>
-              </a:lnSpc>
-              <a:spcAft>
-                <a:spcPts val="600"/>
-              </a:spcAft>
-              <a:buSzPct val="100000"/>
-              <a:buChar char="•"/>
-            </a:pPr>
-            <a:r>
-              <a:rPr lang="en-US" sz="1150" dirty="0">
-                <a:solidFill>
-                  <a:srgbClr val="DDDDDD"/>
-                </a:solidFill>
-                <a:latin typeface="Pretendard" pitchFamily="34" charset="0"/>
-                <a:ea typeface="Pretendard" pitchFamily="34" charset="-122"/>
-                <a:cs typeface="Pretendard" pitchFamily="34" charset="-120"/>
-              </a:rPr>
-              <a:t>타이포그래피 위계 — 제목 · 본문 · 캡션</a:t>
-            </a:r>
-            <a:endParaRPr lang="en-US" sz="1150" dirty="0"/>
-          </a:p>
-          <a:p>
-            <a:pPr marL="177800" indent="-177800">
-              <a:lnSpc>
-                <a:spcPct val="120000"/>
-              </a:lnSpc>
-              <a:spcAft>
-                <a:spcPts val="600"/>
-              </a:spcAft>
-              <a:buSzPct val="100000"/>
-              <a:buChar char="•"/>
-            </a:pPr>
-            <a:r>
-              <a:rPr lang="en-US" sz="1150" dirty="0">
-                <a:solidFill>
-                  <a:srgbClr val="DDDDDD"/>
-                </a:solidFill>
-                <a:latin typeface="Pretendard" pitchFamily="34" charset="0"/>
-                <a:ea typeface="Pretendard" pitchFamily="34" charset="-122"/>
-                <a:cs typeface="Pretendard" pitchFamily="34" charset="-120"/>
-              </a:rPr>
-              <a:t>그리드 적용 실습</a:t>
-            </a:r>
-            <a:endParaRPr lang="en-US" sz="1150" dirty="0"/>
-          </a:p>
-          <a:p>
-            <a:pPr marL="177800" indent="-177800">
-              <a:lnSpc>
-                <a:spcPct val="120000"/>
-              </a:lnSpc>
-              <a:spcAft>
-                <a:spcPts val="600"/>
-              </a:spcAft>
-              <a:buSzPct val="100000"/>
-              <a:buChar char="•"/>
-            </a:pPr>
-            <a:r>
-              <a:rPr lang="en-US" sz="1150" dirty="0">
-                <a:solidFill>
-                  <a:srgbClr val="DDDDDD"/>
-                </a:solidFill>
-                <a:latin typeface="Pretendard" pitchFamily="34" charset="0"/>
-                <a:ea typeface="Pretendard" pitchFamily="34" charset="-122"/>
-                <a:cs typeface="Pretendard" pitchFamily="34" charset="-120"/>
-              </a:rPr>
-              <a:t>여백과 정렬</a:t>
-            </a:r>
-            <a:endParaRPr lang="en-US" sz="1150" dirty="0"/>
-          </a:p>
-          <a:p>
-            <a:pPr marL="177800" indent="-177800">
-              <a:lnSpc>
-                <a:spcPct val="120000"/>
-              </a:lnSpc>
-              <a:spcAft>
-                <a:spcPts val="600"/>
-              </a:spcAft>
-              <a:buSzPct val="100000"/>
-              <a:buChar char="•"/>
-            </a:pPr>
-            <a:r>
-              <a:rPr lang="en-US" sz="1150" dirty="0">
-                <a:solidFill>
-                  <a:srgbClr val="DDDDDD"/>
-                </a:solidFill>
-                <a:latin typeface="Pretendard" pitchFamily="34" charset="0"/>
-                <a:ea typeface="Pretendard" pitchFamily="34" charset="-122"/>
-                <a:cs typeface="Pretendard" pitchFamily="34" charset="-120"/>
-              </a:rPr>
-              <a:t>포트폴리오 페이지 3장 제작</a:t>
-            </a:r>
-            <a:endParaRPr lang="en-US" sz="1150" dirty="0"/>
-          </a:p>
-        </p:txBody>
-      </p:sp>
-      <p:sp>
-        <p:nvSpPr>
-          <p:cNvPr id="27" name="Shape 25"/>
-          <p:cNvSpPr/>
-          <p:nvPr/>
-        </p:nvSpPr>
-        <p:spPr>
-          <a:xfrm>
-            <a:off x="7735824" y="4700016"/>
-            <a:ext cx="3431743" cy="7315"/>
-          </a:xfrm>
-          <a:prstGeom prst="rect">
-            <a:avLst/>
-          </a:prstGeom>
-          <a:solidFill>
-            <a:srgbClr val="333333"/>
-          </a:solidFill>
-          <a:ln w="12700">
+          <p:cNvPr id="6" name="Text 4"/>
+          <p:cNvSpPr/>
+          <p:nvPr/>
+        </p:nvSpPr>
+        <p:spPr>
+          <a:xfrm>
+            <a:off x="7345375" y="1737360"/>
+            <a:ext cx="4206240" cy="3291840"/>
+          </a:xfrm>
+          <a:prstGeom prst="rect">
+            <a:avLst/>
+          </a:prstGeom>
+          <a:noFill/>
+          <a:ln/>
+        </p:spPr>
+        <p:txBody>
+          <a:bodyPr wrap="square" lIns="0" tIns="0" rIns="0" bIns="0" rtlCol="0" anchor="ctr"/>
+          <a:lstStyle/>
+          <a:p>
+            <a:pPr algn="r" indent="0" marL="0">
+              <a:buNone/>
+            </a:pPr>
+            <a:r>
+              <a:rPr lang="en-US" sz="20000" dirty="0">
+                <a:solidFill>
+                  <a:srgbClr val="1B1B1B"/>
+                </a:solidFill>
+                <a:latin typeface="Pretendard SemiBold" pitchFamily="34" charset="0"/>
+                <a:ea typeface="Pretendard SemiBold" pitchFamily="34" charset="-122"/>
+                <a:cs typeface="Pretendard SemiBold" pitchFamily="34" charset="-120"/>
+              </a:rPr>
+              <a:t>01</a:t>
+            </a:r>
+            <a:endParaRPr lang="en-US" sz="20000" dirty="0"/>
+          </a:p>
+        </p:txBody>
+      </p:sp>
+      <p:sp>
+        <p:nvSpPr>
+          <p:cNvPr id="7" name="Shape 5"/>
+          <p:cNvSpPr/>
+          <p:nvPr/>
+        </p:nvSpPr>
+        <p:spPr>
+          <a:xfrm>
+            <a:off x="941832" y="1371600"/>
+            <a:ext cx="0" cy="603504"/>
+          </a:xfrm>
+          <a:prstGeom prst="line">
+            <a:avLst/>
+          </a:prstGeom>
+          <a:noFill/>
+          <a:ln w="15875">
             <a:solidFill>
-              <a:srgbClr val="333333"/>
+              <a:srgbClr val="FFFFFF"/>
             </a:solidFill>
             <a:prstDash val="solid"/>
           </a:ln>
@@ -3334,105 +2472,22 @@
       </p:sp>
       <p:sp>
         <p:nvSpPr>
-          <p:cNvPr id="28" name="Text 26"/>
-          <p:cNvSpPr/>
-          <p:nvPr/>
-        </p:nvSpPr>
-        <p:spPr>
-          <a:xfrm>
-            <a:off x="7735824" y="4809744"/>
-            <a:ext cx="3431743" cy="237744"/>
-          </a:xfrm>
-          <a:prstGeom prst="rect">
-            <a:avLst/>
-          </a:prstGeom>
-          <a:noFill/>
-          <a:ln/>
-        </p:spPr>
-        <p:txBody>
-          <a:bodyPr wrap="square" lIns="0" tIns="0" rIns="0" bIns="0" rtlCol="0" anchor="ctr"/>
-          <a:lstStyle/>
-          <a:p>
-            <a:pPr indent="0" marL="0">
-              <a:buNone/>
-            </a:pPr>
-            <a:r>
-              <a:rPr lang="en-US" sz="900" spc="160" kern="0" dirty="0">
-                <a:solidFill>
-                  <a:srgbClr val="9B9B9B"/>
-                </a:solidFill>
-                <a:latin typeface="Pretendard" pitchFamily="34" charset="0"/>
-                <a:ea typeface="Pretendard" pitchFamily="34" charset="-122"/>
-                <a:cs typeface="Pretendard" pitchFamily="34" charset="-120"/>
-              </a:rPr>
-              <a:t>미리 준비할 것</a:t>
-            </a:r>
-            <a:endParaRPr lang="en-US" sz="900" dirty="0"/>
-          </a:p>
-        </p:txBody>
-      </p:sp>
-      <p:sp>
-        <p:nvSpPr>
-          <p:cNvPr id="29" name="Text 27"/>
-          <p:cNvSpPr/>
-          <p:nvPr/>
-        </p:nvSpPr>
-        <p:spPr>
-          <a:xfrm>
-            <a:off x="7735824" y="5065776"/>
-            <a:ext cx="3431743" cy="457200"/>
-          </a:xfrm>
-          <a:prstGeom prst="rect">
-            <a:avLst/>
-          </a:prstGeom>
-          <a:noFill/>
-          <a:ln/>
-        </p:spPr>
-        <p:txBody>
-          <a:bodyPr wrap="square" lIns="0" tIns="0" rIns="0" bIns="0" rtlCol="0" anchor="t"/>
-          <a:lstStyle/>
-          <a:p>
-            <a:pPr indent="0" marL="0">
-              <a:lnSpc>
-                <a:spcPct val="120000"/>
-              </a:lnSpc>
-              <a:buNone/>
-            </a:pPr>
-            <a:r>
-              <a:rPr lang="en-US" sz="1100" b="1" dirty="0">
-                <a:solidFill>
-                  <a:srgbClr val="FFFFFF"/>
-                </a:solidFill>
-                <a:latin typeface="Pretendard" pitchFamily="34" charset="0"/>
-                <a:ea typeface="Pretendard" pitchFamily="34" charset="-122"/>
-                <a:cs typeface="Pretendard" pitchFamily="34" charset="-120"/>
-              </a:rPr>
-              <a:t>무드보드 · 그리드 시스템 · 프로젝트 자료 · 노트북</a:t>
-            </a:r>
-            <a:endParaRPr lang="en-US" sz="1100" dirty="0"/>
-          </a:p>
-        </p:txBody>
-      </p:sp>
-      <p:sp>
-        <p:nvSpPr>
-          <p:cNvPr id="30" name="Shape 28"/>
-          <p:cNvSpPr/>
-          <p:nvPr/>
-        </p:nvSpPr>
-        <p:spPr>
-          <a:xfrm>
-            <a:off x="640080" y="6291072"/>
-            <a:ext cx="10911535" cy="7315"/>
-          </a:xfrm>
-          <a:prstGeom prst="rect">
-            <a:avLst/>
-          </a:prstGeom>
-          <a:solidFill>
-            <a:srgbClr val="DCDCDC"/>
-          </a:solidFill>
-          <a:ln w="12700">
+          <p:cNvPr id="8" name="Shape 6"/>
+          <p:cNvSpPr/>
+          <p:nvPr/>
+        </p:nvSpPr>
+        <p:spPr>
+          <a:xfrm>
+            <a:off x="640080" y="1733702"/>
+            <a:ext cx="301752" cy="241402"/>
+          </a:xfrm>
+          <a:prstGeom prst="line">
+            <a:avLst/>
+          </a:prstGeom>
+          <a:noFill/>
+          <a:ln w="15875">
             <a:solidFill>
-              <a:srgbClr val="DCDCDC"/>
+              <a:srgbClr val="FFFFFF"/>
             </a:solidFill>
             <a:prstDash val="solid"/>
           </a:ln>
@@ -3440,251 +2495,22 @@
       </p:sp>
       <p:sp>
         <p:nvSpPr>
-          <p:cNvPr id="31" name="Text 29"/>
-          <p:cNvSpPr/>
-          <p:nvPr/>
-        </p:nvSpPr>
-        <p:spPr>
-          <a:xfrm>
-            <a:off x="640080" y="6382512"/>
-            <a:ext cx="7772400" cy="237744"/>
-          </a:xfrm>
-          <a:prstGeom prst="rect">
-            <a:avLst/>
-          </a:prstGeom>
-          <a:noFill/>
-          <a:ln/>
-        </p:spPr>
-        <p:txBody>
-          <a:bodyPr wrap="square" lIns="0" tIns="0" rIns="0" bIns="0" rtlCol="0" anchor="ctr"/>
-          <a:lstStyle/>
-          <a:p>
-            <a:pPr indent="0" marL="0">
-              <a:buNone/>
-            </a:pPr>
-            <a:r>
-              <a:rPr lang="en-US" sz="850" spc="40" kern="0" dirty="0">
-                <a:solidFill>
-                  <a:srgbClr val="9B9B9B"/>
-                </a:solidFill>
-                <a:latin typeface="Pretendard" pitchFamily="34" charset="0"/>
-                <a:ea typeface="Pretendard" pitchFamily="34" charset="-122"/>
-                <a:cs typeface="Pretendard" pitchFamily="34" charset="-120"/>
-              </a:rPr>
-              <a:t>포트폴리오제작 · 9주차 비주얼 아이덴티티 / 레이아웃 기획</a:t>
-            </a:r>
-            <a:endParaRPr lang="en-US" sz="850" dirty="0"/>
-          </a:p>
-        </p:txBody>
-      </p:sp>
-      <p:sp>
-        <p:nvSpPr>
-          <p:cNvPr id="32" name="Text 30"/>
-          <p:cNvSpPr/>
-          <p:nvPr/>
-        </p:nvSpPr>
-        <p:spPr>
-          <a:xfrm>
-            <a:off x="10271455" y="6382512"/>
-            <a:ext cx="1280160" cy="237744"/>
-          </a:xfrm>
-          <a:prstGeom prst="rect">
-            <a:avLst/>
-          </a:prstGeom>
-          <a:noFill/>
-          <a:ln/>
-        </p:spPr>
-        <p:txBody>
-          <a:bodyPr wrap="square" lIns="0" tIns="0" rIns="0" bIns="0" rtlCol="0" anchor="ctr"/>
-          <a:lstStyle/>
-          <a:p>
-            <a:pPr algn="r" indent="0" marL="0">
-              <a:buNone/>
-            </a:pPr>
-            <a:r>
-              <a:rPr lang="en-US" sz="850" spc="140" kern="0" dirty="0">
-                <a:solidFill>
-                  <a:srgbClr val="9B9B9B"/>
-                </a:solidFill>
-                <a:latin typeface="Pretendard" pitchFamily="34" charset="0"/>
-                <a:ea typeface="Pretendard" pitchFamily="34" charset="-122"/>
-                <a:cs typeface="Pretendard" pitchFamily="34" charset="-120"/>
-              </a:rPr>
-              <a:t>P.06</a:t>
-            </a:r>
-            <a:endParaRPr lang="en-US" sz="850" dirty="0"/>
-          </a:p>
-        </p:txBody>
-      </p:sp>
-    </p:spTree>
-  </p:cSld>
-  <p:clrMapOvr>
-    <a:masterClrMapping/>
-  </p:clrMapOvr>
-</p:sld>
-</file>
-
-<file path=ppt/slides/slide2.xml><?xml version="1.0" encoding="utf-8"?>
-<p:sld xmlns:a="http://schemas.openxmlformats.org/drawingml/2006/main" xmlns:r="http://schemas.openxmlformats.org/officeDocument/2006/relationships" xmlns:p="http://schemas.openxmlformats.org/presentationml/2006/main">
-  <p:cSld name="Slide 2">
-    <p:bg>
-      <p:bgPr>
-        <a:solidFill>
-          <a:srgbClr val="FFFFFF"/>
-        </a:solidFill>
-      </p:bgPr>
-    </p:bg>
-    <p:spTree>
-      <p:nvGrpSpPr>
-        <p:cNvPr id="1" name=""/>
-        <p:cNvGrpSpPr/>
-        <p:nvPr/>
-      </p:nvGrpSpPr>
-      <p:grpSpPr>
-        <a:xfrm>
-          <a:off x="0" y="0"/>
-          <a:ext cx="0" cy="0"/>
-          <a:chOff x="0" y="0"/>
-          <a:chExt cx="0" cy="0"/>
-        </a:xfrm>
-      </p:grpSpPr>
-      <p:sp>
-        <p:nvSpPr>
-          <p:cNvPr id="2" name="Text 0"/>
-          <p:cNvSpPr/>
-          <p:nvPr/>
-        </p:nvSpPr>
-        <p:spPr>
-          <a:xfrm>
-            <a:off x="640080" y="274320"/>
-            <a:ext cx="3657600" cy="219456"/>
-          </a:xfrm>
-          <a:prstGeom prst="rect">
-            <a:avLst/>
-          </a:prstGeom>
-          <a:noFill/>
-          <a:ln/>
-        </p:spPr>
-        <p:txBody>
-          <a:bodyPr wrap="square" lIns="0" tIns="0" rIns="0" bIns="0" rtlCol="0" anchor="ctr"/>
-          <a:lstStyle/>
-          <a:p>
-            <a:pPr indent="0" marL="0">
-              <a:buNone/>
-            </a:pPr>
-            <a:r>
-              <a:rPr lang="en-US" sz="900" spc="120" kern="0" dirty="0">
-                <a:solidFill>
-                  <a:srgbClr val="8A8A8A"/>
-                </a:solidFill>
-                <a:latin typeface="Pretendard" pitchFamily="34" charset="0"/>
-                <a:ea typeface="Pretendard" pitchFamily="34" charset="-122"/>
-                <a:cs typeface="Pretendard" pitchFamily="34" charset="-120"/>
-              </a:rPr>
-              <a:t>포트폴리오제작</a:t>
-            </a:r>
-            <a:endParaRPr lang="en-US" sz="900" dirty="0"/>
-          </a:p>
-        </p:txBody>
-      </p:sp>
-      <p:sp>
-        <p:nvSpPr>
-          <p:cNvPr id="3" name="Text 1"/>
-          <p:cNvSpPr/>
-          <p:nvPr/>
-        </p:nvSpPr>
-        <p:spPr>
-          <a:xfrm>
-            <a:off x="4480560" y="274320"/>
-            <a:ext cx="4572000" cy="219456"/>
-          </a:xfrm>
-          <a:prstGeom prst="rect">
-            <a:avLst/>
-          </a:prstGeom>
-          <a:noFill/>
-          <a:ln/>
-        </p:spPr>
-        <p:txBody>
-          <a:bodyPr wrap="square" lIns="0" tIns="0" rIns="0" bIns="0" rtlCol="0" anchor="ctr"/>
-          <a:lstStyle/>
-          <a:p>
-            <a:pPr algn="ctr" indent="0" marL="0">
-              <a:buNone/>
-            </a:pPr>
-            <a:r>
-              <a:rPr lang="en-US" sz="900" spc="120" kern="0" dirty="0">
-                <a:solidFill>
-                  <a:srgbClr val="8A8A8A"/>
-                </a:solidFill>
-                <a:latin typeface="Pretendard" pitchFamily="34" charset="0"/>
-                <a:ea typeface="Pretendard" pitchFamily="34" charset="-122"/>
-                <a:cs typeface="Pretendard" pitchFamily="34" charset="-120"/>
-              </a:rPr>
-              <a:t>PHASE 2 콘텐츠 구조화와 비주얼 시스템</a:t>
-            </a:r>
-            <a:endParaRPr lang="en-US" sz="900" dirty="0"/>
-          </a:p>
-        </p:txBody>
-      </p:sp>
-      <p:sp>
-        <p:nvSpPr>
-          <p:cNvPr id="4" name="Text 2"/>
-          <p:cNvSpPr/>
-          <p:nvPr/>
-        </p:nvSpPr>
-        <p:spPr>
-          <a:xfrm>
-            <a:off x="8808415" y="274320"/>
-            <a:ext cx="2743200" cy="219456"/>
-          </a:xfrm>
-          <a:prstGeom prst="rect">
-            <a:avLst/>
-          </a:prstGeom>
-          <a:noFill/>
-          <a:ln/>
-        </p:spPr>
-        <p:txBody>
-          <a:bodyPr wrap="square" lIns="0" tIns="0" rIns="0" bIns="0" rtlCol="0" anchor="ctr"/>
-          <a:lstStyle/>
-          <a:p>
-            <a:pPr algn="r" indent="0" marL="0">
-              <a:buNone/>
-            </a:pPr>
-            <a:r>
-              <a:rPr lang="en-US" sz="900" spc="200" kern="0" dirty="0">
-                <a:solidFill>
-                  <a:srgbClr val="8A8A8A"/>
-                </a:solidFill>
-                <a:latin typeface="Pretendard" pitchFamily="34" charset="0"/>
-                <a:ea typeface="Pretendard" pitchFamily="34" charset="-122"/>
-                <a:cs typeface="Pretendard" pitchFamily="34" charset="-120"/>
-              </a:rPr>
-              <a:t>WEEK 09</a:t>
-            </a:r>
-            <a:endParaRPr lang="en-US" sz="900" dirty="0"/>
-          </a:p>
-        </p:txBody>
-      </p:sp>
-      <p:sp>
-        <p:nvSpPr>
-          <p:cNvPr id="5" name="Shape 3"/>
-          <p:cNvSpPr/>
-          <p:nvPr/>
-        </p:nvSpPr>
-        <p:spPr>
-          <a:xfrm>
-            <a:off x="640080" y="548640"/>
-            <a:ext cx="10911535" cy="7315"/>
-          </a:xfrm>
-          <a:prstGeom prst="rect">
-            <a:avLst/>
-          </a:prstGeom>
-          <a:solidFill>
-            <a:srgbClr val="DCDCDC"/>
-          </a:solidFill>
-          <a:ln w="12700">
+          <p:cNvPr id="9" name="Shape 7"/>
+          <p:cNvSpPr/>
+          <p:nvPr/>
+        </p:nvSpPr>
+        <p:spPr>
+          <a:xfrm flipV="1">
+            <a:off x="941832" y="1733702"/>
+            <a:ext cx="301752" cy="241402"/>
+          </a:xfrm>
+          <a:prstGeom prst="line">
+            <a:avLst/>
+          </a:prstGeom>
+          <a:noFill/>
+          <a:ln w="15875">
             <a:solidFill>
-              <a:srgbClr val="DCDCDC"/>
+              <a:srgbClr val="FFFFFF"/>
             </a:solidFill>
             <a:prstDash val="solid"/>
           </a:ln>
@@ -3692,14 +2518,14 @@
       </p:sp>
       <p:sp>
         <p:nvSpPr>
-          <p:cNvPr id="6" name="Text 4"/>
-          <p:cNvSpPr/>
-          <p:nvPr/>
-        </p:nvSpPr>
-        <p:spPr>
-          <a:xfrm>
-            <a:off x="640080" y="640080"/>
-            <a:ext cx="10911535" cy="219456"/>
+          <p:cNvPr id="10" name="Text 8"/>
+          <p:cNvSpPr/>
+          <p:nvPr/>
+        </p:nvSpPr>
+        <p:spPr>
+          <a:xfrm>
+            <a:off x="640080" y="2615184"/>
+            <a:ext cx="7863840" cy="256032"/>
           </a:xfrm>
           <a:prstGeom prst="rect">
             <a:avLst/>
@@ -3715,15 +2541,15 @@
               <a:buNone/>
             </a:pPr>
             <a:r>
-              <a:rPr lang="en-US" sz="950" spc="260" kern="0" dirty="0">
-                <a:solidFill>
-                  <a:srgbClr val="8A8A8A"/>
-                </a:solidFill>
-                <a:latin typeface="Pretendard" pitchFamily="34" charset="0"/>
-                <a:ea typeface="Pretendard" pitchFamily="34" charset="-122"/>
-                <a:cs typeface="Pretendard" pitchFamily="34" charset="-120"/>
-              </a:rPr>
-              <a:t>OBJECTIVES</a:t>
+              <a:rPr lang="en-US" sz="950" spc="280" kern="0" dirty="0">
+                <a:solidFill>
+                  <a:srgbClr val="9A9A9A"/>
+                </a:solidFill>
+                <a:latin typeface="Pretendard" pitchFamily="34" charset="0"/>
+                <a:ea typeface="Pretendard" pitchFamily="34" charset="-122"/>
+                <a:cs typeface="Pretendard" pitchFamily="34" charset="-120"/>
+              </a:rPr>
+              <a:t>PART 01</a:t>
             </a:r>
             <a:endParaRPr lang="en-US" sz="950" dirty="0"/>
           </a:p>
@@ -3731,14 +2557,14 @@
       </p:sp>
       <p:sp>
         <p:nvSpPr>
-          <p:cNvPr id="7" name="Text 5"/>
-          <p:cNvSpPr/>
-          <p:nvPr/>
-        </p:nvSpPr>
-        <p:spPr>
-          <a:xfrm>
-            <a:off x="640080" y="859536"/>
-            <a:ext cx="10911535" cy="475488"/>
+          <p:cNvPr id="11" name="Text 9"/>
+          <p:cNvSpPr/>
+          <p:nvPr/>
+        </p:nvSpPr>
+        <p:spPr>
+          <a:xfrm>
+            <a:off x="640080" y="2889504"/>
+            <a:ext cx="7863840" cy="786384"/>
           </a:xfrm>
           <a:prstGeom prst="rect">
             <a:avLst/>
@@ -3754,57 +2580,32 @@
               <a:buNone/>
             </a:pPr>
             <a:r>
-              <a:rPr lang="en-US" sz="3000" dirty="0">
-                <a:solidFill>
-                  <a:srgbClr val="111111"/>
+              <a:rPr lang="en-US" sz="4600" dirty="0">
+                <a:solidFill>
+                  <a:srgbClr val="FFFFFF"/>
                 </a:solidFill>
                 <a:latin typeface="Pretendard SemiBold" pitchFamily="34" charset="0"/>
                 <a:ea typeface="Pretendard SemiBold" pitchFamily="34" charset="-122"/>
                 <a:cs typeface="Pretendard SemiBold" pitchFamily="34" charset="-120"/>
               </a:rPr>
-              <a:t>오늘 끝나면 여러분은</a:t>
-            </a:r>
-            <a:endParaRPr lang="en-US" sz="3000" dirty="0"/>
-          </a:p>
-        </p:txBody>
-      </p:sp>
-      <p:sp>
-        <p:nvSpPr>
-          <p:cNvPr id="8" name="Shape 6"/>
-          <p:cNvSpPr/>
-          <p:nvPr/>
-        </p:nvSpPr>
-        <p:spPr>
-          <a:xfrm>
-            <a:off x="640080" y="1664208"/>
-            <a:ext cx="10911535" cy="7315"/>
-          </a:xfrm>
-          <a:prstGeom prst="rect">
-            <a:avLst/>
-          </a:prstGeom>
-          <a:solidFill>
-            <a:srgbClr val="111111"/>
-          </a:solidFill>
-          <a:ln w="12700">
-            <a:solidFill>
-              <a:srgbClr val="111111"/>
-            </a:solidFill>
-            <a:prstDash val="solid"/>
-          </a:ln>
-        </p:spPr>
-      </p:sp>
-      <p:sp>
-        <p:nvSpPr>
-          <p:cNvPr id="9" name="Shape 7"/>
-          <p:cNvSpPr/>
-          <p:nvPr/>
-        </p:nvSpPr>
-        <p:spPr>
-          <a:xfrm>
-            <a:off x="640080" y="1810512"/>
-            <a:ext cx="310896" cy="310896"/>
-          </a:xfrm>
-          <a:prstGeom prst="ellipse">
+              <a:t>톤앤매너 정하기</a:t>
+            </a:r>
+            <a:endParaRPr lang="en-US" sz="4600" dirty="0"/>
+          </a:p>
+        </p:txBody>
+      </p:sp>
+      <p:sp>
+        <p:nvSpPr>
+          <p:cNvPr id="12" name="Shape 10"/>
+          <p:cNvSpPr/>
+          <p:nvPr/>
+        </p:nvSpPr>
+        <p:spPr>
+          <a:xfrm>
+            <a:off x="640080" y="3803904"/>
+            <a:ext cx="2194560" cy="7315"/>
+          </a:xfrm>
+          <a:prstGeom prst="rect">
             <a:avLst/>
           </a:prstGeom>
           <a:solidFill>
@@ -3812,7 +2613,7 @@
           </a:solidFill>
           <a:ln w="12700">
             <a:solidFill>
-              <a:srgbClr val="111111"/>
+              <a:srgbClr val="FFFFFF"/>
             </a:solidFill>
             <a:prstDash val="solid"/>
           </a:ln>
@@ -3820,490 +2621,14 @@
       </p:sp>
       <p:sp>
         <p:nvSpPr>
-          <p:cNvPr id="10" name="Text 8"/>
-          <p:cNvSpPr/>
-          <p:nvPr/>
-        </p:nvSpPr>
-        <p:spPr>
-          <a:xfrm>
-            <a:off x="640080" y="1810512"/>
-            <a:ext cx="310896" cy="310896"/>
-          </a:xfrm>
-          <a:prstGeom prst="rect">
-            <a:avLst/>
-          </a:prstGeom>
-          <a:noFill/>
-          <a:ln/>
-        </p:spPr>
-        <p:txBody>
-          <a:bodyPr wrap="square" lIns="0" tIns="0" rIns="0" bIns="0" rtlCol="0" anchor="ctr"/>
-          <a:lstStyle/>
-          <a:p>
-            <a:pPr algn="ctr" indent="0" marL="0">
-              <a:buNone/>
-            </a:pPr>
-            <a:r>
-              <a:rPr lang="en-US" sz="1000" b="1" dirty="0">
-                <a:solidFill>
-                  <a:srgbClr val="111111"/>
-                </a:solidFill>
-                <a:latin typeface="Pretendard" pitchFamily="34" charset="0"/>
-                <a:ea typeface="Pretendard" pitchFamily="34" charset="-122"/>
-                <a:cs typeface="Pretendard" pitchFamily="34" charset="-120"/>
-              </a:rPr>
-              <a:t>1</a:t>
-            </a:r>
-            <a:endParaRPr lang="en-US" sz="1000" dirty="0"/>
-          </a:p>
-        </p:txBody>
-      </p:sp>
-      <p:sp>
-        <p:nvSpPr>
-          <p:cNvPr id="11" name="Text 9"/>
-          <p:cNvSpPr/>
-          <p:nvPr/>
-        </p:nvSpPr>
-        <p:spPr>
-          <a:xfrm>
-            <a:off x="1188720" y="1719072"/>
-            <a:ext cx="9875520" cy="310896"/>
-          </a:xfrm>
-          <a:prstGeom prst="rect">
-            <a:avLst/>
-          </a:prstGeom>
-          <a:noFill/>
-          <a:ln/>
-        </p:spPr>
-        <p:txBody>
-          <a:bodyPr wrap="square" lIns="0" tIns="0" rIns="0" bIns="0" rtlCol="0" anchor="ctr"/>
-          <a:lstStyle/>
-          <a:p>
-            <a:pPr indent="0" marL="0">
-              <a:buNone/>
-            </a:pPr>
-            <a:r>
-              <a:rPr lang="en-US" sz="1450" dirty="0">
-                <a:solidFill>
-                  <a:srgbClr val="111111"/>
-                </a:solidFill>
-                <a:latin typeface="Pretendard SemiBold" pitchFamily="34" charset="0"/>
-                <a:ea typeface="Pretendard SemiBold" pitchFamily="34" charset="-122"/>
-                <a:cs typeface="Pretendard SemiBold" pitchFamily="34" charset="-120"/>
-              </a:rPr>
-              <a:t>내 포트폴리오의 톤을 한 단어로 말할 수 있다</a:t>
-            </a:r>
-            <a:endParaRPr lang="en-US" sz="1450" dirty="0"/>
-          </a:p>
-        </p:txBody>
-      </p:sp>
-      <p:sp>
-        <p:nvSpPr>
-          <p:cNvPr id="12" name="Text 10"/>
-          <p:cNvSpPr/>
-          <p:nvPr/>
-        </p:nvSpPr>
-        <p:spPr>
-          <a:xfrm>
-            <a:off x="1188720" y="2029968"/>
-            <a:ext cx="9875520" cy="292608"/>
-          </a:xfrm>
-          <a:prstGeom prst="rect">
-            <a:avLst/>
-          </a:prstGeom>
-          <a:noFill/>
-          <a:ln/>
-        </p:spPr>
-        <p:txBody>
-          <a:bodyPr wrap="square" lIns="0" tIns="0" rIns="0" bIns="0" rtlCol="0" anchor="ctr"/>
-          <a:lstStyle/>
-          <a:p>
-            <a:pPr indent="0" marL="0">
-              <a:buNone/>
-            </a:pPr>
-            <a:r>
-              <a:rPr lang="en-US" sz="1100" dirty="0">
-                <a:solidFill>
-                  <a:srgbClr val="6E6E6E"/>
-                </a:solidFill>
-                <a:latin typeface="Pretendard" pitchFamily="34" charset="0"/>
-                <a:ea typeface="Pretendard" pitchFamily="34" charset="-122"/>
-                <a:cs typeface="Pretendard" pitchFamily="34" charset="-120"/>
-              </a:rPr>
-              <a:t>정교한 / 실험적인 / 담백한 중 하나</a:t>
-            </a:r>
-            <a:endParaRPr lang="en-US" sz="1100" dirty="0"/>
-          </a:p>
-        </p:txBody>
-      </p:sp>
-      <p:sp>
-        <p:nvSpPr>
-          <p:cNvPr id="13" name="Shape 11"/>
-          <p:cNvSpPr/>
-          <p:nvPr/>
-        </p:nvSpPr>
-        <p:spPr>
-          <a:xfrm>
-            <a:off x="640080" y="2670048"/>
-            <a:ext cx="10911535" cy="7315"/>
-          </a:xfrm>
-          <a:prstGeom prst="rect">
-            <a:avLst/>
-          </a:prstGeom>
-          <a:solidFill>
-            <a:srgbClr val="DCDCDC"/>
-          </a:solidFill>
-          <a:ln w="12700">
-            <a:solidFill>
-              <a:srgbClr val="DCDCDC"/>
-            </a:solidFill>
-            <a:prstDash val="solid"/>
-          </a:ln>
-        </p:spPr>
-      </p:sp>
-      <p:sp>
-        <p:nvSpPr>
-          <p:cNvPr id="14" name="Shape 12"/>
-          <p:cNvSpPr/>
-          <p:nvPr/>
-        </p:nvSpPr>
-        <p:spPr>
-          <a:xfrm>
-            <a:off x="640080" y="2834640"/>
-            <a:ext cx="310896" cy="310896"/>
-          </a:xfrm>
-          <a:prstGeom prst="ellipse">
-            <a:avLst/>
-          </a:prstGeom>
-          <a:solidFill>
-            <a:srgbClr val="FFFFFF"/>
-          </a:solidFill>
-          <a:ln w="12700">
-            <a:solidFill>
-              <a:srgbClr val="111111"/>
-            </a:solidFill>
-            <a:prstDash val="solid"/>
-          </a:ln>
-        </p:spPr>
-      </p:sp>
-      <p:sp>
-        <p:nvSpPr>
-          <p:cNvPr id="15" name="Text 13"/>
-          <p:cNvSpPr/>
-          <p:nvPr/>
-        </p:nvSpPr>
-        <p:spPr>
-          <a:xfrm>
-            <a:off x="640080" y="2834640"/>
-            <a:ext cx="310896" cy="310896"/>
-          </a:xfrm>
-          <a:prstGeom prst="rect">
-            <a:avLst/>
-          </a:prstGeom>
-          <a:noFill/>
-          <a:ln/>
-        </p:spPr>
-        <p:txBody>
-          <a:bodyPr wrap="square" lIns="0" tIns="0" rIns="0" bIns="0" rtlCol="0" anchor="ctr"/>
-          <a:lstStyle/>
-          <a:p>
-            <a:pPr algn="ctr" indent="0" marL="0">
-              <a:buNone/>
-            </a:pPr>
-            <a:r>
-              <a:rPr lang="en-US" sz="1000" b="1" dirty="0">
-                <a:solidFill>
-                  <a:srgbClr val="111111"/>
-                </a:solidFill>
-                <a:latin typeface="Pretendard" pitchFamily="34" charset="0"/>
-                <a:ea typeface="Pretendard" pitchFamily="34" charset="-122"/>
-                <a:cs typeface="Pretendard" pitchFamily="34" charset="-120"/>
-              </a:rPr>
-              <a:t>2</a:t>
-            </a:r>
-            <a:endParaRPr lang="en-US" sz="1000" dirty="0"/>
-          </a:p>
-        </p:txBody>
-      </p:sp>
-      <p:sp>
-        <p:nvSpPr>
-          <p:cNvPr id="16" name="Text 14"/>
-          <p:cNvSpPr/>
-          <p:nvPr/>
-        </p:nvSpPr>
-        <p:spPr>
-          <a:xfrm>
-            <a:off x="1188720" y="2743200"/>
-            <a:ext cx="9875520" cy="310896"/>
-          </a:xfrm>
-          <a:prstGeom prst="rect">
-            <a:avLst/>
-          </a:prstGeom>
-          <a:noFill/>
-          <a:ln/>
-        </p:spPr>
-        <p:txBody>
-          <a:bodyPr wrap="square" lIns="0" tIns="0" rIns="0" bIns="0" rtlCol="0" anchor="ctr"/>
-          <a:lstStyle/>
-          <a:p>
-            <a:pPr indent="0" marL="0">
-              <a:buNone/>
-            </a:pPr>
-            <a:r>
-              <a:rPr lang="en-US" sz="1450" dirty="0">
-                <a:solidFill>
-                  <a:srgbClr val="111111"/>
-                </a:solidFill>
-                <a:latin typeface="Pretendard SemiBold" pitchFamily="34" charset="0"/>
-                <a:ea typeface="Pretendard SemiBold" pitchFamily="34" charset="-122"/>
-                <a:cs typeface="Pretendard SemiBold" pitchFamily="34" charset="-120"/>
-              </a:rPr>
-              <a:t>컬러와 타이포를 규칙으로 정할 수 있다</a:t>
-            </a:r>
-            <a:endParaRPr lang="en-US" sz="1450" dirty="0"/>
-          </a:p>
-        </p:txBody>
-      </p:sp>
-      <p:sp>
-        <p:nvSpPr>
-          <p:cNvPr id="17" name="Text 15"/>
-          <p:cNvSpPr/>
-          <p:nvPr/>
-        </p:nvSpPr>
-        <p:spPr>
-          <a:xfrm>
-            <a:off x="1188720" y="3054096"/>
-            <a:ext cx="9875520" cy="292608"/>
-          </a:xfrm>
-          <a:prstGeom prst="rect">
-            <a:avLst/>
-          </a:prstGeom>
-          <a:noFill/>
-          <a:ln/>
-        </p:spPr>
-        <p:txBody>
-          <a:bodyPr wrap="square" lIns="0" tIns="0" rIns="0" bIns="0" rtlCol="0" anchor="ctr"/>
-          <a:lstStyle/>
-          <a:p>
-            <a:pPr indent="0" marL="0">
-              <a:buNone/>
-            </a:pPr>
-            <a:r>
-              <a:rPr lang="en-US" sz="1100" dirty="0">
-                <a:solidFill>
-                  <a:srgbClr val="6E6E6E"/>
-                </a:solidFill>
-                <a:latin typeface="Pretendard" pitchFamily="34" charset="0"/>
-                <a:ea typeface="Pretendard" pitchFamily="34" charset="-122"/>
-                <a:cs typeface="Pretendard" pitchFamily="34" charset="-120"/>
-              </a:rPr>
-              <a:t>페이지마다 고민하지 않도록 미리 정해 둡니다</a:t>
-            </a:r>
-            <a:endParaRPr lang="en-US" sz="1100" dirty="0"/>
-          </a:p>
-        </p:txBody>
-      </p:sp>
-      <p:sp>
-        <p:nvSpPr>
-          <p:cNvPr id="18" name="Shape 16"/>
-          <p:cNvSpPr/>
-          <p:nvPr/>
-        </p:nvSpPr>
-        <p:spPr>
-          <a:xfrm>
-            <a:off x="640080" y="3694176"/>
-            <a:ext cx="10911535" cy="7315"/>
-          </a:xfrm>
-          <a:prstGeom prst="rect">
-            <a:avLst/>
-          </a:prstGeom>
-          <a:solidFill>
-            <a:srgbClr val="DCDCDC"/>
-          </a:solidFill>
-          <a:ln w="12700">
-            <a:solidFill>
-              <a:srgbClr val="DCDCDC"/>
-            </a:solidFill>
-            <a:prstDash val="solid"/>
-          </a:ln>
-        </p:spPr>
-      </p:sp>
-      <p:sp>
-        <p:nvSpPr>
-          <p:cNvPr id="19" name="Shape 17"/>
-          <p:cNvSpPr/>
-          <p:nvPr/>
-        </p:nvSpPr>
-        <p:spPr>
-          <a:xfrm>
-            <a:off x="640080" y="3858768"/>
-            <a:ext cx="310896" cy="310896"/>
-          </a:xfrm>
-          <a:prstGeom prst="ellipse">
-            <a:avLst/>
-          </a:prstGeom>
-          <a:solidFill>
-            <a:srgbClr val="FFFFFF"/>
-          </a:solidFill>
-          <a:ln w="12700">
-            <a:solidFill>
-              <a:srgbClr val="111111"/>
-            </a:solidFill>
-            <a:prstDash val="solid"/>
-          </a:ln>
-        </p:spPr>
-      </p:sp>
-      <p:sp>
-        <p:nvSpPr>
-          <p:cNvPr id="20" name="Text 18"/>
-          <p:cNvSpPr/>
-          <p:nvPr/>
-        </p:nvSpPr>
-        <p:spPr>
-          <a:xfrm>
-            <a:off x="640080" y="3858768"/>
-            <a:ext cx="310896" cy="310896"/>
-          </a:xfrm>
-          <a:prstGeom prst="rect">
-            <a:avLst/>
-          </a:prstGeom>
-          <a:noFill/>
-          <a:ln/>
-        </p:spPr>
-        <p:txBody>
-          <a:bodyPr wrap="square" lIns="0" tIns="0" rIns="0" bIns="0" rtlCol="0" anchor="ctr"/>
-          <a:lstStyle/>
-          <a:p>
-            <a:pPr algn="ctr" indent="0" marL="0">
-              <a:buNone/>
-            </a:pPr>
-            <a:r>
-              <a:rPr lang="en-US" sz="1000" b="1" dirty="0">
-                <a:solidFill>
-                  <a:srgbClr val="111111"/>
-                </a:solidFill>
-                <a:latin typeface="Pretendard" pitchFamily="34" charset="0"/>
-                <a:ea typeface="Pretendard" pitchFamily="34" charset="-122"/>
-                <a:cs typeface="Pretendard" pitchFamily="34" charset="-120"/>
-              </a:rPr>
-              <a:t>3</a:t>
-            </a:r>
-            <a:endParaRPr lang="en-US" sz="1000" dirty="0"/>
-          </a:p>
-        </p:txBody>
-      </p:sp>
-      <p:sp>
-        <p:nvSpPr>
-          <p:cNvPr id="21" name="Text 19"/>
-          <p:cNvSpPr/>
-          <p:nvPr/>
-        </p:nvSpPr>
-        <p:spPr>
-          <a:xfrm>
-            <a:off x="1188720" y="3767328"/>
-            <a:ext cx="9875520" cy="310896"/>
-          </a:xfrm>
-          <a:prstGeom prst="rect">
-            <a:avLst/>
-          </a:prstGeom>
-          <a:noFill/>
-          <a:ln/>
-        </p:spPr>
-        <p:txBody>
-          <a:bodyPr wrap="square" lIns="0" tIns="0" rIns="0" bIns="0" rtlCol="0" anchor="ctr"/>
-          <a:lstStyle/>
-          <a:p>
-            <a:pPr indent="0" marL="0">
-              <a:buNone/>
-            </a:pPr>
-            <a:r>
-              <a:rPr lang="en-US" sz="1450" dirty="0">
-                <a:solidFill>
-                  <a:srgbClr val="111111"/>
-                </a:solidFill>
-                <a:latin typeface="Pretendard SemiBold" pitchFamily="34" charset="0"/>
-                <a:ea typeface="Pretendard SemiBold" pitchFamily="34" charset="-122"/>
-                <a:cs typeface="Pretendard SemiBold" pitchFamily="34" charset="-120"/>
-              </a:rPr>
-              <a:t>그리드를 만들고 쓸 수 있다</a:t>
-            </a:r>
-            <a:endParaRPr lang="en-US" sz="1450" dirty="0"/>
-          </a:p>
-        </p:txBody>
-      </p:sp>
-      <p:sp>
-        <p:nvSpPr>
-          <p:cNvPr id="22" name="Text 20"/>
-          <p:cNvSpPr/>
-          <p:nvPr/>
-        </p:nvSpPr>
-        <p:spPr>
-          <a:xfrm>
-            <a:off x="1188720" y="4078224"/>
-            <a:ext cx="9875520" cy="292608"/>
-          </a:xfrm>
-          <a:prstGeom prst="rect">
-            <a:avLst/>
-          </a:prstGeom>
-          <a:noFill/>
-          <a:ln/>
-        </p:spPr>
-        <p:txBody>
-          <a:bodyPr wrap="square" lIns="0" tIns="0" rIns="0" bIns="0" rtlCol="0" anchor="ctr"/>
-          <a:lstStyle/>
-          <a:p>
-            <a:pPr indent="0" marL="0">
-              <a:buNone/>
-            </a:pPr>
-            <a:r>
-              <a:rPr lang="en-US" sz="1100" dirty="0">
-                <a:solidFill>
-                  <a:srgbClr val="6E6E6E"/>
-                </a:solidFill>
-                <a:latin typeface="Pretendard" pitchFamily="34" charset="0"/>
-                <a:ea typeface="Pretendard" pitchFamily="34" charset="-122"/>
-                <a:cs typeface="Pretendard" pitchFamily="34" charset="-120"/>
-              </a:rPr>
-              <a:t>정렬을 매번 눈대중으로 하지 않게 됩니다</a:t>
-            </a:r>
-            <a:endParaRPr lang="en-US" sz="1100" dirty="0"/>
-          </a:p>
-        </p:txBody>
-      </p:sp>
-      <p:sp>
-        <p:nvSpPr>
-          <p:cNvPr id="23" name="Shape 21"/>
-          <p:cNvSpPr/>
-          <p:nvPr/>
-        </p:nvSpPr>
-        <p:spPr>
-          <a:xfrm>
-            <a:off x="640080" y="4791456"/>
-            <a:ext cx="10911535" cy="7315"/>
-          </a:xfrm>
-          <a:prstGeom prst="rect">
-            <a:avLst/>
-          </a:prstGeom>
-          <a:solidFill>
-            <a:srgbClr val="111111"/>
-          </a:solidFill>
-          <a:ln w="12700">
-            <a:solidFill>
-              <a:srgbClr val="111111"/>
-            </a:solidFill>
-            <a:prstDash val="solid"/>
-          </a:ln>
-        </p:spPr>
-      </p:sp>
-      <p:sp>
-        <p:nvSpPr>
-          <p:cNvPr id="24" name="Text 22"/>
-          <p:cNvSpPr/>
-          <p:nvPr/>
-        </p:nvSpPr>
-        <p:spPr>
-          <a:xfrm>
-            <a:off x="640080" y="4901184"/>
-            <a:ext cx="10911535" cy="402336"/>
+          <p:cNvPr id="13" name="Text 11"/>
+          <p:cNvSpPr/>
+          <p:nvPr/>
+        </p:nvSpPr>
+        <p:spPr>
+          <a:xfrm>
+            <a:off x="640080" y="4005072"/>
+            <a:ext cx="6949440" cy="731520"/>
           </a:xfrm>
           <a:prstGeom prst="rect">
             <a:avLst/>
@@ -4317,123 +2642,59 @@
           <a:p>
             <a:pPr indent="0" marL="0">
               <a:lnSpc>
-                <a:spcPct val="120000"/>
+                <a:spcPct val="134000"/>
               </a:lnSpc>
               <a:buNone/>
             </a:pPr>
             <a:r>
-              <a:rPr lang="en-US" sz="1250" b="1" dirty="0">
-                <a:solidFill>
-                  <a:srgbClr val="111111"/>
-                </a:solidFill>
-                <a:latin typeface="Pretendard" pitchFamily="34" charset="0"/>
-                <a:ea typeface="Pretendard" pitchFamily="34" charset="-122"/>
-                <a:cs typeface="Pretendard" pitchFamily="34" charset="-120"/>
-              </a:rPr>
-              <a:t>오늘의 목적은 예쁘게 만드는 것이 아니라, 10주차부터 고민할 거리를 줄이는 것입니다.</a:t>
-            </a:r>
-            <a:endParaRPr lang="en-US" sz="1250" dirty="0"/>
-          </a:p>
-        </p:txBody>
-      </p:sp>
-      <p:sp>
-        <p:nvSpPr>
-          <p:cNvPr id="25" name="Shape 23"/>
-          <p:cNvSpPr/>
-          <p:nvPr/>
-        </p:nvSpPr>
-        <p:spPr>
-          <a:xfrm>
-            <a:off x="640080" y="6291072"/>
-            <a:ext cx="10911535" cy="7315"/>
-          </a:xfrm>
-          <a:prstGeom prst="rect">
-            <a:avLst/>
-          </a:prstGeom>
-          <a:solidFill>
-            <a:srgbClr val="DCDCDC"/>
-          </a:solidFill>
-          <a:ln w="12700">
-            <a:solidFill>
-              <a:srgbClr val="DCDCDC"/>
-            </a:solidFill>
-            <a:prstDash val="solid"/>
-          </a:ln>
-        </p:spPr>
-      </p:sp>
-      <p:sp>
-        <p:nvSpPr>
-          <p:cNvPr id="26" name="Text 24"/>
-          <p:cNvSpPr/>
-          <p:nvPr/>
-        </p:nvSpPr>
-        <p:spPr>
-          <a:xfrm>
-            <a:off x="640080" y="6382512"/>
-            <a:ext cx="7772400" cy="237744"/>
-          </a:xfrm>
-          <a:prstGeom prst="rect">
-            <a:avLst/>
-          </a:prstGeom>
-          <a:noFill/>
-          <a:ln/>
-        </p:spPr>
-        <p:txBody>
-          <a:bodyPr wrap="square" lIns="0" tIns="0" rIns="0" bIns="0" rtlCol="0" anchor="ctr"/>
-          <a:lstStyle/>
-          <a:p>
-            <a:pPr indent="0" marL="0">
-              <a:buNone/>
-            </a:pPr>
-            <a:r>
-              <a:rPr lang="en-US" sz="850" spc="40" kern="0" dirty="0">
-                <a:solidFill>
-                  <a:srgbClr val="9B9B9B"/>
-                </a:solidFill>
-                <a:latin typeface="Pretendard" pitchFamily="34" charset="0"/>
-                <a:ea typeface="Pretendard" pitchFamily="34" charset="-122"/>
-                <a:cs typeface="Pretendard" pitchFamily="34" charset="-120"/>
-              </a:rPr>
-              <a:t>포트폴리오제작 · 9주차 비주얼 아이덴티티 / 레이아웃 기획</a:t>
-            </a:r>
-            <a:endParaRPr lang="en-US" sz="850" dirty="0"/>
-          </a:p>
-        </p:txBody>
-      </p:sp>
-      <p:sp>
-        <p:nvSpPr>
-          <p:cNvPr id="27" name="Text 25"/>
-          <p:cNvSpPr/>
-          <p:nvPr/>
-        </p:nvSpPr>
-        <p:spPr>
-          <a:xfrm>
-            <a:off x="10271455" y="6382512"/>
-            <a:ext cx="1280160" cy="237744"/>
-          </a:xfrm>
-          <a:prstGeom prst="rect">
-            <a:avLst/>
-          </a:prstGeom>
-          <a:noFill/>
-          <a:ln/>
-        </p:spPr>
-        <p:txBody>
-          <a:bodyPr wrap="square" lIns="0" tIns="0" rIns="0" bIns="0" rtlCol="0" anchor="ctr"/>
-          <a:lstStyle/>
-          <a:p>
-            <a:pPr algn="r" indent="0" marL="0">
-              <a:buNone/>
-            </a:pPr>
-            <a:r>
-              <a:rPr lang="en-US" sz="850" spc="140" kern="0" dirty="0">
-                <a:solidFill>
-                  <a:srgbClr val="9B9B9B"/>
-                </a:solidFill>
-                <a:latin typeface="Pretendard" pitchFamily="34" charset="0"/>
-                <a:ea typeface="Pretendard" pitchFamily="34" charset="-122"/>
-                <a:cs typeface="Pretendard" pitchFamily="34" charset="-120"/>
-              </a:rPr>
-              <a:t>P.01</a:t>
+              <a:rPr lang="en-US" sz="1350" dirty="0">
+                <a:solidFill>
+                  <a:srgbClr val="B8B8B8"/>
+                </a:solidFill>
+                <a:latin typeface="Pretendard Light" pitchFamily="34" charset="0"/>
+                <a:ea typeface="Pretendard Light" pitchFamily="34" charset="-122"/>
+                <a:cs typeface="Pretendard Light" pitchFamily="34" charset="-120"/>
+              </a:rPr>
+              <a:t>25분. 취향을 고르는 게 아니라 2주차에 정한 방향에 맞추는 일입니다.</a:t>
+            </a:r>
+            <a:endParaRPr lang="en-US" sz="1350" dirty="0"/>
+          </a:p>
+        </p:txBody>
+      </p:sp>
+      <p:sp>
+        <p:nvSpPr>
+          <p:cNvPr id="14" name="Text 12"/>
+          <p:cNvSpPr/>
+          <p:nvPr/>
+        </p:nvSpPr>
+        <p:spPr>
+          <a:xfrm rot="16200000">
+            <a:off x="10436047" y="3291840"/>
+            <a:ext cx="2743200" cy="274320"/>
+          </a:xfrm>
+          <a:prstGeom prst="rect">
+            <a:avLst/>
+          </a:prstGeom>
+          <a:noFill/>
+          <a:ln/>
+        </p:spPr>
+        <p:txBody>
+          <a:bodyPr wrap="square" lIns="0" tIns="0" rIns="0" bIns="0" rtlCol="0" anchor="ctr"/>
+          <a:lstStyle/>
+          <a:p>
+            <a:pPr algn="ctr" indent="0" marL="0">
+              <a:buNone/>
+            </a:pPr>
+            <a:r>
+              <a:rPr lang="en-US" sz="850" spc="260" kern="0" dirty="0">
+                <a:solidFill>
+                  <a:srgbClr val="7A7A7A"/>
+                </a:solidFill>
+                <a:latin typeface="Pretendard" pitchFamily="34" charset="0"/>
+                <a:ea typeface="Pretendard" pitchFamily="34" charset="-122"/>
+                <a:cs typeface="Pretendard" pitchFamily="34" charset="-120"/>
+              </a:rPr>
+              <a:t>SECTION 01</a:t>
             </a:r>
             <a:endParaRPr lang="en-US" sz="850" dirty="0"/>
           </a:p>
@@ -4621,34 +2882,34 @@
         </p:nvSpPr>
         <p:spPr>
           <a:xfrm>
-            <a:off x="7345375" y="1737360"/>
-            <a:ext cx="4206240" cy="3291840"/>
-          </a:xfrm>
-          <a:prstGeom prst="rect">
-            <a:avLst/>
-          </a:prstGeom>
-          <a:noFill/>
-          <a:ln/>
-        </p:spPr>
-        <p:txBody>
-          <a:bodyPr wrap="square" lIns="0" tIns="0" rIns="0" bIns="0" rtlCol="0" anchor="ctr"/>
-          <a:lstStyle/>
-          <a:p>
-            <a:pPr algn="r" indent="0" marL="0">
-              <a:buNone/>
-            </a:pPr>
-            <a:r>
-              <a:rPr lang="en-US" sz="20000" dirty="0">
-                <a:solidFill>
-                  <a:srgbClr val="1B1B1B"/>
-                </a:solidFill>
-                <a:latin typeface="Pretendard SemiBold" pitchFamily="34" charset="0"/>
-                <a:ea typeface="Pretendard SemiBold" pitchFamily="34" charset="-122"/>
-                <a:cs typeface="Pretendard SemiBold" pitchFamily="34" charset="-120"/>
-              </a:rPr>
-              <a:t>01</a:t>
-            </a:r>
-            <a:endParaRPr lang="en-US" sz="20000" dirty="0"/>
+            <a:off x="640080" y="2103120"/>
+            <a:ext cx="9144000" cy="256032"/>
+          </a:xfrm>
+          <a:prstGeom prst="rect">
+            <a:avLst/>
+          </a:prstGeom>
+          <a:noFill/>
+          <a:ln/>
+        </p:spPr>
+        <p:txBody>
+          <a:bodyPr wrap="square" lIns="0" tIns="0" rIns="0" bIns="0" rtlCol="0" anchor="ctr"/>
+          <a:lstStyle/>
+          <a:p>
+            <a:pPr indent="0" marL="0">
+              <a:buNone/>
+            </a:pPr>
+            <a:r>
+              <a:rPr lang="en-US" sz="950" spc="280" kern="0" dirty="0">
+                <a:solidFill>
+                  <a:srgbClr val="9A9A9A"/>
+                </a:solidFill>
+                <a:latin typeface="Pretendard" pitchFamily="34" charset="0"/>
+                <a:ea typeface="Pretendard" pitchFamily="34" charset="-122"/>
+                <a:cs typeface="Pretendard" pitchFamily="34" charset="-120"/>
+              </a:rPr>
+              <a:t>PRINCIPLE</a:t>
+            </a:r>
+            <a:endParaRPr lang="en-US" sz="950" dirty="0"/>
           </a:p>
         </p:txBody>
       </p:sp>
@@ -4660,154 +2921,7 @@
         </p:nvSpPr>
         <p:spPr>
           <a:xfrm>
-            <a:off x="941832" y="1371600"/>
-            <a:ext cx="0" cy="603504"/>
-          </a:xfrm>
-          <a:prstGeom prst="line">
-            <a:avLst/>
-          </a:prstGeom>
-          <a:noFill/>
-          <a:ln w="15875">
-            <a:solidFill>
-              <a:srgbClr val="FFFFFF"/>
-            </a:solidFill>
-            <a:prstDash val="solid"/>
-          </a:ln>
-        </p:spPr>
-      </p:sp>
-      <p:sp>
-        <p:nvSpPr>
-          <p:cNvPr id="8" name="Shape 6"/>
-          <p:cNvSpPr/>
-          <p:nvPr/>
-        </p:nvSpPr>
-        <p:spPr>
-          <a:xfrm>
-            <a:off x="640080" y="1733702"/>
-            <a:ext cx="301752" cy="241402"/>
-          </a:xfrm>
-          <a:prstGeom prst="line">
-            <a:avLst/>
-          </a:prstGeom>
-          <a:noFill/>
-          <a:ln w="15875">
-            <a:solidFill>
-              <a:srgbClr val="FFFFFF"/>
-            </a:solidFill>
-            <a:prstDash val="solid"/>
-          </a:ln>
-        </p:spPr>
-      </p:sp>
-      <p:sp>
-        <p:nvSpPr>
-          <p:cNvPr id="9" name="Shape 7"/>
-          <p:cNvSpPr/>
-          <p:nvPr/>
-        </p:nvSpPr>
-        <p:spPr>
-          <a:xfrm flipV="1">
-            <a:off x="941832" y="1733702"/>
-            <a:ext cx="301752" cy="241402"/>
-          </a:xfrm>
-          <a:prstGeom prst="line">
-            <a:avLst/>
-          </a:prstGeom>
-          <a:noFill/>
-          <a:ln w="15875">
-            <a:solidFill>
-              <a:srgbClr val="FFFFFF"/>
-            </a:solidFill>
-            <a:prstDash val="solid"/>
-          </a:ln>
-        </p:spPr>
-      </p:sp>
-      <p:sp>
-        <p:nvSpPr>
-          <p:cNvPr id="10" name="Text 8"/>
-          <p:cNvSpPr/>
-          <p:nvPr/>
-        </p:nvSpPr>
-        <p:spPr>
-          <a:xfrm>
-            <a:off x="640080" y="2615184"/>
-            <a:ext cx="7863840" cy="256032"/>
-          </a:xfrm>
-          <a:prstGeom prst="rect">
-            <a:avLst/>
-          </a:prstGeom>
-          <a:noFill/>
-          <a:ln/>
-        </p:spPr>
-        <p:txBody>
-          <a:bodyPr wrap="square" lIns="0" tIns="0" rIns="0" bIns="0" rtlCol="0" anchor="ctr"/>
-          <a:lstStyle/>
-          <a:p>
-            <a:pPr indent="0" marL="0">
-              <a:buNone/>
-            </a:pPr>
-            <a:r>
-              <a:rPr lang="en-US" sz="950" spc="280" kern="0" dirty="0">
-                <a:solidFill>
-                  <a:srgbClr val="9A9A9A"/>
-                </a:solidFill>
-                <a:latin typeface="Pretendard" pitchFamily="34" charset="0"/>
-                <a:ea typeface="Pretendard" pitchFamily="34" charset="-122"/>
-                <a:cs typeface="Pretendard" pitchFamily="34" charset="-120"/>
-              </a:rPr>
-              <a:t>PART 01</a:t>
-            </a:r>
-            <a:endParaRPr lang="en-US" sz="950" dirty="0"/>
-          </a:p>
-        </p:txBody>
-      </p:sp>
-      <p:sp>
-        <p:nvSpPr>
-          <p:cNvPr id="11" name="Text 9"/>
-          <p:cNvSpPr/>
-          <p:nvPr/>
-        </p:nvSpPr>
-        <p:spPr>
-          <a:xfrm>
-            <a:off x="640080" y="2889504"/>
-            <a:ext cx="7863840" cy="786384"/>
-          </a:xfrm>
-          <a:prstGeom prst="rect">
-            <a:avLst/>
-          </a:prstGeom>
-          <a:noFill/>
-          <a:ln/>
-        </p:spPr>
-        <p:txBody>
-          <a:bodyPr wrap="square" lIns="0" tIns="0" rIns="0" bIns="0" rtlCol="0" anchor="ctr"/>
-          <a:lstStyle/>
-          <a:p>
-            <a:pPr indent="0" marL="0">
-              <a:buNone/>
-            </a:pPr>
-            <a:r>
-              <a:rPr lang="en-US" sz="4600" dirty="0">
-                <a:solidFill>
-                  <a:srgbClr val="FFFFFF"/>
-                </a:solidFill>
-                <a:latin typeface="Pretendard SemiBold" pitchFamily="34" charset="0"/>
-                <a:ea typeface="Pretendard SemiBold" pitchFamily="34" charset="-122"/>
-                <a:cs typeface="Pretendard SemiBold" pitchFamily="34" charset="-120"/>
-              </a:rPr>
-              <a:t>톤앤매너 정하기</a:t>
-            </a:r>
-            <a:endParaRPr lang="en-US" sz="4600" dirty="0"/>
-          </a:p>
-        </p:txBody>
-      </p:sp>
-      <p:sp>
-        <p:nvSpPr>
-          <p:cNvPr id="12" name="Shape 10"/>
-          <p:cNvSpPr/>
-          <p:nvPr/>
-        </p:nvSpPr>
-        <p:spPr>
-          <a:xfrm>
-            <a:off x="640080" y="3803904"/>
+            <a:off x="640080" y="2395728"/>
             <a:ext cx="2194560" cy="7315"/>
           </a:xfrm>
           <a:prstGeom prst="rect">
@@ -4826,14 +2940,14 @@
       </p:sp>
       <p:sp>
         <p:nvSpPr>
-          <p:cNvPr id="13" name="Text 11"/>
-          <p:cNvSpPr/>
-          <p:nvPr/>
-        </p:nvSpPr>
-        <p:spPr>
-          <a:xfrm>
-            <a:off x="640080" y="4005072"/>
-            <a:ext cx="6949440" cy="731520"/>
+          <p:cNvPr id="8" name="Text 6"/>
+          <p:cNvSpPr/>
+          <p:nvPr/>
+        </p:nvSpPr>
+        <p:spPr>
+          <a:xfrm>
+            <a:off x="640080" y="2596896"/>
+            <a:ext cx="10241280" cy="1371600"/>
           </a:xfrm>
           <a:prstGeom prst="rect">
             <a:avLst/>
@@ -4847,12 +2961,74 @@
           <a:p>
             <a:pPr indent="0" marL="0">
               <a:lnSpc>
-                <a:spcPct val="134000"/>
+                <a:spcPct val="122000"/>
               </a:lnSpc>
               <a:buNone/>
             </a:pPr>
             <a:r>
-              <a:rPr lang="en-US" sz="1350" dirty="0">
+              <a:rPr lang="en-US" sz="3400" dirty="0">
+                <a:solidFill>
+                  <a:srgbClr val="FFFFFF"/>
+                </a:solidFill>
+                <a:latin typeface="Pretendard SemiBold" pitchFamily="34" charset="0"/>
+                <a:ea typeface="Pretendard SemiBold" pitchFamily="34" charset="-122"/>
+                <a:cs typeface="Pretendard SemiBold" pitchFamily="34" charset="-120"/>
+              </a:rPr>
+              <a:t>비주얼은 내용을 도와야지</a:t>
+            </a:r>
+            <a:endParaRPr lang="en-US" sz="3400" dirty="0"/>
+          </a:p>
+          <a:p>
+            <a:pPr indent="0" marL="0">
+              <a:lnSpc>
+                <a:spcPct val="122000"/>
+              </a:lnSpc>
+              <a:buNone/>
+            </a:pPr>
+            <a:r>
+              <a:rPr lang="en-US" sz="3400" dirty="0">
+                <a:solidFill>
+                  <a:srgbClr val="FFFFFF"/>
+                </a:solidFill>
+                <a:latin typeface="Pretendard SemiBold" pitchFamily="34" charset="0"/>
+                <a:ea typeface="Pretendard SemiBold" pitchFamily="34" charset="-122"/>
+                <a:cs typeface="Pretendard SemiBold" pitchFamily="34" charset="-120"/>
+              </a:rPr>
+              <a:t>내용과 경쟁하면 안 됩니다.</a:t>
+            </a:r>
+            <a:endParaRPr lang="en-US" sz="3400" dirty="0"/>
+          </a:p>
+        </p:txBody>
+      </p:sp>
+      <p:sp>
+        <p:nvSpPr>
+          <p:cNvPr id="9" name="Text 7"/>
+          <p:cNvSpPr/>
+          <p:nvPr/>
+        </p:nvSpPr>
+        <p:spPr>
+          <a:xfrm>
+            <a:off x="640080" y="4078224"/>
+            <a:ext cx="9509760" cy="914400"/>
+          </a:xfrm>
+          <a:prstGeom prst="rect">
+            <a:avLst/>
+          </a:prstGeom>
+          <a:noFill/>
+          <a:ln/>
+        </p:spPr>
+        <p:txBody>
+          <a:bodyPr wrap="square" lIns="0" tIns="0" rIns="0" bIns="0" rtlCol="0" anchor="t"/>
+          <a:lstStyle/>
+          <a:p>
+            <a:pPr indent="0" marL="0">
+              <a:lnSpc>
+                <a:spcPct val="136000"/>
+              </a:lnSpc>
+              <a:buNone/>
+            </a:pPr>
+            <a:r>
+              <a:rPr lang="en-US" sz="1400" dirty="0">
                 <a:solidFill>
                   <a:srgbClr val="B8B8B8"/>
                 </a:solidFill>
@@ -4860,15 +3036,15 @@
                 <a:ea typeface="Pretendard Light" pitchFamily="34" charset="-122"/>
                 <a:cs typeface="Pretendard Light" pitchFamily="34" charset="-120"/>
               </a:rPr>
-              <a:t>25분. 취향을 고르는 게 아니라 2주차에 정한 방향에 맞추는 일입니다.</a:t>
-            </a:r>
-            <a:endParaRPr lang="en-US" sz="1350" dirty="0"/>
-          </a:p>
-        </p:txBody>
-      </p:sp>
-      <p:sp>
-        <p:nvSpPr>
-          <p:cNvPr id="14" name="Text 12"/>
+              <a:t>포트폴리오의 주인공은 프로젝트입니다. 배경 그래픽이 화려하면 작업이 묻힙니다. 특히 결과 이미지가 강한 작업일수록 지면은 조용해야 합니다.</a:t>
+            </a:r>
+            <a:endParaRPr lang="en-US" sz="1400" dirty="0"/>
+          </a:p>
+        </p:txBody>
+      </p:sp>
+      <p:sp>
+        <p:nvSpPr>
+          <p:cNvPr id="10" name="Text 8"/>
           <p:cNvSpPr/>
           <p:nvPr/>
         </p:nvSpPr>
@@ -4899,7 +3075,7 @@
                 <a:ea typeface="Pretendard" pitchFamily="34" charset="-122"/>
                 <a:cs typeface="Pretendard" pitchFamily="34" charset="-120"/>
               </a:rPr>
-              <a:t>SECTION 01</a:t>
+              <a:t>포트폴리오제작 · WEEK 09</a:t>
             </a:r>
             <a:endParaRPr lang="en-US" sz="850" dirty="0"/>
           </a:p>
@@ -4919,7 +3095,7 @@
     <p:bg>
       <p:bgPr>
         <a:solidFill>
-          <a:srgbClr val="111111"/>
+          <a:srgbClr val="FFFFFF"/>
         </a:solidFill>
       </p:bgPr>
     </p:bg>
@@ -4964,7 +3140,7 @@
             <a:r>
               <a:rPr lang="en-US" sz="900" spc="120" kern="0" dirty="0">
                 <a:solidFill>
-                  <a:srgbClr val="9A9A9A"/>
+                  <a:srgbClr val="8A8A8A"/>
                 </a:solidFill>
                 <a:latin typeface="Pretendard" pitchFamily="34" charset="0"/>
                 <a:ea typeface="Pretendard" pitchFamily="34" charset="-122"/>
@@ -5003,7 +3179,7 @@
             <a:r>
               <a:rPr lang="en-US" sz="900" spc="120" kern="0" dirty="0">
                 <a:solidFill>
-                  <a:srgbClr val="9A9A9A"/>
+                  <a:srgbClr val="8A8A8A"/>
                 </a:solidFill>
                 <a:latin typeface="Pretendard" pitchFamily="34" charset="0"/>
                 <a:ea typeface="Pretendard" pitchFamily="34" charset="-122"/>
@@ -5042,7 +3218,7 @@
             <a:r>
               <a:rPr lang="en-US" sz="900" spc="200" kern="0" dirty="0">
                 <a:solidFill>
-                  <a:srgbClr val="9A9A9A"/>
+                  <a:srgbClr val="8A8A8A"/>
                 </a:solidFill>
                 <a:latin typeface="Pretendard" pitchFamily="34" charset="0"/>
                 <a:ea typeface="Pretendard" pitchFamily="34" charset="-122"/>
@@ -5069,11 +3245,11 @@
             <a:avLst/>
           </a:prstGeom>
           <a:solidFill>
-            <a:srgbClr val="333333"/>
+            <a:srgbClr val="DCDCDC"/>
           </a:solidFill>
           <a:ln w="12700">
             <a:solidFill>
-              <a:srgbClr val="333333"/>
+              <a:srgbClr val="DCDCDC"/>
             </a:solidFill>
             <a:prstDash val="solid"/>
           </a:ln>
@@ -5087,8 +3263,8 @@
         </p:nvSpPr>
         <p:spPr>
           <a:xfrm>
-            <a:off x="640080" y="2103120"/>
-            <a:ext cx="9144000" cy="256032"/>
+            <a:off x="640080" y="640080"/>
+            <a:ext cx="10911535" cy="219456"/>
           </a:xfrm>
           <a:prstGeom prst="rect">
             <a:avLst/>
@@ -5104,15 +3280,15 @@
               <a:buNone/>
             </a:pPr>
             <a:r>
-              <a:rPr lang="en-US" sz="950" spc="280" kern="0" dirty="0">
-                <a:solidFill>
-                  <a:srgbClr val="9A9A9A"/>
-                </a:solidFill>
-                <a:latin typeface="Pretendard" pitchFamily="34" charset="0"/>
-                <a:ea typeface="Pretendard" pitchFamily="34" charset="-122"/>
-                <a:cs typeface="Pretendard" pitchFamily="34" charset="-120"/>
-              </a:rPr>
-              <a:t>PRINCIPLE</a:t>
+              <a:rPr lang="en-US" sz="950" spc="260" kern="0" dirty="0">
+                <a:solidFill>
+                  <a:srgbClr val="8A8A8A"/>
+                </a:solidFill>
+                <a:latin typeface="Pretendard" pitchFamily="34" charset="0"/>
+                <a:ea typeface="Pretendard" pitchFamily="34" charset="-122"/>
+                <a:cs typeface="Pretendard" pitchFamily="34" charset="-120"/>
+              </a:rPr>
+              <a:t>COLOR</a:t>
             </a:r>
             <a:endParaRPr lang="en-US" sz="950" dirty="0"/>
           </a:p>
@@ -5120,20 +3296,469 @@
       </p:sp>
       <p:sp>
         <p:nvSpPr>
-          <p:cNvPr id="7" name="Shape 5"/>
-          <p:cNvSpPr/>
-          <p:nvPr/>
-        </p:nvSpPr>
-        <p:spPr>
-          <a:xfrm>
-            <a:off x="640080" y="2395728"/>
-            <a:ext cx="2194560" cy="7315"/>
+          <p:cNvPr id="7" name="Text 5"/>
+          <p:cNvSpPr/>
+          <p:nvPr/>
+        </p:nvSpPr>
+        <p:spPr>
+          <a:xfrm>
+            <a:off x="640080" y="859536"/>
+            <a:ext cx="10911535" cy="475488"/>
+          </a:xfrm>
+          <a:prstGeom prst="rect">
+            <a:avLst/>
+          </a:prstGeom>
+          <a:noFill/>
+          <a:ln/>
+        </p:spPr>
+        <p:txBody>
+          <a:bodyPr wrap="square" lIns="0" tIns="0" rIns="0" bIns="0" rtlCol="0" anchor="ctr"/>
+          <a:lstStyle/>
+          <a:p>
+            <a:pPr indent="0" marL="0">
+              <a:buNone/>
+            </a:pPr>
+            <a:r>
+              <a:rPr lang="en-US" sz="3000" dirty="0">
+                <a:solidFill>
+                  <a:srgbClr val="111111"/>
+                </a:solidFill>
+                <a:latin typeface="Pretendard SemiBold" pitchFamily="34" charset="0"/>
+                <a:ea typeface="Pretendard SemiBold" pitchFamily="34" charset="-122"/>
+                <a:cs typeface="Pretendard SemiBold" pitchFamily="34" charset="-120"/>
+              </a:rPr>
+              <a:t>컬러는 세 개면 충분합니다</a:t>
+            </a:r>
+            <a:endParaRPr lang="en-US" sz="3000" dirty="0"/>
+          </a:p>
+        </p:txBody>
+      </p:sp>
+      <p:sp>
+        <p:nvSpPr>
+          <p:cNvPr id="8" name="Text 6"/>
+          <p:cNvSpPr/>
+          <p:nvPr/>
+        </p:nvSpPr>
+        <p:spPr>
+          <a:xfrm>
+            <a:off x="640080" y="1371600"/>
+            <a:ext cx="10911535" cy="219456"/>
+          </a:xfrm>
+          <a:prstGeom prst="rect">
+            <a:avLst/>
+          </a:prstGeom>
+          <a:noFill/>
+          <a:ln/>
+        </p:spPr>
+        <p:txBody>
+          <a:bodyPr wrap="square" lIns="0" tIns="0" rIns="0" bIns="0" rtlCol="0" anchor="ctr"/>
+          <a:lstStyle/>
+          <a:p>
+            <a:pPr indent="0" marL="0">
+              <a:buNone/>
+            </a:pPr>
+            <a:r>
+              <a:rPr lang="en-US" sz="1150" dirty="0">
+                <a:solidFill>
+                  <a:srgbClr val="6E6E6E"/>
+                </a:solidFill>
+                <a:latin typeface="Pretendard" pitchFamily="34" charset="0"/>
+                <a:ea typeface="Pretendard" pitchFamily="34" charset="-122"/>
+                <a:cs typeface="Pretendard" pitchFamily="34" charset="-120"/>
+              </a:rPr>
+              <a:t>많이 쓸수록 통일감이 사라집니다.</a:t>
+            </a:r>
+            <a:endParaRPr lang="en-US" sz="1150" dirty="0"/>
+          </a:p>
+        </p:txBody>
+      </p:sp>
+      <p:sp>
+        <p:nvSpPr>
+          <p:cNvPr id="9" name="Shape 7"/>
+          <p:cNvSpPr/>
+          <p:nvPr/>
+        </p:nvSpPr>
+        <p:spPr>
+          <a:xfrm>
+            <a:off x="640080" y="1737360"/>
+            <a:ext cx="3393338" cy="3035808"/>
           </a:xfrm>
           <a:prstGeom prst="rect">
             <a:avLst/>
           </a:prstGeom>
           <a:solidFill>
             <a:srgbClr val="FFFFFF"/>
+          </a:solidFill>
+          <a:ln w="12700">
+            <a:solidFill>
+              <a:srgbClr val="DCDCDC"/>
+            </a:solidFill>
+            <a:prstDash val="solid"/>
+          </a:ln>
+        </p:spPr>
+      </p:sp>
+      <p:sp>
+        <p:nvSpPr>
+          <p:cNvPr id="10" name="Shape 8"/>
+          <p:cNvSpPr/>
+          <p:nvPr/>
+        </p:nvSpPr>
+        <p:spPr>
+          <a:xfrm>
+            <a:off x="1024128" y="2011680"/>
+            <a:ext cx="365760" cy="365760"/>
+          </a:xfrm>
+          <a:prstGeom prst="ellipse">
+            <a:avLst/>
+          </a:prstGeom>
+          <a:solidFill>
+            <a:srgbClr val="FFFFFF"/>
+          </a:solidFill>
+          <a:ln w="12700">
+            <a:solidFill>
+              <a:srgbClr val="111111"/>
+            </a:solidFill>
+            <a:prstDash val="solid"/>
+          </a:ln>
+        </p:spPr>
+      </p:sp>
+      <p:sp>
+        <p:nvSpPr>
+          <p:cNvPr id="11" name="Text 9"/>
+          <p:cNvSpPr/>
+          <p:nvPr/>
+        </p:nvSpPr>
+        <p:spPr>
+          <a:xfrm>
+            <a:off x="1024128" y="2011680"/>
+            <a:ext cx="365760" cy="365760"/>
+          </a:xfrm>
+          <a:prstGeom prst="rect">
+            <a:avLst/>
+          </a:prstGeom>
+          <a:noFill/>
+          <a:ln/>
+        </p:spPr>
+        <p:txBody>
+          <a:bodyPr wrap="square" lIns="0" tIns="0" rIns="0" bIns="0" rtlCol="0" anchor="ctr"/>
+          <a:lstStyle/>
+          <a:p>
+            <a:pPr algn="ctr" indent="0" marL="0">
+              <a:buNone/>
+            </a:pPr>
+            <a:r>
+              <a:rPr lang="en-US" sz="1150" b="1" dirty="0">
+                <a:solidFill>
+                  <a:srgbClr val="111111"/>
+                </a:solidFill>
+                <a:latin typeface="Pretendard" pitchFamily="34" charset="0"/>
+                <a:ea typeface="Pretendard" pitchFamily="34" charset="-122"/>
+                <a:cs typeface="Pretendard" pitchFamily="34" charset="-120"/>
+              </a:rPr>
+              <a:t>01</a:t>
+            </a:r>
+            <a:endParaRPr lang="en-US" sz="1150" dirty="0"/>
+          </a:p>
+        </p:txBody>
+      </p:sp>
+      <p:sp>
+        <p:nvSpPr>
+          <p:cNvPr id="12" name="Text 10"/>
+          <p:cNvSpPr/>
+          <p:nvPr/>
+        </p:nvSpPr>
+        <p:spPr>
+          <a:xfrm>
+            <a:off x="1024128" y="2505456"/>
+            <a:ext cx="2625242" cy="457200"/>
+          </a:xfrm>
+          <a:prstGeom prst="rect">
+            <a:avLst/>
+          </a:prstGeom>
+          <a:noFill/>
+          <a:ln/>
+        </p:spPr>
+        <p:txBody>
+          <a:bodyPr wrap="square" lIns="0" tIns="0" rIns="0" bIns="0" rtlCol="0" anchor="t"/>
+          <a:lstStyle/>
+          <a:p>
+            <a:pPr indent="0" marL="0">
+              <a:lnSpc>
+                <a:spcPct val="114000"/>
+              </a:lnSpc>
+              <a:buNone/>
+            </a:pPr>
+            <a:r>
+              <a:rPr lang="en-US" sz="1700" dirty="0">
+                <a:solidFill>
+                  <a:srgbClr val="111111"/>
+                </a:solidFill>
+                <a:latin typeface="Pretendard SemiBold" pitchFamily="34" charset="0"/>
+                <a:ea typeface="Pretendard SemiBold" pitchFamily="34" charset="-122"/>
+                <a:cs typeface="Pretendard SemiBold" pitchFamily="34" charset="-120"/>
+              </a:rPr>
+              <a:t>바탕색</a:t>
+            </a:r>
+            <a:endParaRPr lang="en-US" sz="1700" dirty="0"/>
+          </a:p>
+        </p:txBody>
+      </p:sp>
+      <p:sp>
+        <p:nvSpPr>
+          <p:cNvPr id="13" name="Text 11"/>
+          <p:cNvSpPr/>
+          <p:nvPr/>
+        </p:nvSpPr>
+        <p:spPr>
+          <a:xfrm>
+            <a:off x="1024128" y="2999232"/>
+            <a:ext cx="2625242" cy="1645920"/>
+          </a:xfrm>
+          <a:prstGeom prst="rect">
+            <a:avLst/>
+          </a:prstGeom>
+          <a:noFill/>
+          <a:ln/>
+        </p:spPr>
+        <p:txBody>
+          <a:bodyPr wrap="square" lIns="0" tIns="0" rIns="0" bIns="0" rtlCol="0" anchor="t"/>
+          <a:lstStyle/>
+          <a:p>
+            <a:pPr indent="0" marL="0">
+              <a:lnSpc>
+                <a:spcPct val="130000"/>
+              </a:lnSpc>
+              <a:buNone/>
+            </a:pPr>
+            <a:r>
+              <a:rPr lang="en-US" sz="1150" dirty="0">
+                <a:solidFill>
+                  <a:srgbClr val="6E6E6E"/>
+                </a:solidFill>
+                <a:latin typeface="Pretendard" pitchFamily="34" charset="0"/>
+                <a:ea typeface="Pretendard" pitchFamily="34" charset="-122"/>
+                <a:cs typeface="Pretendard" pitchFamily="34" charset="-120"/>
+              </a:rPr>
+              <a:t>지면의 70~80%. 흰색 또는 아주 옅은 회색이 무난합니다. 어두운 바탕은 인쇄와 화면에서 결과가 크게 달라지니 주의.</a:t>
+            </a:r>
+            <a:endParaRPr lang="en-US" sz="1150" dirty="0"/>
+          </a:p>
+        </p:txBody>
+      </p:sp>
+      <p:sp>
+        <p:nvSpPr>
+          <p:cNvPr id="14" name="Shape 12"/>
+          <p:cNvSpPr/>
+          <p:nvPr/>
+        </p:nvSpPr>
+        <p:spPr>
+          <a:xfrm>
+            <a:off x="4399178" y="1737360"/>
+            <a:ext cx="3393338" cy="3035808"/>
+          </a:xfrm>
+          <a:prstGeom prst="rect">
+            <a:avLst/>
+          </a:prstGeom>
+          <a:solidFill>
+            <a:srgbClr val="FFFFFF"/>
+          </a:solidFill>
+          <a:ln w="12700">
+            <a:solidFill>
+              <a:srgbClr val="DCDCDC"/>
+            </a:solidFill>
+            <a:prstDash val="solid"/>
+          </a:ln>
+        </p:spPr>
+      </p:sp>
+      <p:sp>
+        <p:nvSpPr>
+          <p:cNvPr id="15" name="Shape 13"/>
+          <p:cNvSpPr/>
+          <p:nvPr/>
+        </p:nvSpPr>
+        <p:spPr>
+          <a:xfrm>
+            <a:off x="4783226" y="2011680"/>
+            <a:ext cx="365760" cy="365760"/>
+          </a:xfrm>
+          <a:prstGeom prst="ellipse">
+            <a:avLst/>
+          </a:prstGeom>
+          <a:solidFill>
+            <a:srgbClr val="FFFFFF"/>
+          </a:solidFill>
+          <a:ln w="12700">
+            <a:solidFill>
+              <a:srgbClr val="111111"/>
+            </a:solidFill>
+            <a:prstDash val="solid"/>
+          </a:ln>
+        </p:spPr>
+      </p:sp>
+      <p:sp>
+        <p:nvSpPr>
+          <p:cNvPr id="16" name="Text 14"/>
+          <p:cNvSpPr/>
+          <p:nvPr/>
+        </p:nvSpPr>
+        <p:spPr>
+          <a:xfrm>
+            <a:off x="4783226" y="2011680"/>
+            <a:ext cx="365760" cy="365760"/>
+          </a:xfrm>
+          <a:prstGeom prst="rect">
+            <a:avLst/>
+          </a:prstGeom>
+          <a:noFill/>
+          <a:ln/>
+        </p:spPr>
+        <p:txBody>
+          <a:bodyPr wrap="square" lIns="0" tIns="0" rIns="0" bIns="0" rtlCol="0" anchor="ctr"/>
+          <a:lstStyle/>
+          <a:p>
+            <a:pPr algn="ctr" indent="0" marL="0">
+              <a:buNone/>
+            </a:pPr>
+            <a:r>
+              <a:rPr lang="en-US" sz="1150" b="1" dirty="0">
+                <a:solidFill>
+                  <a:srgbClr val="111111"/>
+                </a:solidFill>
+                <a:latin typeface="Pretendard" pitchFamily="34" charset="0"/>
+                <a:ea typeface="Pretendard" pitchFamily="34" charset="-122"/>
+                <a:cs typeface="Pretendard" pitchFamily="34" charset="-120"/>
+              </a:rPr>
+              <a:t>02</a:t>
+            </a:r>
+            <a:endParaRPr lang="en-US" sz="1150" dirty="0"/>
+          </a:p>
+        </p:txBody>
+      </p:sp>
+      <p:sp>
+        <p:nvSpPr>
+          <p:cNvPr id="17" name="Text 15"/>
+          <p:cNvSpPr/>
+          <p:nvPr/>
+        </p:nvSpPr>
+        <p:spPr>
+          <a:xfrm>
+            <a:off x="4783226" y="2505456"/>
+            <a:ext cx="2625242" cy="457200"/>
+          </a:xfrm>
+          <a:prstGeom prst="rect">
+            <a:avLst/>
+          </a:prstGeom>
+          <a:noFill/>
+          <a:ln/>
+        </p:spPr>
+        <p:txBody>
+          <a:bodyPr wrap="square" lIns="0" tIns="0" rIns="0" bIns="0" rtlCol="0" anchor="t"/>
+          <a:lstStyle/>
+          <a:p>
+            <a:pPr indent="0" marL="0">
+              <a:lnSpc>
+                <a:spcPct val="114000"/>
+              </a:lnSpc>
+              <a:buNone/>
+            </a:pPr>
+            <a:r>
+              <a:rPr lang="en-US" sz="1700" dirty="0">
+                <a:solidFill>
+                  <a:srgbClr val="111111"/>
+                </a:solidFill>
+                <a:latin typeface="Pretendard SemiBold" pitchFamily="34" charset="0"/>
+                <a:ea typeface="Pretendard SemiBold" pitchFamily="34" charset="-122"/>
+                <a:cs typeface="Pretendard SemiBold" pitchFamily="34" charset="-120"/>
+              </a:rPr>
+              <a:t>글자색</a:t>
+            </a:r>
+            <a:endParaRPr lang="en-US" sz="1700" dirty="0"/>
+          </a:p>
+        </p:txBody>
+      </p:sp>
+      <p:sp>
+        <p:nvSpPr>
+          <p:cNvPr id="18" name="Text 16"/>
+          <p:cNvSpPr/>
+          <p:nvPr/>
+        </p:nvSpPr>
+        <p:spPr>
+          <a:xfrm>
+            <a:off x="4783226" y="2999232"/>
+            <a:ext cx="2625242" cy="1645920"/>
+          </a:xfrm>
+          <a:prstGeom prst="rect">
+            <a:avLst/>
+          </a:prstGeom>
+          <a:noFill/>
+          <a:ln/>
+        </p:spPr>
+        <p:txBody>
+          <a:bodyPr wrap="square" lIns="0" tIns="0" rIns="0" bIns="0" rtlCol="0" anchor="t"/>
+          <a:lstStyle/>
+          <a:p>
+            <a:pPr indent="0" marL="0">
+              <a:lnSpc>
+                <a:spcPct val="130000"/>
+              </a:lnSpc>
+              <a:buNone/>
+            </a:pPr>
+            <a:r>
+              <a:rPr lang="en-US" sz="1150" dirty="0">
+                <a:solidFill>
+                  <a:srgbClr val="6E6E6E"/>
+                </a:solidFill>
+                <a:latin typeface="Pretendard" pitchFamily="34" charset="0"/>
+                <a:ea typeface="Pretendard" pitchFamily="34" charset="-122"/>
+                <a:cs typeface="Pretendard" pitchFamily="34" charset="-120"/>
+              </a:rPr>
+              <a:t>완전한 검정보다 살짝 낮춘 진회색이 읽기 편합니다. 본문과 캡션에 명도 차를 둡니다.</a:t>
+            </a:r>
+            <a:endParaRPr lang="en-US" sz="1150" dirty="0"/>
+          </a:p>
+        </p:txBody>
+      </p:sp>
+      <p:sp>
+        <p:nvSpPr>
+          <p:cNvPr id="19" name="Shape 17"/>
+          <p:cNvSpPr/>
+          <p:nvPr/>
+        </p:nvSpPr>
+        <p:spPr>
+          <a:xfrm>
+            <a:off x="8158277" y="1737360"/>
+            <a:ext cx="3393338" cy="3035808"/>
+          </a:xfrm>
+          <a:prstGeom prst="rect">
+            <a:avLst/>
+          </a:prstGeom>
+          <a:solidFill>
+            <a:srgbClr val="111111"/>
+          </a:solidFill>
+          <a:ln w="12700">
+            <a:solidFill>
+              <a:srgbClr val="111111"/>
+            </a:solidFill>
+            <a:prstDash val="solid"/>
+          </a:ln>
+        </p:spPr>
+      </p:sp>
+      <p:sp>
+        <p:nvSpPr>
+          <p:cNvPr id="20" name="Shape 18"/>
+          <p:cNvSpPr/>
+          <p:nvPr/>
+        </p:nvSpPr>
+        <p:spPr>
+          <a:xfrm>
+            <a:off x="8542325" y="2011680"/>
+            <a:ext cx="365760" cy="365760"/>
+          </a:xfrm>
+          <a:prstGeom prst="ellipse">
+            <a:avLst/>
+          </a:prstGeom>
+          <a:solidFill>
+            <a:srgbClr val="111111"/>
           </a:solidFill>
           <a:ln w="12700">
             <a:solidFill>
@@ -5145,14 +3770,53 @@
       </p:sp>
       <p:sp>
         <p:nvSpPr>
-          <p:cNvPr id="8" name="Text 6"/>
-          <p:cNvSpPr/>
-          <p:nvPr/>
-        </p:nvSpPr>
-        <p:spPr>
-          <a:xfrm>
-            <a:off x="640080" y="2596896"/>
-            <a:ext cx="10241280" cy="1371600"/>
+          <p:cNvPr id="21" name="Text 19"/>
+          <p:cNvSpPr/>
+          <p:nvPr/>
+        </p:nvSpPr>
+        <p:spPr>
+          <a:xfrm>
+            <a:off x="8542325" y="2011680"/>
+            <a:ext cx="365760" cy="365760"/>
+          </a:xfrm>
+          <a:prstGeom prst="rect">
+            <a:avLst/>
+          </a:prstGeom>
+          <a:noFill/>
+          <a:ln/>
+        </p:spPr>
+        <p:txBody>
+          <a:bodyPr wrap="square" lIns="0" tIns="0" rIns="0" bIns="0" rtlCol="0" anchor="ctr"/>
+          <a:lstStyle/>
+          <a:p>
+            <a:pPr algn="ctr" indent="0" marL="0">
+              <a:buNone/>
+            </a:pPr>
+            <a:r>
+              <a:rPr lang="en-US" sz="1150" b="1" dirty="0">
+                <a:solidFill>
+                  <a:srgbClr val="FFFFFF"/>
+                </a:solidFill>
+                <a:latin typeface="Pretendard" pitchFamily="34" charset="0"/>
+                <a:ea typeface="Pretendard" pitchFamily="34" charset="-122"/>
+                <a:cs typeface="Pretendard" pitchFamily="34" charset="-120"/>
+              </a:rPr>
+              <a:t>03</a:t>
+            </a:r>
+            <a:endParaRPr lang="en-US" sz="1150" dirty="0"/>
+          </a:p>
+        </p:txBody>
+      </p:sp>
+      <p:sp>
+        <p:nvSpPr>
+          <p:cNvPr id="22" name="Text 20"/>
+          <p:cNvSpPr/>
+          <p:nvPr/>
+        </p:nvSpPr>
+        <p:spPr>
+          <a:xfrm>
+            <a:off x="8542325" y="2505456"/>
+            <a:ext cx="2625242" cy="457200"/>
           </a:xfrm>
           <a:prstGeom prst="rect">
             <a:avLst/>
@@ -5166,12 +3830,12 @@
           <a:p>
             <a:pPr indent="0" marL="0">
               <a:lnSpc>
-                <a:spcPct val="122000"/>
+                <a:spcPct val="114000"/>
               </a:lnSpc>
               <a:buNone/>
             </a:pPr>
             <a:r>
-              <a:rPr lang="en-US" sz="3400" dirty="0">
+              <a:rPr lang="en-US" sz="1700" dirty="0">
                 <a:solidFill>
                   <a:srgbClr val="FFFFFF"/>
                 </a:solidFill>
@@ -5179,42 +3843,89 @@
                 <a:ea typeface="Pretendard SemiBold" pitchFamily="34" charset="-122"/>
                 <a:cs typeface="Pretendard SemiBold" pitchFamily="34" charset="-120"/>
               </a:rPr>
-              <a:t>비주얼은 내용을 도와야지</a:t>
-            </a:r>
-            <a:endParaRPr lang="en-US" sz="3400" dirty="0"/>
-          </a:p>
+              <a:t>강조색</a:t>
+            </a:r>
+            <a:endParaRPr lang="en-US" sz="1700" dirty="0"/>
+          </a:p>
+        </p:txBody>
+      </p:sp>
+      <p:sp>
+        <p:nvSpPr>
+          <p:cNvPr id="23" name="Text 21"/>
+          <p:cNvSpPr/>
+          <p:nvPr/>
+        </p:nvSpPr>
+        <p:spPr>
+          <a:xfrm>
+            <a:off x="8542325" y="2999232"/>
+            <a:ext cx="2625242" cy="1645920"/>
+          </a:xfrm>
+          <a:prstGeom prst="rect">
+            <a:avLst/>
+          </a:prstGeom>
+          <a:noFill/>
+          <a:ln/>
+        </p:spPr>
+        <p:txBody>
+          <a:bodyPr wrap="square" lIns="0" tIns="0" rIns="0" bIns="0" rtlCol="0" anchor="t"/>
+          <a:lstStyle/>
           <a:p>
             <a:pPr indent="0" marL="0">
               <a:lnSpc>
-                <a:spcPct val="122000"/>
+                <a:spcPct val="130000"/>
               </a:lnSpc>
               <a:buNone/>
             </a:pPr>
             <a:r>
-              <a:rPr lang="en-US" sz="3400" dirty="0">
-                <a:solidFill>
-                  <a:srgbClr val="FFFFFF"/>
-                </a:solidFill>
-                <a:latin typeface="Pretendard SemiBold" pitchFamily="34" charset="0"/>
-                <a:ea typeface="Pretendard SemiBold" pitchFamily="34" charset="-122"/>
-                <a:cs typeface="Pretendard SemiBold" pitchFamily="34" charset="-120"/>
-              </a:rPr>
-              <a:t>내용과 경쟁하면 안 됩니다.</a:t>
-            </a:r>
-            <a:endParaRPr lang="en-US" sz="3400" dirty="0"/>
-          </a:p>
-        </p:txBody>
-      </p:sp>
-      <p:sp>
-        <p:nvSpPr>
-          <p:cNvPr id="9" name="Text 7"/>
-          <p:cNvSpPr/>
-          <p:nvPr/>
-        </p:nvSpPr>
-        <p:spPr>
-          <a:xfrm>
-            <a:off x="640080" y="4078224"/>
-            <a:ext cx="9509760" cy="914400"/>
+              <a:rPr lang="en-US" sz="1150" dirty="0">
+                <a:solidFill>
+                  <a:srgbClr val="B8B8B8"/>
+                </a:solidFill>
+                <a:latin typeface="Pretendard" pitchFamily="34" charset="0"/>
+                <a:ea typeface="Pretendard" pitchFamily="34" charset="-122"/>
+                <a:cs typeface="Pretendard" pitchFamily="34" charset="-120"/>
+              </a:rPr>
+              <a:t>딱 하나. 제목 · 태그 · 구분 요소에만 씁니다. 두 개가 되는 순간 강조가 아니게 됩니다.</a:t>
+            </a:r>
+            <a:endParaRPr lang="en-US" sz="1150" dirty="0"/>
+          </a:p>
+        </p:txBody>
+      </p:sp>
+      <p:sp>
+        <p:nvSpPr>
+          <p:cNvPr id="24" name="Shape 22"/>
+          <p:cNvSpPr/>
+          <p:nvPr/>
+        </p:nvSpPr>
+        <p:spPr>
+          <a:xfrm>
+            <a:off x="640080" y="5084064"/>
+            <a:ext cx="10911535" cy="7315"/>
+          </a:xfrm>
+          <a:prstGeom prst="rect">
+            <a:avLst/>
+          </a:prstGeom>
+          <a:solidFill>
+            <a:srgbClr val="111111"/>
+          </a:solidFill>
+          <a:ln w="12700">
+            <a:solidFill>
+              <a:srgbClr val="111111"/>
+            </a:solidFill>
+            <a:prstDash val="solid"/>
+          </a:ln>
+        </p:spPr>
+      </p:sp>
+      <p:sp>
+        <p:nvSpPr>
+          <p:cNvPr id="25" name="Text 23"/>
+          <p:cNvSpPr/>
+          <p:nvPr/>
+        </p:nvSpPr>
+        <p:spPr>
+          <a:xfrm>
+            <a:off x="640080" y="5193792"/>
+            <a:ext cx="10911535" cy="438912"/>
           </a:xfrm>
           <a:prstGeom prst="rect">
             <a:avLst/>
@@ -5228,59 +3939,123 @@
           <a:p>
             <a:pPr indent="0" marL="0">
               <a:lnSpc>
-                <a:spcPct val="136000"/>
+                <a:spcPct val="120000"/>
               </a:lnSpc>
               <a:buNone/>
             </a:pPr>
             <a:r>
-              <a:rPr lang="en-US" sz="1400" dirty="0">
-                <a:solidFill>
-                  <a:srgbClr val="B8B8B8"/>
-                </a:solidFill>
-                <a:latin typeface="Pretendard Light" pitchFamily="34" charset="0"/>
-                <a:ea typeface="Pretendard Light" pitchFamily="34" charset="-122"/>
-                <a:cs typeface="Pretendard Light" pitchFamily="34" charset="-120"/>
-              </a:rPr>
-              <a:t>포트폴리오의 주인공은 프로젝트입니다. 배경 그래픽이 화려하면 작업이 묻힙니다. 특히 결과 이미지가 강한 작업일수록 지면은 조용해야 합니다.</a:t>
-            </a:r>
-            <a:endParaRPr lang="en-US" sz="1400" dirty="0"/>
-          </a:p>
-        </p:txBody>
-      </p:sp>
-      <p:sp>
-        <p:nvSpPr>
-          <p:cNvPr id="10" name="Text 8"/>
-          <p:cNvSpPr/>
-          <p:nvPr/>
-        </p:nvSpPr>
-        <p:spPr>
-          <a:xfrm rot="16200000">
-            <a:off x="10436047" y="3291840"/>
-            <a:ext cx="2743200" cy="274320"/>
-          </a:xfrm>
-          <a:prstGeom prst="rect">
-            <a:avLst/>
-          </a:prstGeom>
-          <a:noFill/>
-          <a:ln/>
-        </p:spPr>
-        <p:txBody>
-          <a:bodyPr wrap="square" lIns="0" tIns="0" rIns="0" bIns="0" rtlCol="0" anchor="ctr"/>
-          <a:lstStyle/>
-          <a:p>
-            <a:pPr algn="ctr" indent="0" marL="0">
-              <a:buNone/>
-            </a:pPr>
-            <a:r>
-              <a:rPr lang="en-US" sz="850" spc="260" kern="0" dirty="0">
-                <a:solidFill>
-                  <a:srgbClr val="7A7A7A"/>
-                </a:solidFill>
-                <a:latin typeface="Pretendard" pitchFamily="34" charset="0"/>
-                <a:ea typeface="Pretendard" pitchFamily="34" charset="-122"/>
-                <a:cs typeface="Pretendard" pitchFamily="34" charset="-120"/>
-              </a:rPr>
-              <a:t>포트폴리오제작 · WEEK 09</a:t>
+              <a:rPr lang="en-US" sz="1300" b="1" dirty="0">
+                <a:solidFill>
+                  <a:srgbClr val="111111"/>
+                </a:solidFill>
+                <a:latin typeface="Pretendard" pitchFamily="34" charset="0"/>
+                <a:ea typeface="Pretendard" pitchFamily="34" charset="-122"/>
+                <a:cs typeface="Pretendard" pitchFamily="34" charset="-120"/>
+              </a:rPr>
+              <a:t>프로젝트 결과 이미지의 색이 이미 다양합니다. 지면 색까지 많으면 정리가 안 됩니다.</a:t>
+            </a:r>
+            <a:endParaRPr lang="en-US" sz="1300" dirty="0"/>
+          </a:p>
+        </p:txBody>
+      </p:sp>
+      <p:sp>
+        <p:nvSpPr>
+          <p:cNvPr id="26" name="Shape 24"/>
+          <p:cNvSpPr/>
+          <p:nvPr/>
+        </p:nvSpPr>
+        <p:spPr>
+          <a:xfrm>
+            <a:off x="640080" y="6291072"/>
+            <a:ext cx="10911535" cy="7315"/>
+          </a:xfrm>
+          <a:prstGeom prst="rect">
+            <a:avLst/>
+          </a:prstGeom>
+          <a:solidFill>
+            <a:srgbClr val="DCDCDC"/>
+          </a:solidFill>
+          <a:ln w="12700">
+            <a:solidFill>
+              <a:srgbClr val="DCDCDC"/>
+            </a:solidFill>
+            <a:prstDash val="solid"/>
+          </a:ln>
+        </p:spPr>
+      </p:sp>
+      <p:sp>
+        <p:nvSpPr>
+          <p:cNvPr id="27" name="Text 25"/>
+          <p:cNvSpPr/>
+          <p:nvPr/>
+        </p:nvSpPr>
+        <p:spPr>
+          <a:xfrm>
+            <a:off x="640080" y="6382512"/>
+            <a:ext cx="7772400" cy="237744"/>
+          </a:xfrm>
+          <a:prstGeom prst="rect">
+            <a:avLst/>
+          </a:prstGeom>
+          <a:noFill/>
+          <a:ln/>
+        </p:spPr>
+        <p:txBody>
+          <a:bodyPr wrap="square" lIns="0" tIns="0" rIns="0" bIns="0" rtlCol="0" anchor="ctr"/>
+          <a:lstStyle/>
+          <a:p>
+            <a:pPr indent="0" marL="0">
+              <a:buNone/>
+            </a:pPr>
+            <a:r>
+              <a:rPr lang="en-US" sz="850" spc="40" kern="0" dirty="0">
+                <a:solidFill>
+                  <a:srgbClr val="9B9B9B"/>
+                </a:solidFill>
+                <a:latin typeface="Pretendard" pitchFamily="34" charset="0"/>
+                <a:ea typeface="Pretendard" pitchFamily="34" charset="-122"/>
+                <a:cs typeface="Pretendard" pitchFamily="34" charset="-120"/>
+              </a:rPr>
+              <a:t>포트폴리오제작 · 9주차 비주얼 아이덴티티 / 레이아웃 기획</a:t>
+            </a:r>
+            <a:endParaRPr lang="en-US" sz="850" dirty="0"/>
+          </a:p>
+        </p:txBody>
+      </p:sp>
+      <p:sp>
+        <p:nvSpPr>
+          <p:cNvPr id="28" name="Text 26"/>
+          <p:cNvSpPr/>
+          <p:nvPr/>
+        </p:nvSpPr>
+        <p:spPr>
+          <a:xfrm>
+            <a:off x="10271455" y="6382512"/>
+            <a:ext cx="1280160" cy="237744"/>
+          </a:xfrm>
+          <a:prstGeom prst="rect">
+            <a:avLst/>
+          </a:prstGeom>
+          <a:noFill/>
+          <a:ln/>
+        </p:spPr>
+        <p:txBody>
+          <a:bodyPr wrap="square" lIns="0" tIns="0" rIns="0" bIns="0" rtlCol="0" anchor="ctr"/>
+          <a:lstStyle/>
+          <a:p>
+            <a:pPr algn="r" indent="0" marL="0">
+              <a:buNone/>
+            </a:pPr>
+            <a:r>
+              <a:rPr lang="en-US" sz="850" spc="140" kern="0" dirty="0">
+                <a:solidFill>
+                  <a:srgbClr val="9B9B9B"/>
+                </a:solidFill>
+                <a:latin typeface="Pretendard" pitchFamily="34" charset="0"/>
+                <a:ea typeface="Pretendard" pitchFamily="34" charset="-122"/>
+                <a:cs typeface="Pretendard" pitchFamily="34" charset="-120"/>
+              </a:rPr>
+              <a:t>P.01</a:t>
             </a:r>
             <a:endParaRPr lang="en-US" sz="850" dirty="0"/>
           </a:p>
@@ -5493,7 +4268,7 @@
                 <a:ea typeface="Pretendard" pitchFamily="34" charset="-122"/>
                 <a:cs typeface="Pretendard" pitchFamily="34" charset="-120"/>
               </a:rPr>
-              <a:t>COLOR</a:t>
+              <a:t>TYPE</a:t>
             </a:r>
             <a:endParaRPr lang="en-US" sz="950" dirty="0"/>
           </a:p>
@@ -5532,7 +4307,7 @@
                 <a:ea typeface="Pretendard SemiBold" pitchFamily="34" charset="-122"/>
                 <a:cs typeface="Pretendard SemiBold" pitchFamily="34" charset="-120"/>
               </a:rPr>
-              <a:t>컬러는 세 개면 충분합니다</a:t>
+              <a:t>타이포는 세 단계 · 서체는 한두 벌</a:t>
             </a:r>
             <a:endParaRPr lang="en-US" sz="3000" dirty="0"/>
           </a:p>
@@ -5571,7 +4346,7 @@
                 <a:ea typeface="Pretendard" pitchFamily="34" charset="-122"/>
                 <a:cs typeface="Pretendard" pitchFamily="34" charset="-120"/>
               </a:rPr>
-              <a:t>많이 쓸수록 통일감이 사라집니다.</a:t>
+              <a:t>9주차에 정하고 학기 끝까지 바꾸지 않습니다.</a:t>
             </a:r>
             <a:endParaRPr lang="en-US" sz="1150" dirty="0"/>
           </a:p>
@@ -5585,18 +4360,18 @@
         </p:nvSpPr>
         <p:spPr>
           <a:xfrm>
-            <a:off x="640080" y="1737360"/>
-            <a:ext cx="3393338" cy="3035808"/>
+            <a:off x="640080" y="1664208"/>
+            <a:ext cx="10911535" cy="7315"/>
           </a:xfrm>
           <a:prstGeom prst="rect">
             <a:avLst/>
           </a:prstGeom>
           <a:solidFill>
-            <a:srgbClr val="FFFFFF"/>
+            <a:srgbClr val="111111"/>
           </a:solidFill>
           <a:ln w="12700">
             <a:solidFill>
-              <a:srgbClr val="DCDCDC"/>
+              <a:srgbClr val="111111"/>
             </a:solidFill>
             <a:prstDash val="solid"/>
           </a:ln>
@@ -5610,8 +4385,8 @@
         </p:nvSpPr>
         <p:spPr>
           <a:xfrm>
-            <a:off x="1024128" y="2011680"/>
-            <a:ext cx="365760" cy="365760"/>
+            <a:off x="640080" y="1810512"/>
+            <a:ext cx="310896" cy="310896"/>
           </a:xfrm>
           <a:prstGeom prst="ellipse">
             <a:avLst/>
@@ -5635,8 +4410,8 @@
         </p:nvSpPr>
         <p:spPr>
           <a:xfrm>
-            <a:off x="1024128" y="2011680"/>
-            <a:ext cx="365760" cy="365760"/>
+            <a:off x="640080" y="1810512"/>
+            <a:ext cx="310896" cy="310896"/>
           </a:xfrm>
           <a:prstGeom prst="rect">
             <a:avLst/>
@@ -5652,7 +4427,7 @@
               <a:buNone/>
             </a:pPr>
             <a:r>
-              <a:rPr lang="en-US" sz="1150" b="1" dirty="0">
+              <a:rPr lang="en-US" sz="1000" b="1" dirty="0">
                 <a:solidFill>
                   <a:srgbClr val="111111"/>
                 </a:solidFill>
@@ -5660,9 +4435,9 @@
                 <a:ea typeface="Pretendard" pitchFamily="34" charset="-122"/>
                 <a:cs typeface="Pretendard" pitchFamily="34" charset="-120"/>
               </a:rPr>
-              <a:t>01</a:t>
-            </a:r>
-            <a:endParaRPr lang="en-US" sz="1150" dirty="0"/>
+              <a:t>1</a:t>
+            </a:r>
+            <a:endParaRPr lang="en-US" sz="1000" dirty="0"/>
           </a:p>
         </p:txBody>
       </p:sp>
@@ -5674,27 +4449,24 @@
         </p:nvSpPr>
         <p:spPr>
           <a:xfrm>
-            <a:off x="1024128" y="2505456"/>
-            <a:ext cx="2625242" cy="457200"/>
-          </a:xfrm>
-          <a:prstGeom prst="rect">
-            <a:avLst/>
-          </a:prstGeom>
-          <a:noFill/>
-          <a:ln/>
-        </p:spPr>
-        <p:txBody>
-          <a:bodyPr wrap="square" lIns="0" tIns="0" rIns="0" bIns="0" rtlCol="0" anchor="t"/>
+            <a:off x="1188720" y="1719072"/>
+            <a:ext cx="7498080" cy="310896"/>
+          </a:xfrm>
+          <a:prstGeom prst="rect">
+            <a:avLst/>
+          </a:prstGeom>
+          <a:noFill/>
+          <a:ln/>
+        </p:spPr>
+        <p:txBody>
+          <a:bodyPr wrap="square" lIns="0" tIns="0" rIns="0" bIns="0" rtlCol="0" anchor="ctr"/>
           <a:lstStyle/>
           <a:p>
             <a:pPr indent="0" marL="0">
-              <a:lnSpc>
-                <a:spcPct val="114000"/>
-              </a:lnSpc>
-              <a:buNone/>
-            </a:pPr>
-            <a:r>
-              <a:rPr lang="en-US" sz="1700" dirty="0">
+              <a:buNone/>
+            </a:pPr>
+            <a:r>
+              <a:rPr lang="en-US" sz="1450" dirty="0">
                 <a:solidFill>
                   <a:srgbClr val="111111"/>
                 </a:solidFill>
@@ -5702,9 +4474,9 @@
                 <a:ea typeface="Pretendard SemiBold" pitchFamily="34" charset="-122"/>
                 <a:cs typeface="Pretendard SemiBold" pitchFamily="34" charset="-120"/>
               </a:rPr>
-              <a:t>바탕색</a:t>
-            </a:r>
-            <a:endParaRPr lang="en-US" sz="1700" dirty="0"/>
+              <a:t>제목</a:t>
+            </a:r>
+            <a:endParaRPr lang="en-US" sz="1450" dirty="0"/>
           </a:p>
         </p:txBody>
       </p:sp>
@@ -5716,27 +4488,24 @@
         </p:nvSpPr>
         <p:spPr>
           <a:xfrm>
-            <a:off x="1024128" y="2999232"/>
-            <a:ext cx="2625242" cy="1645920"/>
-          </a:xfrm>
-          <a:prstGeom prst="rect">
-            <a:avLst/>
-          </a:prstGeom>
-          <a:noFill/>
-          <a:ln/>
-        </p:spPr>
-        <p:txBody>
-          <a:bodyPr wrap="square" lIns="0" tIns="0" rIns="0" bIns="0" rtlCol="0" anchor="t"/>
+            <a:off x="1188720" y="2029968"/>
+            <a:ext cx="7498080" cy="292608"/>
+          </a:xfrm>
+          <a:prstGeom prst="rect">
+            <a:avLst/>
+          </a:prstGeom>
+          <a:noFill/>
+          <a:ln/>
+        </p:spPr>
+        <p:txBody>
+          <a:bodyPr wrap="square" lIns="0" tIns="0" rIns="0" bIns="0" rtlCol="0" anchor="ctr"/>
           <a:lstStyle/>
           <a:p>
             <a:pPr indent="0" marL="0">
-              <a:lnSpc>
-                <a:spcPct val="130000"/>
-              </a:lnSpc>
-              <a:buNone/>
-            </a:pPr>
-            <a:r>
-              <a:rPr lang="en-US" sz="1150" dirty="0">
+              <a:buNone/>
+            </a:pPr>
+            <a:r>
+              <a:rPr lang="en-US" sz="1100" dirty="0">
                 <a:solidFill>
                   <a:srgbClr val="6E6E6E"/>
                 </a:solidFill>
@@ -5744,28 +4513,67 @@
                 <a:ea typeface="Pretendard" pitchFamily="34" charset="-122"/>
                 <a:cs typeface="Pretendard" pitchFamily="34" charset="-120"/>
               </a:rPr>
-              <a:t>지면의 70~80%. 흰색 또는 아주 옅은 회색이 무난합니다. 어두운 바탕은 인쇄와 화면에서 결과가 크게 달라지니 주의.</a:t>
-            </a:r>
-            <a:endParaRPr lang="en-US" sz="1150" dirty="0"/>
-          </a:p>
-        </p:txBody>
-      </p:sp>
-      <p:sp>
-        <p:nvSpPr>
-          <p:cNvPr id="14" name="Shape 12"/>
-          <p:cNvSpPr/>
-          <p:nvPr/>
-        </p:nvSpPr>
-        <p:spPr>
-          <a:xfrm>
-            <a:off x="4399178" y="1737360"/>
-            <a:ext cx="3393338" cy="3035808"/>
+              <a:t>페이지에서 가장 큰 것. 프로젝트명과 문제 문장에 씁니다</a:t>
+            </a:r>
+            <a:endParaRPr lang="en-US" sz="1100" dirty="0"/>
+          </a:p>
+        </p:txBody>
+      </p:sp>
+      <p:sp>
+        <p:nvSpPr>
+          <p:cNvPr id="14" name="Text 12"/>
+          <p:cNvSpPr/>
+          <p:nvPr/>
+        </p:nvSpPr>
+        <p:spPr>
+          <a:xfrm>
+            <a:off x="9357055" y="1810512"/>
+            <a:ext cx="2194560" cy="310896"/>
+          </a:xfrm>
+          <a:prstGeom prst="rect">
+            <a:avLst/>
+          </a:prstGeom>
+          <a:noFill/>
+          <a:ln/>
+        </p:spPr>
+        <p:txBody>
+          <a:bodyPr wrap="square" lIns="0" tIns="0" rIns="0" bIns="0" rtlCol="0" anchor="ctr"/>
+          <a:lstStyle/>
+          <a:p>
+            <a:pPr algn="r" indent="0" marL="0">
+              <a:buNone/>
+            </a:pPr>
+            <a:r>
+              <a:rPr lang="en-US" sz="1050" b="1" spc="120" kern="0" dirty="0">
+                <a:solidFill>
+                  <a:srgbClr val="111111"/>
+                </a:solidFill>
+                <a:latin typeface="Pretendard" pitchFamily="34" charset="0"/>
+                <a:ea typeface="Pretendard" pitchFamily="34" charset="-122"/>
+                <a:cs typeface="Pretendard" pitchFamily="34" charset="-120"/>
+              </a:rPr>
+              <a:t>1단계</a:t>
+            </a:r>
+            <a:endParaRPr lang="en-US" sz="1050" dirty="0"/>
+          </a:p>
+        </p:txBody>
+      </p:sp>
+      <p:sp>
+        <p:nvSpPr>
+          <p:cNvPr id="15" name="Shape 13"/>
+          <p:cNvSpPr/>
+          <p:nvPr/>
+        </p:nvSpPr>
+        <p:spPr>
+          <a:xfrm>
+            <a:off x="640080" y="2596896"/>
+            <a:ext cx="10911535" cy="7315"/>
           </a:xfrm>
           <a:prstGeom prst="rect">
             <a:avLst/>
           </a:prstGeom>
           <a:solidFill>
-            <a:srgbClr val="FFFFFF"/>
+            <a:srgbClr val="DCDCDC"/>
           </a:solidFill>
           <a:ln w="12700">
             <a:solidFill>
@@ -5777,14 +4585,14 @@
       </p:sp>
       <p:sp>
         <p:nvSpPr>
-          <p:cNvPr id="15" name="Shape 13"/>
-          <p:cNvSpPr/>
-          <p:nvPr/>
-        </p:nvSpPr>
-        <p:spPr>
-          <a:xfrm>
-            <a:off x="4783226" y="2011680"/>
-            <a:ext cx="365760" cy="365760"/>
+          <p:cNvPr id="16" name="Shape 14"/>
+          <p:cNvSpPr/>
+          <p:nvPr/>
+        </p:nvSpPr>
+        <p:spPr>
+          <a:xfrm>
+            <a:off x="640080" y="2761488"/>
+            <a:ext cx="310896" cy="310896"/>
           </a:xfrm>
           <a:prstGeom prst="ellipse">
             <a:avLst/>
@@ -5802,14 +4610,14 @@
       </p:sp>
       <p:sp>
         <p:nvSpPr>
-          <p:cNvPr id="16" name="Text 14"/>
-          <p:cNvSpPr/>
-          <p:nvPr/>
-        </p:nvSpPr>
-        <p:spPr>
-          <a:xfrm>
-            <a:off x="4783226" y="2011680"/>
-            <a:ext cx="365760" cy="365760"/>
+          <p:cNvPr id="17" name="Text 15"/>
+          <p:cNvSpPr/>
+          <p:nvPr/>
+        </p:nvSpPr>
+        <p:spPr>
+          <a:xfrm>
+            <a:off x="640080" y="2761488"/>
+            <a:ext cx="310896" cy="310896"/>
           </a:xfrm>
           <a:prstGeom prst="rect">
             <a:avLst/>
@@ -5825,7 +4633,7 @@
               <a:buNone/>
             </a:pPr>
             <a:r>
-              <a:rPr lang="en-US" sz="1150" b="1" dirty="0">
+              <a:rPr lang="en-US" sz="1000" b="1" dirty="0">
                 <a:solidFill>
                   <a:srgbClr val="111111"/>
                 </a:solidFill>
@@ -5833,41 +4641,38 @@
                 <a:ea typeface="Pretendard" pitchFamily="34" charset="-122"/>
                 <a:cs typeface="Pretendard" pitchFamily="34" charset="-120"/>
               </a:rPr>
-              <a:t>02</a:t>
-            </a:r>
-            <a:endParaRPr lang="en-US" sz="1150" dirty="0"/>
-          </a:p>
-        </p:txBody>
-      </p:sp>
-      <p:sp>
-        <p:nvSpPr>
-          <p:cNvPr id="17" name="Text 15"/>
-          <p:cNvSpPr/>
-          <p:nvPr/>
-        </p:nvSpPr>
-        <p:spPr>
-          <a:xfrm>
-            <a:off x="4783226" y="2505456"/>
-            <a:ext cx="2625242" cy="457200"/>
-          </a:xfrm>
-          <a:prstGeom prst="rect">
-            <a:avLst/>
-          </a:prstGeom>
-          <a:noFill/>
-          <a:ln/>
-        </p:spPr>
-        <p:txBody>
-          <a:bodyPr wrap="square" lIns="0" tIns="0" rIns="0" bIns="0" rtlCol="0" anchor="t"/>
+              <a:t>2</a:t>
+            </a:r>
+            <a:endParaRPr lang="en-US" sz="1000" dirty="0"/>
+          </a:p>
+        </p:txBody>
+      </p:sp>
+      <p:sp>
+        <p:nvSpPr>
+          <p:cNvPr id="18" name="Text 16"/>
+          <p:cNvSpPr/>
+          <p:nvPr/>
+        </p:nvSpPr>
+        <p:spPr>
+          <a:xfrm>
+            <a:off x="1188720" y="2670048"/>
+            <a:ext cx="7498080" cy="310896"/>
+          </a:xfrm>
+          <a:prstGeom prst="rect">
+            <a:avLst/>
+          </a:prstGeom>
+          <a:noFill/>
+          <a:ln/>
+        </p:spPr>
+        <p:txBody>
+          <a:bodyPr wrap="square" lIns="0" tIns="0" rIns="0" bIns="0" rtlCol="0" anchor="ctr"/>
           <a:lstStyle/>
           <a:p>
             <a:pPr indent="0" marL="0">
-              <a:lnSpc>
-                <a:spcPct val="114000"/>
-              </a:lnSpc>
-              <a:buNone/>
-            </a:pPr>
-            <a:r>
-              <a:rPr lang="en-US" sz="1700" dirty="0">
+              <a:buNone/>
+            </a:pPr>
+            <a:r>
+              <a:rPr lang="en-US" sz="1450" dirty="0">
                 <a:solidFill>
                   <a:srgbClr val="111111"/>
                 </a:solidFill>
@@ -5875,41 +4680,38 @@
                 <a:ea typeface="Pretendard SemiBold" pitchFamily="34" charset="-122"/>
                 <a:cs typeface="Pretendard SemiBold" pitchFamily="34" charset="-120"/>
               </a:rPr>
-              <a:t>글자색</a:t>
-            </a:r>
-            <a:endParaRPr lang="en-US" sz="1700" dirty="0"/>
-          </a:p>
-        </p:txBody>
-      </p:sp>
-      <p:sp>
-        <p:nvSpPr>
-          <p:cNvPr id="18" name="Text 16"/>
-          <p:cNvSpPr/>
-          <p:nvPr/>
-        </p:nvSpPr>
-        <p:spPr>
-          <a:xfrm>
-            <a:off x="4783226" y="2999232"/>
-            <a:ext cx="2625242" cy="1645920"/>
-          </a:xfrm>
-          <a:prstGeom prst="rect">
-            <a:avLst/>
-          </a:prstGeom>
-          <a:noFill/>
-          <a:ln/>
-        </p:spPr>
-        <p:txBody>
-          <a:bodyPr wrap="square" lIns="0" tIns="0" rIns="0" bIns="0" rtlCol="0" anchor="t"/>
+              <a:t>본문</a:t>
+            </a:r>
+            <a:endParaRPr lang="en-US" sz="1450" dirty="0"/>
+          </a:p>
+        </p:txBody>
+      </p:sp>
+      <p:sp>
+        <p:nvSpPr>
+          <p:cNvPr id="19" name="Text 17"/>
+          <p:cNvSpPr/>
+          <p:nvPr/>
+        </p:nvSpPr>
+        <p:spPr>
+          <a:xfrm>
+            <a:off x="1188720" y="2980944"/>
+            <a:ext cx="7498080" cy="292608"/>
+          </a:xfrm>
+          <a:prstGeom prst="rect">
+            <a:avLst/>
+          </a:prstGeom>
+          <a:noFill/>
+          <a:ln/>
+        </p:spPr>
+        <p:txBody>
+          <a:bodyPr wrap="square" lIns="0" tIns="0" rIns="0" bIns="0" rtlCol="0" anchor="ctr"/>
           <a:lstStyle/>
           <a:p>
             <a:pPr indent="0" marL="0">
-              <a:lnSpc>
-                <a:spcPct val="130000"/>
-              </a:lnSpc>
-              <a:buNone/>
-            </a:pPr>
-            <a:r>
-              <a:rPr lang="en-US" sz="1150" dirty="0">
+              <a:buNone/>
+            </a:pPr>
+            <a:r>
+              <a:rPr lang="en-US" sz="1100" dirty="0">
                 <a:solidFill>
                   <a:srgbClr val="6E6E6E"/>
                 </a:solidFill>
@@ -5917,22 +4719,434 @@
                 <a:ea typeface="Pretendard" pitchFamily="34" charset="-122"/>
                 <a:cs typeface="Pretendard" pitchFamily="34" charset="-120"/>
               </a:rPr>
-              <a:t>완전한 검정보다 살짝 낮춘 진회색이 읽기 편합니다. 본문과 캡션에 명도 차를 둡니다.</a:t>
-            </a:r>
-            <a:endParaRPr lang="en-US" sz="1150" dirty="0"/>
-          </a:p>
-        </p:txBody>
-      </p:sp>
-      <p:sp>
-        <p:nvSpPr>
-          <p:cNvPr id="19" name="Shape 17"/>
-          <p:cNvSpPr/>
-          <p:nvPr/>
-        </p:nvSpPr>
-        <p:spPr>
-          <a:xfrm>
-            <a:off x="8158277" y="1737360"/>
-            <a:ext cx="3393338" cy="3035808"/>
+              <a:t>설명 글. 읽기 편한 크기와 줄간격이 우선입니다</a:t>
+            </a:r>
+            <a:endParaRPr lang="en-US" sz="1100" dirty="0"/>
+          </a:p>
+        </p:txBody>
+      </p:sp>
+      <p:sp>
+        <p:nvSpPr>
+          <p:cNvPr id="20" name="Text 18"/>
+          <p:cNvSpPr/>
+          <p:nvPr/>
+        </p:nvSpPr>
+        <p:spPr>
+          <a:xfrm>
+            <a:off x="9357055" y="2761488"/>
+            <a:ext cx="2194560" cy="310896"/>
+          </a:xfrm>
+          <a:prstGeom prst="rect">
+            <a:avLst/>
+          </a:prstGeom>
+          <a:noFill/>
+          <a:ln/>
+        </p:spPr>
+        <p:txBody>
+          <a:bodyPr wrap="square" lIns="0" tIns="0" rIns="0" bIns="0" rtlCol="0" anchor="ctr"/>
+          <a:lstStyle/>
+          <a:p>
+            <a:pPr algn="r" indent="0" marL="0">
+              <a:buNone/>
+            </a:pPr>
+            <a:r>
+              <a:rPr lang="en-US" sz="1050" b="1" spc="120" kern="0" dirty="0">
+                <a:solidFill>
+                  <a:srgbClr val="111111"/>
+                </a:solidFill>
+                <a:latin typeface="Pretendard" pitchFamily="34" charset="0"/>
+                <a:ea typeface="Pretendard" pitchFamily="34" charset="-122"/>
+                <a:cs typeface="Pretendard" pitchFamily="34" charset="-120"/>
+              </a:rPr>
+              <a:t>2단계</a:t>
+            </a:r>
+            <a:endParaRPr lang="en-US" sz="1050" dirty="0"/>
+          </a:p>
+        </p:txBody>
+      </p:sp>
+      <p:sp>
+        <p:nvSpPr>
+          <p:cNvPr id="21" name="Shape 19"/>
+          <p:cNvSpPr/>
+          <p:nvPr/>
+        </p:nvSpPr>
+        <p:spPr>
+          <a:xfrm>
+            <a:off x="640080" y="3547872"/>
+            <a:ext cx="10911535" cy="7315"/>
+          </a:xfrm>
+          <a:prstGeom prst="rect">
+            <a:avLst/>
+          </a:prstGeom>
+          <a:solidFill>
+            <a:srgbClr val="DCDCDC"/>
+          </a:solidFill>
+          <a:ln w="12700">
+            <a:solidFill>
+              <a:srgbClr val="DCDCDC"/>
+            </a:solidFill>
+            <a:prstDash val="solid"/>
+          </a:ln>
+        </p:spPr>
+      </p:sp>
+      <p:sp>
+        <p:nvSpPr>
+          <p:cNvPr id="22" name="Shape 20"/>
+          <p:cNvSpPr/>
+          <p:nvPr/>
+        </p:nvSpPr>
+        <p:spPr>
+          <a:xfrm>
+            <a:off x="640080" y="3712464"/>
+            <a:ext cx="310896" cy="310896"/>
+          </a:xfrm>
+          <a:prstGeom prst="ellipse">
+            <a:avLst/>
+          </a:prstGeom>
+          <a:solidFill>
+            <a:srgbClr val="FFFFFF"/>
+          </a:solidFill>
+          <a:ln w="12700">
+            <a:solidFill>
+              <a:srgbClr val="111111"/>
+            </a:solidFill>
+            <a:prstDash val="solid"/>
+          </a:ln>
+        </p:spPr>
+      </p:sp>
+      <p:sp>
+        <p:nvSpPr>
+          <p:cNvPr id="23" name="Text 21"/>
+          <p:cNvSpPr/>
+          <p:nvPr/>
+        </p:nvSpPr>
+        <p:spPr>
+          <a:xfrm>
+            <a:off x="640080" y="3712464"/>
+            <a:ext cx="310896" cy="310896"/>
+          </a:xfrm>
+          <a:prstGeom prst="rect">
+            <a:avLst/>
+          </a:prstGeom>
+          <a:noFill/>
+          <a:ln/>
+        </p:spPr>
+        <p:txBody>
+          <a:bodyPr wrap="square" lIns="0" tIns="0" rIns="0" bIns="0" rtlCol="0" anchor="ctr"/>
+          <a:lstStyle/>
+          <a:p>
+            <a:pPr algn="ctr" indent="0" marL="0">
+              <a:buNone/>
+            </a:pPr>
+            <a:r>
+              <a:rPr lang="en-US" sz="1000" b="1" dirty="0">
+                <a:solidFill>
+                  <a:srgbClr val="111111"/>
+                </a:solidFill>
+                <a:latin typeface="Pretendard" pitchFamily="34" charset="0"/>
+                <a:ea typeface="Pretendard" pitchFamily="34" charset="-122"/>
+                <a:cs typeface="Pretendard" pitchFamily="34" charset="-120"/>
+              </a:rPr>
+              <a:t>3</a:t>
+            </a:r>
+            <a:endParaRPr lang="en-US" sz="1000" dirty="0"/>
+          </a:p>
+        </p:txBody>
+      </p:sp>
+      <p:sp>
+        <p:nvSpPr>
+          <p:cNvPr id="24" name="Text 22"/>
+          <p:cNvSpPr/>
+          <p:nvPr/>
+        </p:nvSpPr>
+        <p:spPr>
+          <a:xfrm>
+            <a:off x="1188720" y="3621024"/>
+            <a:ext cx="7498080" cy="310896"/>
+          </a:xfrm>
+          <a:prstGeom prst="rect">
+            <a:avLst/>
+          </a:prstGeom>
+          <a:noFill/>
+          <a:ln/>
+        </p:spPr>
+        <p:txBody>
+          <a:bodyPr wrap="square" lIns="0" tIns="0" rIns="0" bIns="0" rtlCol="0" anchor="ctr"/>
+          <a:lstStyle/>
+          <a:p>
+            <a:pPr indent="0" marL="0">
+              <a:buNone/>
+            </a:pPr>
+            <a:r>
+              <a:rPr lang="en-US" sz="1450" dirty="0">
+                <a:solidFill>
+                  <a:srgbClr val="111111"/>
+                </a:solidFill>
+                <a:latin typeface="Pretendard SemiBold" pitchFamily="34" charset="0"/>
+                <a:ea typeface="Pretendard SemiBold" pitchFamily="34" charset="-122"/>
+                <a:cs typeface="Pretendard SemiBold" pitchFamily="34" charset="-120"/>
+              </a:rPr>
+              <a:t>캡션</a:t>
+            </a:r>
+            <a:endParaRPr lang="en-US" sz="1450" dirty="0"/>
+          </a:p>
+        </p:txBody>
+      </p:sp>
+      <p:sp>
+        <p:nvSpPr>
+          <p:cNvPr id="25" name="Text 23"/>
+          <p:cNvSpPr/>
+          <p:nvPr/>
+        </p:nvSpPr>
+        <p:spPr>
+          <a:xfrm>
+            <a:off x="1188720" y="3931920"/>
+            <a:ext cx="7498080" cy="292608"/>
+          </a:xfrm>
+          <a:prstGeom prst="rect">
+            <a:avLst/>
+          </a:prstGeom>
+          <a:noFill/>
+          <a:ln/>
+        </p:spPr>
+        <p:txBody>
+          <a:bodyPr wrap="square" lIns="0" tIns="0" rIns="0" bIns="0" rtlCol="0" anchor="ctr"/>
+          <a:lstStyle/>
+          <a:p>
+            <a:pPr indent="0" marL="0">
+              <a:buNone/>
+            </a:pPr>
+            <a:r>
+              <a:rPr lang="en-US" sz="1100" dirty="0">
+                <a:solidFill>
+                  <a:srgbClr val="6E6E6E"/>
+                </a:solidFill>
+                <a:latin typeface="Pretendard" pitchFamily="34" charset="0"/>
+                <a:ea typeface="Pretendard" pitchFamily="34" charset="-122"/>
+                <a:cs typeface="Pretendard" pitchFamily="34" charset="-120"/>
+              </a:rPr>
+              <a:t>이미지 설명 · 연도 · 역할 표기. 작고 옅게</a:t>
+            </a:r>
+            <a:endParaRPr lang="en-US" sz="1100" dirty="0"/>
+          </a:p>
+        </p:txBody>
+      </p:sp>
+      <p:sp>
+        <p:nvSpPr>
+          <p:cNvPr id="26" name="Text 24"/>
+          <p:cNvSpPr/>
+          <p:nvPr/>
+        </p:nvSpPr>
+        <p:spPr>
+          <a:xfrm>
+            <a:off x="9357055" y="3712464"/>
+            <a:ext cx="2194560" cy="310896"/>
+          </a:xfrm>
+          <a:prstGeom prst="rect">
+            <a:avLst/>
+          </a:prstGeom>
+          <a:noFill/>
+          <a:ln/>
+        </p:spPr>
+        <p:txBody>
+          <a:bodyPr wrap="square" lIns="0" tIns="0" rIns="0" bIns="0" rtlCol="0" anchor="ctr"/>
+          <a:lstStyle/>
+          <a:p>
+            <a:pPr algn="r" indent="0" marL="0">
+              <a:buNone/>
+            </a:pPr>
+            <a:r>
+              <a:rPr lang="en-US" sz="1050" b="1" spc="120" kern="0" dirty="0">
+                <a:solidFill>
+                  <a:srgbClr val="111111"/>
+                </a:solidFill>
+                <a:latin typeface="Pretendard" pitchFamily="34" charset="0"/>
+                <a:ea typeface="Pretendard" pitchFamily="34" charset="-122"/>
+                <a:cs typeface="Pretendard" pitchFamily="34" charset="-120"/>
+              </a:rPr>
+              <a:t>3단계</a:t>
+            </a:r>
+            <a:endParaRPr lang="en-US" sz="1050" dirty="0"/>
+          </a:p>
+        </p:txBody>
+      </p:sp>
+      <p:sp>
+        <p:nvSpPr>
+          <p:cNvPr id="27" name="Shape 25"/>
+          <p:cNvSpPr/>
+          <p:nvPr/>
+        </p:nvSpPr>
+        <p:spPr>
+          <a:xfrm>
+            <a:off x="640080" y="4498848"/>
+            <a:ext cx="10911535" cy="7315"/>
+          </a:xfrm>
+          <a:prstGeom prst="rect">
+            <a:avLst/>
+          </a:prstGeom>
+          <a:solidFill>
+            <a:srgbClr val="DCDCDC"/>
+          </a:solidFill>
+          <a:ln w="12700">
+            <a:solidFill>
+              <a:srgbClr val="DCDCDC"/>
+            </a:solidFill>
+            <a:prstDash val="solid"/>
+          </a:ln>
+        </p:spPr>
+      </p:sp>
+      <p:sp>
+        <p:nvSpPr>
+          <p:cNvPr id="28" name="Shape 26"/>
+          <p:cNvSpPr/>
+          <p:nvPr/>
+        </p:nvSpPr>
+        <p:spPr>
+          <a:xfrm>
+            <a:off x="640080" y="4663440"/>
+            <a:ext cx="310896" cy="310896"/>
+          </a:xfrm>
+          <a:prstGeom prst="ellipse">
+            <a:avLst/>
+          </a:prstGeom>
+          <a:solidFill>
+            <a:srgbClr val="FFFFFF"/>
+          </a:solidFill>
+          <a:ln w="12700">
+            <a:solidFill>
+              <a:srgbClr val="111111"/>
+            </a:solidFill>
+            <a:prstDash val="solid"/>
+          </a:ln>
+        </p:spPr>
+      </p:sp>
+      <p:sp>
+        <p:nvSpPr>
+          <p:cNvPr id="29" name="Text 27"/>
+          <p:cNvSpPr/>
+          <p:nvPr/>
+        </p:nvSpPr>
+        <p:spPr>
+          <a:xfrm>
+            <a:off x="640080" y="4663440"/>
+            <a:ext cx="310896" cy="310896"/>
+          </a:xfrm>
+          <a:prstGeom prst="rect">
+            <a:avLst/>
+          </a:prstGeom>
+          <a:noFill/>
+          <a:ln/>
+        </p:spPr>
+        <p:txBody>
+          <a:bodyPr wrap="square" lIns="0" tIns="0" rIns="0" bIns="0" rtlCol="0" anchor="ctr"/>
+          <a:lstStyle/>
+          <a:p>
+            <a:pPr algn="ctr" indent="0" marL="0">
+              <a:buNone/>
+            </a:pPr>
+            <a:r>
+              <a:rPr lang="en-US" sz="1000" b="1" dirty="0">
+                <a:solidFill>
+                  <a:srgbClr val="111111"/>
+                </a:solidFill>
+                <a:latin typeface="Pretendard" pitchFamily="34" charset="0"/>
+                <a:ea typeface="Pretendard" pitchFamily="34" charset="-122"/>
+                <a:cs typeface="Pretendard" pitchFamily="34" charset="-120"/>
+              </a:rPr>
+              <a:t>4</a:t>
+            </a:r>
+            <a:endParaRPr lang="en-US" sz="1000" dirty="0"/>
+          </a:p>
+        </p:txBody>
+      </p:sp>
+      <p:sp>
+        <p:nvSpPr>
+          <p:cNvPr id="30" name="Text 28"/>
+          <p:cNvSpPr/>
+          <p:nvPr/>
+        </p:nvSpPr>
+        <p:spPr>
+          <a:xfrm>
+            <a:off x="1188720" y="4572000"/>
+            <a:ext cx="9875520" cy="310896"/>
+          </a:xfrm>
+          <a:prstGeom prst="rect">
+            <a:avLst/>
+          </a:prstGeom>
+          <a:noFill/>
+          <a:ln/>
+        </p:spPr>
+        <p:txBody>
+          <a:bodyPr wrap="square" lIns="0" tIns="0" rIns="0" bIns="0" rtlCol="0" anchor="ctr"/>
+          <a:lstStyle/>
+          <a:p>
+            <a:pPr indent="0" marL="0">
+              <a:buNone/>
+            </a:pPr>
+            <a:r>
+              <a:rPr lang="en-US" sz="1450" dirty="0">
+                <a:solidFill>
+                  <a:srgbClr val="111111"/>
+                </a:solidFill>
+                <a:latin typeface="Pretendard SemiBold" pitchFamily="34" charset="0"/>
+                <a:ea typeface="Pretendard SemiBold" pitchFamily="34" charset="-122"/>
+                <a:cs typeface="Pretendard SemiBold" pitchFamily="34" charset="-120"/>
+              </a:rPr>
+              <a:t>서체는 한 벌, 많아야 두 벌</a:t>
+            </a:r>
+            <a:endParaRPr lang="en-US" sz="1450" dirty="0"/>
+          </a:p>
+        </p:txBody>
+      </p:sp>
+      <p:sp>
+        <p:nvSpPr>
+          <p:cNvPr id="31" name="Text 29"/>
+          <p:cNvSpPr/>
+          <p:nvPr/>
+        </p:nvSpPr>
+        <p:spPr>
+          <a:xfrm>
+            <a:off x="1188720" y="4882896"/>
+            <a:ext cx="9875520" cy="292608"/>
+          </a:xfrm>
+          <a:prstGeom prst="rect">
+            <a:avLst/>
+          </a:prstGeom>
+          <a:noFill/>
+          <a:ln/>
+        </p:spPr>
+        <p:txBody>
+          <a:bodyPr wrap="square" lIns="0" tIns="0" rIns="0" bIns="0" rtlCol="0" anchor="ctr"/>
+          <a:lstStyle/>
+          <a:p>
+            <a:pPr indent="0" marL="0">
+              <a:buNone/>
+            </a:pPr>
+            <a:r>
+              <a:rPr lang="en-US" sz="1100" dirty="0">
+                <a:solidFill>
+                  <a:srgbClr val="6E6E6E"/>
+                </a:solidFill>
+                <a:latin typeface="Pretendard" pitchFamily="34" charset="0"/>
+                <a:ea typeface="Pretendard" pitchFamily="34" charset="-122"/>
+                <a:cs typeface="Pretendard" pitchFamily="34" charset="-120"/>
+              </a:rPr>
+              <a:t>한글 서체 하나로 굵기 차이만 써도 충분합니다. 두 벌을 쓴다면 제목용과 본문용으로 역할을 나눕니다</a:t>
+            </a:r>
+            <a:endParaRPr lang="en-US" sz="1100" dirty="0"/>
+          </a:p>
+        </p:txBody>
+      </p:sp>
+      <p:sp>
+        <p:nvSpPr>
+          <p:cNvPr id="32" name="Shape 30"/>
+          <p:cNvSpPr/>
+          <p:nvPr/>
+        </p:nvSpPr>
+        <p:spPr>
+          <a:xfrm>
+            <a:off x="640080" y="5522976"/>
+            <a:ext cx="10911535" cy="7315"/>
           </a:xfrm>
           <a:prstGeom prst="rect">
             <a:avLst/>
@@ -5950,187 +5164,14 @@
       </p:sp>
       <p:sp>
         <p:nvSpPr>
-          <p:cNvPr id="20" name="Shape 18"/>
-          <p:cNvSpPr/>
-          <p:nvPr/>
-        </p:nvSpPr>
-        <p:spPr>
-          <a:xfrm>
-            <a:off x="8542325" y="2011680"/>
-            <a:ext cx="365760" cy="365760"/>
-          </a:xfrm>
-          <a:prstGeom prst="ellipse">
-            <a:avLst/>
-          </a:prstGeom>
-          <a:solidFill>
-            <a:srgbClr val="111111"/>
-          </a:solidFill>
-          <a:ln w="12700">
-            <a:solidFill>
-              <a:srgbClr val="FFFFFF"/>
-            </a:solidFill>
-            <a:prstDash val="solid"/>
-          </a:ln>
-        </p:spPr>
-      </p:sp>
-      <p:sp>
-        <p:nvSpPr>
-          <p:cNvPr id="21" name="Text 19"/>
-          <p:cNvSpPr/>
-          <p:nvPr/>
-        </p:nvSpPr>
-        <p:spPr>
-          <a:xfrm>
-            <a:off x="8542325" y="2011680"/>
-            <a:ext cx="365760" cy="365760"/>
-          </a:xfrm>
-          <a:prstGeom prst="rect">
-            <a:avLst/>
-          </a:prstGeom>
-          <a:noFill/>
-          <a:ln/>
-        </p:spPr>
-        <p:txBody>
-          <a:bodyPr wrap="square" lIns="0" tIns="0" rIns="0" bIns="0" rtlCol="0" anchor="ctr"/>
-          <a:lstStyle/>
-          <a:p>
-            <a:pPr algn="ctr" indent="0" marL="0">
-              <a:buNone/>
-            </a:pPr>
-            <a:r>
-              <a:rPr lang="en-US" sz="1150" b="1" dirty="0">
-                <a:solidFill>
-                  <a:srgbClr val="FFFFFF"/>
-                </a:solidFill>
-                <a:latin typeface="Pretendard" pitchFamily="34" charset="0"/>
-                <a:ea typeface="Pretendard" pitchFamily="34" charset="-122"/>
-                <a:cs typeface="Pretendard" pitchFamily="34" charset="-120"/>
-              </a:rPr>
-              <a:t>03</a:t>
-            </a:r>
-            <a:endParaRPr lang="en-US" sz="1150" dirty="0"/>
-          </a:p>
-        </p:txBody>
-      </p:sp>
-      <p:sp>
-        <p:nvSpPr>
-          <p:cNvPr id="22" name="Text 20"/>
-          <p:cNvSpPr/>
-          <p:nvPr/>
-        </p:nvSpPr>
-        <p:spPr>
-          <a:xfrm>
-            <a:off x="8542325" y="2505456"/>
-            <a:ext cx="2625242" cy="457200"/>
-          </a:xfrm>
-          <a:prstGeom prst="rect">
-            <a:avLst/>
-          </a:prstGeom>
-          <a:noFill/>
-          <a:ln/>
-        </p:spPr>
-        <p:txBody>
-          <a:bodyPr wrap="square" lIns="0" tIns="0" rIns="0" bIns="0" rtlCol="0" anchor="t"/>
-          <a:lstStyle/>
-          <a:p>
-            <a:pPr indent="0" marL="0">
-              <a:lnSpc>
-                <a:spcPct val="114000"/>
-              </a:lnSpc>
-              <a:buNone/>
-            </a:pPr>
-            <a:r>
-              <a:rPr lang="en-US" sz="1700" dirty="0">
-                <a:solidFill>
-                  <a:srgbClr val="FFFFFF"/>
-                </a:solidFill>
-                <a:latin typeface="Pretendard SemiBold" pitchFamily="34" charset="0"/>
-                <a:ea typeface="Pretendard SemiBold" pitchFamily="34" charset="-122"/>
-                <a:cs typeface="Pretendard SemiBold" pitchFamily="34" charset="-120"/>
-              </a:rPr>
-              <a:t>강조색</a:t>
-            </a:r>
-            <a:endParaRPr lang="en-US" sz="1700" dirty="0"/>
-          </a:p>
-        </p:txBody>
-      </p:sp>
-      <p:sp>
-        <p:nvSpPr>
-          <p:cNvPr id="23" name="Text 21"/>
-          <p:cNvSpPr/>
-          <p:nvPr/>
-        </p:nvSpPr>
-        <p:spPr>
-          <a:xfrm>
-            <a:off x="8542325" y="2999232"/>
-            <a:ext cx="2625242" cy="1645920"/>
-          </a:xfrm>
-          <a:prstGeom prst="rect">
-            <a:avLst/>
-          </a:prstGeom>
-          <a:noFill/>
-          <a:ln/>
-        </p:spPr>
-        <p:txBody>
-          <a:bodyPr wrap="square" lIns="0" tIns="0" rIns="0" bIns="0" rtlCol="0" anchor="t"/>
-          <a:lstStyle/>
-          <a:p>
-            <a:pPr indent="0" marL="0">
-              <a:lnSpc>
-                <a:spcPct val="130000"/>
-              </a:lnSpc>
-              <a:buNone/>
-            </a:pPr>
-            <a:r>
-              <a:rPr lang="en-US" sz="1150" dirty="0">
-                <a:solidFill>
-                  <a:srgbClr val="B8B8B8"/>
-                </a:solidFill>
-                <a:latin typeface="Pretendard" pitchFamily="34" charset="0"/>
-                <a:ea typeface="Pretendard" pitchFamily="34" charset="-122"/>
-                <a:cs typeface="Pretendard" pitchFamily="34" charset="-120"/>
-              </a:rPr>
-              <a:t>딱 하나. 제목 · 태그 · 구분 요소에만 씁니다. 두 개가 되는 순간 강조가 아니게 됩니다.</a:t>
-            </a:r>
-            <a:endParaRPr lang="en-US" sz="1150" dirty="0"/>
-          </a:p>
-        </p:txBody>
-      </p:sp>
-      <p:sp>
-        <p:nvSpPr>
-          <p:cNvPr id="24" name="Shape 22"/>
-          <p:cNvSpPr/>
-          <p:nvPr/>
-        </p:nvSpPr>
-        <p:spPr>
-          <a:xfrm>
-            <a:off x="640080" y="5084064"/>
-            <a:ext cx="10911535" cy="7315"/>
-          </a:xfrm>
-          <a:prstGeom prst="rect">
-            <a:avLst/>
-          </a:prstGeom>
-          <a:solidFill>
-            <a:srgbClr val="111111"/>
-          </a:solidFill>
-          <a:ln w="12700">
-            <a:solidFill>
-              <a:srgbClr val="111111"/>
-            </a:solidFill>
-            <a:prstDash val="solid"/>
-          </a:ln>
-        </p:spPr>
-      </p:sp>
-      <p:sp>
-        <p:nvSpPr>
-          <p:cNvPr id="25" name="Text 23"/>
-          <p:cNvSpPr/>
-          <p:nvPr/>
-        </p:nvSpPr>
-        <p:spPr>
-          <a:xfrm>
-            <a:off x="640080" y="5193792"/>
-            <a:ext cx="10911535" cy="438912"/>
+          <p:cNvPr id="33" name="Text 31"/>
+          <p:cNvSpPr/>
+          <p:nvPr/>
+        </p:nvSpPr>
+        <p:spPr>
+          <a:xfrm>
+            <a:off x="640080" y="5632704"/>
+            <a:ext cx="10911535" cy="402336"/>
           </a:xfrm>
           <a:prstGeom prst="rect">
             <a:avLst/>
@@ -6149,7 +5190,7 @@
               <a:buNone/>
             </a:pPr>
             <a:r>
-              <a:rPr lang="en-US" sz="1300" b="1" dirty="0">
+              <a:rPr lang="en-US" sz="1250" b="1" dirty="0">
                 <a:solidFill>
                   <a:srgbClr val="111111"/>
                 </a:solidFill>
@@ -6157,15 +5198,15 @@
                 <a:ea typeface="Pretendard" pitchFamily="34" charset="-122"/>
                 <a:cs typeface="Pretendard" pitchFamily="34" charset="-120"/>
               </a:rPr>
-              <a:t>프로젝트 결과 이미지의 색이 이미 다양합니다. 지면 색까지 많으면 정리가 안 됩니다.</a:t>
-            </a:r>
-            <a:endParaRPr lang="en-US" sz="1300" dirty="0"/>
-          </a:p>
-        </p:txBody>
-      </p:sp>
-      <p:sp>
-        <p:nvSpPr>
-          <p:cNvPr id="26" name="Shape 24"/>
+              <a:t>세 단계의 크기 차이는 확실하게 두세요. 애매하면 위계가 없는 것과 같습니다.</a:t>
+            </a:r>
+            <a:endParaRPr lang="en-US" sz="1250" dirty="0"/>
+          </a:p>
+        </p:txBody>
+      </p:sp>
+      <p:sp>
+        <p:nvSpPr>
+          <p:cNvPr id="34" name="Shape 32"/>
           <p:cNvSpPr/>
           <p:nvPr/>
         </p:nvSpPr>
@@ -6190,7 +5231,7 @@
       </p:sp>
       <p:sp>
         <p:nvSpPr>
-          <p:cNvPr id="27" name="Text 25"/>
+          <p:cNvPr id="35" name="Text 33"/>
           <p:cNvSpPr/>
           <p:nvPr/>
         </p:nvSpPr>
@@ -6229,7 +5270,7 @@
       </p:sp>
       <p:sp>
         <p:nvSpPr>
-          <p:cNvPr id="28" name="Text 26"/>
+          <p:cNvPr id="36" name="Text 34"/>
           <p:cNvSpPr/>
           <p:nvPr/>
         </p:nvSpPr>
@@ -6277,6 +5318,472 @@
 <file path=ppt/slides/slide6.xml><?xml version="1.0" encoding="utf-8"?>
 <p:sld xmlns:a="http://schemas.openxmlformats.org/drawingml/2006/main" xmlns:r="http://schemas.openxmlformats.org/officeDocument/2006/relationships" xmlns:p="http://schemas.openxmlformats.org/presentationml/2006/main">
   <p:cSld name="Slide 6">
+    <p:bg>
+      <p:bgPr>
+        <a:solidFill>
+          <a:srgbClr val="111111"/>
+        </a:solidFill>
+      </p:bgPr>
+    </p:bg>
+    <p:spTree>
+      <p:nvGrpSpPr>
+        <p:cNvPr id="1" name=""/>
+        <p:cNvGrpSpPr/>
+        <p:nvPr/>
+      </p:nvGrpSpPr>
+      <p:grpSpPr>
+        <a:xfrm>
+          <a:off x="0" y="0"/>
+          <a:ext cx="0" cy="0"/>
+          <a:chOff x="0" y="0"/>
+          <a:chExt cx="0" cy="0"/>
+        </a:xfrm>
+      </p:grpSpPr>
+      <p:sp>
+        <p:nvSpPr>
+          <p:cNvPr id="2" name="Text 0"/>
+          <p:cNvSpPr/>
+          <p:nvPr/>
+        </p:nvSpPr>
+        <p:spPr>
+          <a:xfrm>
+            <a:off x="640080" y="274320"/>
+            <a:ext cx="3657600" cy="219456"/>
+          </a:xfrm>
+          <a:prstGeom prst="rect">
+            <a:avLst/>
+          </a:prstGeom>
+          <a:noFill/>
+          <a:ln/>
+        </p:spPr>
+        <p:txBody>
+          <a:bodyPr wrap="square" lIns="0" tIns="0" rIns="0" bIns="0" rtlCol="0" anchor="ctr"/>
+          <a:lstStyle/>
+          <a:p>
+            <a:pPr indent="0" marL="0">
+              <a:buNone/>
+            </a:pPr>
+            <a:r>
+              <a:rPr lang="en-US" sz="900" spc="120" kern="0" dirty="0">
+                <a:solidFill>
+                  <a:srgbClr val="9A9A9A"/>
+                </a:solidFill>
+                <a:latin typeface="Pretendard" pitchFamily="34" charset="0"/>
+                <a:ea typeface="Pretendard" pitchFamily="34" charset="-122"/>
+                <a:cs typeface="Pretendard" pitchFamily="34" charset="-120"/>
+              </a:rPr>
+              <a:t>포트폴리오제작</a:t>
+            </a:r>
+            <a:endParaRPr lang="en-US" sz="900" dirty="0"/>
+          </a:p>
+        </p:txBody>
+      </p:sp>
+      <p:sp>
+        <p:nvSpPr>
+          <p:cNvPr id="3" name="Text 1"/>
+          <p:cNvSpPr/>
+          <p:nvPr/>
+        </p:nvSpPr>
+        <p:spPr>
+          <a:xfrm>
+            <a:off x="4480560" y="274320"/>
+            <a:ext cx="4572000" cy="219456"/>
+          </a:xfrm>
+          <a:prstGeom prst="rect">
+            <a:avLst/>
+          </a:prstGeom>
+          <a:noFill/>
+          <a:ln/>
+        </p:spPr>
+        <p:txBody>
+          <a:bodyPr wrap="square" lIns="0" tIns="0" rIns="0" bIns="0" rtlCol="0" anchor="ctr"/>
+          <a:lstStyle/>
+          <a:p>
+            <a:pPr algn="ctr" indent="0" marL="0">
+              <a:buNone/>
+            </a:pPr>
+            <a:r>
+              <a:rPr lang="en-US" sz="900" spc="120" kern="0" dirty="0">
+                <a:solidFill>
+                  <a:srgbClr val="9A9A9A"/>
+                </a:solidFill>
+                <a:latin typeface="Pretendard" pitchFamily="34" charset="0"/>
+                <a:ea typeface="Pretendard" pitchFamily="34" charset="-122"/>
+                <a:cs typeface="Pretendard" pitchFamily="34" charset="-120"/>
+              </a:rPr>
+              <a:t>PHASE 2 콘텐츠 구조화와 비주얼 시스템</a:t>
+            </a:r>
+            <a:endParaRPr lang="en-US" sz="900" dirty="0"/>
+          </a:p>
+        </p:txBody>
+      </p:sp>
+      <p:sp>
+        <p:nvSpPr>
+          <p:cNvPr id="4" name="Text 2"/>
+          <p:cNvSpPr/>
+          <p:nvPr/>
+        </p:nvSpPr>
+        <p:spPr>
+          <a:xfrm>
+            <a:off x="8808415" y="274320"/>
+            <a:ext cx="2743200" cy="219456"/>
+          </a:xfrm>
+          <a:prstGeom prst="rect">
+            <a:avLst/>
+          </a:prstGeom>
+          <a:noFill/>
+          <a:ln/>
+        </p:spPr>
+        <p:txBody>
+          <a:bodyPr wrap="square" lIns="0" tIns="0" rIns="0" bIns="0" rtlCol="0" anchor="ctr"/>
+          <a:lstStyle/>
+          <a:p>
+            <a:pPr algn="r" indent="0" marL="0">
+              <a:buNone/>
+            </a:pPr>
+            <a:r>
+              <a:rPr lang="en-US" sz="900" spc="200" kern="0" dirty="0">
+                <a:solidFill>
+                  <a:srgbClr val="9A9A9A"/>
+                </a:solidFill>
+                <a:latin typeface="Pretendard" pitchFamily="34" charset="0"/>
+                <a:ea typeface="Pretendard" pitchFamily="34" charset="-122"/>
+                <a:cs typeface="Pretendard" pitchFamily="34" charset="-120"/>
+              </a:rPr>
+              <a:t>WEEK 09</a:t>
+            </a:r>
+            <a:endParaRPr lang="en-US" sz="900" dirty="0"/>
+          </a:p>
+        </p:txBody>
+      </p:sp>
+      <p:sp>
+        <p:nvSpPr>
+          <p:cNvPr id="5" name="Shape 3"/>
+          <p:cNvSpPr/>
+          <p:nvPr/>
+        </p:nvSpPr>
+        <p:spPr>
+          <a:xfrm>
+            <a:off x="640080" y="548640"/>
+            <a:ext cx="10911535" cy="7315"/>
+          </a:xfrm>
+          <a:prstGeom prst="rect">
+            <a:avLst/>
+          </a:prstGeom>
+          <a:solidFill>
+            <a:srgbClr val="333333"/>
+          </a:solidFill>
+          <a:ln w="12700">
+            <a:solidFill>
+              <a:srgbClr val="333333"/>
+            </a:solidFill>
+            <a:prstDash val="solid"/>
+          </a:ln>
+        </p:spPr>
+      </p:sp>
+      <p:sp>
+        <p:nvSpPr>
+          <p:cNvPr id="6" name="Text 4"/>
+          <p:cNvSpPr/>
+          <p:nvPr/>
+        </p:nvSpPr>
+        <p:spPr>
+          <a:xfrm>
+            <a:off x="7345375" y="1737360"/>
+            <a:ext cx="4206240" cy="3291840"/>
+          </a:xfrm>
+          <a:prstGeom prst="rect">
+            <a:avLst/>
+          </a:prstGeom>
+          <a:noFill/>
+          <a:ln/>
+        </p:spPr>
+        <p:txBody>
+          <a:bodyPr wrap="square" lIns="0" tIns="0" rIns="0" bIns="0" rtlCol="0" anchor="ctr"/>
+          <a:lstStyle/>
+          <a:p>
+            <a:pPr algn="r" indent="0" marL="0">
+              <a:buNone/>
+            </a:pPr>
+            <a:r>
+              <a:rPr lang="en-US" sz="20000" dirty="0">
+                <a:solidFill>
+                  <a:srgbClr val="1B1B1B"/>
+                </a:solidFill>
+                <a:latin typeface="Pretendard SemiBold" pitchFamily="34" charset="0"/>
+                <a:ea typeface="Pretendard SemiBold" pitchFamily="34" charset="-122"/>
+                <a:cs typeface="Pretendard SemiBold" pitchFamily="34" charset="-120"/>
+              </a:rPr>
+              <a:t>02</a:t>
+            </a:r>
+            <a:endParaRPr lang="en-US" sz="20000" dirty="0"/>
+          </a:p>
+        </p:txBody>
+      </p:sp>
+      <p:sp>
+        <p:nvSpPr>
+          <p:cNvPr id="7" name="Shape 5"/>
+          <p:cNvSpPr/>
+          <p:nvPr/>
+        </p:nvSpPr>
+        <p:spPr>
+          <a:xfrm>
+            <a:off x="941832" y="1371600"/>
+            <a:ext cx="0" cy="603504"/>
+          </a:xfrm>
+          <a:prstGeom prst="line">
+            <a:avLst/>
+          </a:prstGeom>
+          <a:noFill/>
+          <a:ln w="15875">
+            <a:solidFill>
+              <a:srgbClr val="FFFFFF"/>
+            </a:solidFill>
+            <a:prstDash val="solid"/>
+          </a:ln>
+        </p:spPr>
+      </p:sp>
+      <p:sp>
+        <p:nvSpPr>
+          <p:cNvPr id="8" name="Shape 6"/>
+          <p:cNvSpPr/>
+          <p:nvPr/>
+        </p:nvSpPr>
+        <p:spPr>
+          <a:xfrm>
+            <a:off x="640080" y="1733702"/>
+            <a:ext cx="301752" cy="241402"/>
+          </a:xfrm>
+          <a:prstGeom prst="line">
+            <a:avLst/>
+          </a:prstGeom>
+          <a:noFill/>
+          <a:ln w="15875">
+            <a:solidFill>
+              <a:srgbClr val="FFFFFF"/>
+            </a:solidFill>
+            <a:prstDash val="solid"/>
+          </a:ln>
+        </p:spPr>
+      </p:sp>
+      <p:sp>
+        <p:nvSpPr>
+          <p:cNvPr id="9" name="Shape 7"/>
+          <p:cNvSpPr/>
+          <p:nvPr/>
+        </p:nvSpPr>
+        <p:spPr>
+          <a:xfrm flipV="1">
+            <a:off x="941832" y="1733702"/>
+            <a:ext cx="301752" cy="241402"/>
+          </a:xfrm>
+          <a:prstGeom prst="line">
+            <a:avLst/>
+          </a:prstGeom>
+          <a:noFill/>
+          <a:ln w="15875">
+            <a:solidFill>
+              <a:srgbClr val="FFFFFF"/>
+            </a:solidFill>
+            <a:prstDash val="solid"/>
+          </a:ln>
+        </p:spPr>
+      </p:sp>
+      <p:sp>
+        <p:nvSpPr>
+          <p:cNvPr id="10" name="Text 8"/>
+          <p:cNvSpPr/>
+          <p:nvPr/>
+        </p:nvSpPr>
+        <p:spPr>
+          <a:xfrm>
+            <a:off x="640080" y="2615184"/>
+            <a:ext cx="7863840" cy="256032"/>
+          </a:xfrm>
+          <a:prstGeom prst="rect">
+            <a:avLst/>
+          </a:prstGeom>
+          <a:noFill/>
+          <a:ln/>
+        </p:spPr>
+        <p:txBody>
+          <a:bodyPr wrap="square" lIns="0" tIns="0" rIns="0" bIns="0" rtlCol="0" anchor="ctr"/>
+          <a:lstStyle/>
+          <a:p>
+            <a:pPr indent="0" marL="0">
+              <a:buNone/>
+            </a:pPr>
+            <a:r>
+              <a:rPr lang="en-US" sz="950" spc="280" kern="0" dirty="0">
+                <a:solidFill>
+                  <a:srgbClr val="9A9A9A"/>
+                </a:solidFill>
+                <a:latin typeface="Pretendard" pitchFamily="34" charset="0"/>
+                <a:ea typeface="Pretendard" pitchFamily="34" charset="-122"/>
+                <a:cs typeface="Pretendard" pitchFamily="34" charset="-120"/>
+              </a:rPr>
+              <a:t>PART 02</a:t>
+            </a:r>
+            <a:endParaRPr lang="en-US" sz="950" dirty="0"/>
+          </a:p>
+        </p:txBody>
+      </p:sp>
+      <p:sp>
+        <p:nvSpPr>
+          <p:cNvPr id="11" name="Text 9"/>
+          <p:cNvSpPr/>
+          <p:nvPr/>
+        </p:nvSpPr>
+        <p:spPr>
+          <a:xfrm>
+            <a:off x="640080" y="2889504"/>
+            <a:ext cx="7863840" cy="786384"/>
+          </a:xfrm>
+          <a:prstGeom prst="rect">
+            <a:avLst/>
+          </a:prstGeom>
+          <a:noFill/>
+          <a:ln/>
+        </p:spPr>
+        <p:txBody>
+          <a:bodyPr wrap="square" lIns="0" tIns="0" rIns="0" bIns="0" rtlCol="0" anchor="ctr"/>
+          <a:lstStyle/>
+          <a:p>
+            <a:pPr indent="0" marL="0">
+              <a:buNone/>
+            </a:pPr>
+            <a:r>
+              <a:rPr lang="en-US" sz="4600" dirty="0">
+                <a:solidFill>
+                  <a:srgbClr val="FFFFFF"/>
+                </a:solidFill>
+                <a:latin typeface="Pretendard SemiBold" pitchFamily="34" charset="0"/>
+                <a:ea typeface="Pretendard SemiBold" pitchFamily="34" charset="-122"/>
+                <a:cs typeface="Pretendard SemiBold" pitchFamily="34" charset="-120"/>
+              </a:rPr>
+              <a:t>그리드 시스템</a:t>
+            </a:r>
+            <a:endParaRPr lang="en-US" sz="4600" dirty="0"/>
+          </a:p>
+        </p:txBody>
+      </p:sp>
+      <p:sp>
+        <p:nvSpPr>
+          <p:cNvPr id="12" name="Shape 10"/>
+          <p:cNvSpPr/>
+          <p:nvPr/>
+        </p:nvSpPr>
+        <p:spPr>
+          <a:xfrm>
+            <a:off x="640080" y="3803904"/>
+            <a:ext cx="2194560" cy="7315"/>
+          </a:xfrm>
+          <a:prstGeom prst="rect">
+            <a:avLst/>
+          </a:prstGeom>
+          <a:solidFill>
+            <a:srgbClr val="FFFFFF"/>
+          </a:solidFill>
+          <a:ln w="12700">
+            <a:solidFill>
+              <a:srgbClr val="FFFFFF"/>
+            </a:solidFill>
+            <a:prstDash val="solid"/>
+          </a:ln>
+        </p:spPr>
+      </p:sp>
+      <p:sp>
+        <p:nvSpPr>
+          <p:cNvPr id="13" name="Text 11"/>
+          <p:cNvSpPr/>
+          <p:nvPr/>
+        </p:nvSpPr>
+        <p:spPr>
+          <a:xfrm>
+            <a:off x="640080" y="4005072"/>
+            <a:ext cx="6949440" cy="731520"/>
+          </a:xfrm>
+          <a:prstGeom prst="rect">
+            <a:avLst/>
+          </a:prstGeom>
+          <a:noFill/>
+          <a:ln/>
+        </p:spPr>
+        <p:txBody>
+          <a:bodyPr wrap="square" lIns="0" tIns="0" rIns="0" bIns="0" rtlCol="0" anchor="t"/>
+          <a:lstStyle/>
+          <a:p>
+            <a:pPr indent="0" marL="0">
+              <a:lnSpc>
+                <a:spcPct val="134000"/>
+              </a:lnSpc>
+              <a:buNone/>
+            </a:pPr>
+            <a:r>
+              <a:rPr lang="en-US" sz="1350" dirty="0">
+                <a:solidFill>
+                  <a:srgbClr val="B8B8B8"/>
+                </a:solidFill>
+                <a:latin typeface="Pretendard Light" pitchFamily="34" charset="0"/>
+                <a:ea typeface="Pretendard Light" pitchFamily="34" charset="-122"/>
+                <a:cs typeface="Pretendard Light" pitchFamily="34" charset="-120"/>
+              </a:rPr>
+              <a:t>정렬을 매번 눈으로 맞추지 않기 위한 장치입니다.</a:t>
+            </a:r>
+            <a:endParaRPr lang="en-US" sz="1350" dirty="0"/>
+          </a:p>
+        </p:txBody>
+      </p:sp>
+      <p:sp>
+        <p:nvSpPr>
+          <p:cNvPr id="14" name="Text 12"/>
+          <p:cNvSpPr/>
+          <p:nvPr/>
+        </p:nvSpPr>
+        <p:spPr>
+          <a:xfrm rot="16200000">
+            <a:off x="10436047" y="3291840"/>
+            <a:ext cx="2743200" cy="274320"/>
+          </a:xfrm>
+          <a:prstGeom prst="rect">
+            <a:avLst/>
+          </a:prstGeom>
+          <a:noFill/>
+          <a:ln/>
+        </p:spPr>
+        <p:txBody>
+          <a:bodyPr wrap="square" lIns="0" tIns="0" rIns="0" bIns="0" rtlCol="0" anchor="ctr"/>
+          <a:lstStyle/>
+          <a:p>
+            <a:pPr algn="ctr" indent="0" marL="0">
+              <a:buNone/>
+            </a:pPr>
+            <a:r>
+              <a:rPr lang="en-US" sz="850" spc="260" kern="0" dirty="0">
+                <a:solidFill>
+                  <a:srgbClr val="7A7A7A"/>
+                </a:solidFill>
+                <a:latin typeface="Pretendard" pitchFamily="34" charset="0"/>
+                <a:ea typeface="Pretendard" pitchFamily="34" charset="-122"/>
+                <a:cs typeface="Pretendard" pitchFamily="34" charset="-120"/>
+              </a:rPr>
+              <a:t>SECTION 02</a:t>
+            </a:r>
+            <a:endParaRPr lang="en-US" sz="850" dirty="0"/>
+          </a:p>
+        </p:txBody>
+      </p:sp>
+    </p:spTree>
+  </p:cSld>
+  <p:clrMapOvr>
+    <a:masterClrMapping/>
+  </p:clrMapOvr>
+</p:sld>
+</file>
+
+<file path=ppt/slides/slide7.xml><?xml version="1.0" encoding="utf-8"?>
+<p:sld xmlns:a="http://schemas.openxmlformats.org/drawingml/2006/main" xmlns:r="http://schemas.openxmlformats.org/officeDocument/2006/relationships" xmlns:p="http://schemas.openxmlformats.org/presentationml/2006/main">
+  <p:cSld name="Slide 7">
     <p:bg>
       <p:bgPr>
         <a:solidFill>
@@ -6473,7 +5980,7 @@
                 <a:ea typeface="Pretendard" pitchFamily="34" charset="-122"/>
                 <a:cs typeface="Pretendard" pitchFamily="34" charset="-120"/>
               </a:rPr>
-              <a:t>TYPE</a:t>
+              <a:t>GRID</a:t>
             </a:r>
             <a:endParaRPr lang="en-US" sz="950" dirty="0"/>
           </a:p>
@@ -6512,7 +6019,7 @@
                 <a:ea typeface="Pretendard SemiBold" pitchFamily="34" charset="-122"/>
                 <a:cs typeface="Pretendard SemiBold" pitchFamily="34" charset="-120"/>
               </a:rPr>
-              <a:t>타이포는 세 단계 · 서체는 한두 벌</a:t>
+              <a:t>그리드에서 정할 것 셋</a:t>
             </a:r>
             <a:endParaRPr lang="en-US" sz="3000" dirty="0"/>
           </a:p>
@@ -6551,7 +6058,7 @@
                 <a:ea typeface="Pretendard" pitchFamily="34" charset="-122"/>
                 <a:cs typeface="Pretendard" pitchFamily="34" charset="-120"/>
               </a:rPr>
-              <a:t>9주차에 정하고 학기 끝까지 바꾸지 않습니다.</a:t>
+              <a:t>한 번 정하면 모든 페이지에 그대로 씁니다.</a:t>
             </a:r>
             <a:endParaRPr lang="en-US" sz="1150" dirty="0"/>
           </a:p>
@@ -6565,7 +6072,526 @@
         </p:nvSpPr>
         <p:spPr>
           <a:xfrm>
-            <a:off x="640080" y="1664208"/>
+            <a:off x="640080" y="1737360"/>
+            <a:ext cx="3393338" cy="3035808"/>
+          </a:xfrm>
+          <a:prstGeom prst="rect">
+            <a:avLst/>
+          </a:prstGeom>
+          <a:solidFill>
+            <a:srgbClr val="FFFFFF"/>
+          </a:solidFill>
+          <a:ln w="12700">
+            <a:solidFill>
+              <a:srgbClr val="DCDCDC"/>
+            </a:solidFill>
+            <a:prstDash val="solid"/>
+          </a:ln>
+        </p:spPr>
+      </p:sp>
+      <p:sp>
+        <p:nvSpPr>
+          <p:cNvPr id="10" name="Shape 8"/>
+          <p:cNvSpPr/>
+          <p:nvPr/>
+        </p:nvSpPr>
+        <p:spPr>
+          <a:xfrm>
+            <a:off x="1024128" y="2011680"/>
+            <a:ext cx="365760" cy="365760"/>
+          </a:xfrm>
+          <a:prstGeom prst="ellipse">
+            <a:avLst/>
+          </a:prstGeom>
+          <a:solidFill>
+            <a:srgbClr val="FFFFFF"/>
+          </a:solidFill>
+          <a:ln w="12700">
+            <a:solidFill>
+              <a:srgbClr val="111111"/>
+            </a:solidFill>
+            <a:prstDash val="solid"/>
+          </a:ln>
+        </p:spPr>
+      </p:sp>
+      <p:sp>
+        <p:nvSpPr>
+          <p:cNvPr id="11" name="Text 9"/>
+          <p:cNvSpPr/>
+          <p:nvPr/>
+        </p:nvSpPr>
+        <p:spPr>
+          <a:xfrm>
+            <a:off x="1024128" y="2011680"/>
+            <a:ext cx="365760" cy="365760"/>
+          </a:xfrm>
+          <a:prstGeom prst="rect">
+            <a:avLst/>
+          </a:prstGeom>
+          <a:noFill/>
+          <a:ln/>
+        </p:spPr>
+        <p:txBody>
+          <a:bodyPr wrap="square" lIns="0" tIns="0" rIns="0" bIns="0" rtlCol="0" anchor="ctr"/>
+          <a:lstStyle/>
+          <a:p>
+            <a:pPr algn="ctr" indent="0" marL="0">
+              <a:buNone/>
+            </a:pPr>
+            <a:r>
+              <a:rPr lang="en-US" sz="1150" b="1" dirty="0">
+                <a:solidFill>
+                  <a:srgbClr val="111111"/>
+                </a:solidFill>
+                <a:latin typeface="Pretendard" pitchFamily="34" charset="0"/>
+                <a:ea typeface="Pretendard" pitchFamily="34" charset="-122"/>
+                <a:cs typeface="Pretendard" pitchFamily="34" charset="-120"/>
+              </a:rPr>
+              <a:t>01</a:t>
+            </a:r>
+            <a:endParaRPr lang="en-US" sz="1150" dirty="0"/>
+          </a:p>
+        </p:txBody>
+      </p:sp>
+      <p:sp>
+        <p:nvSpPr>
+          <p:cNvPr id="12" name="Text 10"/>
+          <p:cNvSpPr/>
+          <p:nvPr/>
+        </p:nvSpPr>
+        <p:spPr>
+          <a:xfrm>
+            <a:off x="1024128" y="2505456"/>
+            <a:ext cx="2625242" cy="457200"/>
+          </a:xfrm>
+          <a:prstGeom prst="rect">
+            <a:avLst/>
+          </a:prstGeom>
+          <a:noFill/>
+          <a:ln/>
+        </p:spPr>
+        <p:txBody>
+          <a:bodyPr wrap="square" lIns="0" tIns="0" rIns="0" bIns="0" rtlCol="0" anchor="t"/>
+          <a:lstStyle/>
+          <a:p>
+            <a:pPr indent="0" marL="0">
+              <a:lnSpc>
+                <a:spcPct val="114000"/>
+              </a:lnSpc>
+              <a:buNone/>
+            </a:pPr>
+            <a:r>
+              <a:rPr lang="en-US" sz="1700" dirty="0">
+                <a:solidFill>
+                  <a:srgbClr val="111111"/>
+                </a:solidFill>
+                <a:latin typeface="Pretendard SemiBold" pitchFamily="34" charset="0"/>
+                <a:ea typeface="Pretendard SemiBold" pitchFamily="34" charset="-122"/>
+                <a:cs typeface="Pretendard SemiBold" pitchFamily="34" charset="-120"/>
+              </a:rPr>
+              <a:t>마진</a:t>
+            </a:r>
+            <a:endParaRPr lang="en-US" sz="1700" dirty="0"/>
+          </a:p>
+        </p:txBody>
+      </p:sp>
+      <p:sp>
+        <p:nvSpPr>
+          <p:cNvPr id="13" name="Text 11"/>
+          <p:cNvSpPr/>
+          <p:nvPr/>
+        </p:nvSpPr>
+        <p:spPr>
+          <a:xfrm>
+            <a:off x="1024128" y="2999232"/>
+            <a:ext cx="2625242" cy="1645920"/>
+          </a:xfrm>
+          <a:prstGeom prst="rect">
+            <a:avLst/>
+          </a:prstGeom>
+          <a:noFill/>
+          <a:ln/>
+        </p:spPr>
+        <p:txBody>
+          <a:bodyPr wrap="square" lIns="0" tIns="0" rIns="0" bIns="0" rtlCol="0" anchor="t"/>
+          <a:lstStyle/>
+          <a:p>
+            <a:pPr indent="0" marL="0">
+              <a:lnSpc>
+                <a:spcPct val="130000"/>
+              </a:lnSpc>
+              <a:buNone/>
+            </a:pPr>
+            <a:r>
+              <a:rPr lang="en-US" sz="1150" dirty="0">
+                <a:solidFill>
+                  <a:srgbClr val="6E6E6E"/>
+                </a:solidFill>
+                <a:latin typeface="Pretendard" pitchFamily="34" charset="0"/>
+                <a:ea typeface="Pretendard" pitchFamily="34" charset="-122"/>
+                <a:cs typeface="Pretendard" pitchFamily="34" charset="-120"/>
+              </a:rPr>
+              <a:t>지면 가장자리 여백. 상하좌우를 정하고 예외를 두지 않습니다. 전면 이미지만 예외로 허용합니다.</a:t>
+            </a:r>
+            <a:endParaRPr lang="en-US" sz="1150" dirty="0"/>
+          </a:p>
+        </p:txBody>
+      </p:sp>
+      <p:sp>
+        <p:nvSpPr>
+          <p:cNvPr id="14" name="Shape 12"/>
+          <p:cNvSpPr/>
+          <p:nvPr/>
+        </p:nvSpPr>
+        <p:spPr>
+          <a:xfrm>
+            <a:off x="4399178" y="1737360"/>
+            <a:ext cx="3393338" cy="3035808"/>
+          </a:xfrm>
+          <a:prstGeom prst="rect">
+            <a:avLst/>
+          </a:prstGeom>
+          <a:solidFill>
+            <a:srgbClr val="FFFFFF"/>
+          </a:solidFill>
+          <a:ln w="12700">
+            <a:solidFill>
+              <a:srgbClr val="DCDCDC"/>
+            </a:solidFill>
+            <a:prstDash val="solid"/>
+          </a:ln>
+        </p:spPr>
+      </p:sp>
+      <p:sp>
+        <p:nvSpPr>
+          <p:cNvPr id="15" name="Shape 13"/>
+          <p:cNvSpPr/>
+          <p:nvPr/>
+        </p:nvSpPr>
+        <p:spPr>
+          <a:xfrm>
+            <a:off x="4783226" y="2011680"/>
+            <a:ext cx="365760" cy="365760"/>
+          </a:xfrm>
+          <a:prstGeom prst="ellipse">
+            <a:avLst/>
+          </a:prstGeom>
+          <a:solidFill>
+            <a:srgbClr val="FFFFFF"/>
+          </a:solidFill>
+          <a:ln w="12700">
+            <a:solidFill>
+              <a:srgbClr val="111111"/>
+            </a:solidFill>
+            <a:prstDash val="solid"/>
+          </a:ln>
+        </p:spPr>
+      </p:sp>
+      <p:sp>
+        <p:nvSpPr>
+          <p:cNvPr id="16" name="Text 14"/>
+          <p:cNvSpPr/>
+          <p:nvPr/>
+        </p:nvSpPr>
+        <p:spPr>
+          <a:xfrm>
+            <a:off x="4783226" y="2011680"/>
+            <a:ext cx="365760" cy="365760"/>
+          </a:xfrm>
+          <a:prstGeom prst="rect">
+            <a:avLst/>
+          </a:prstGeom>
+          <a:noFill/>
+          <a:ln/>
+        </p:spPr>
+        <p:txBody>
+          <a:bodyPr wrap="square" lIns="0" tIns="0" rIns="0" bIns="0" rtlCol="0" anchor="ctr"/>
+          <a:lstStyle/>
+          <a:p>
+            <a:pPr algn="ctr" indent="0" marL="0">
+              <a:buNone/>
+            </a:pPr>
+            <a:r>
+              <a:rPr lang="en-US" sz="1150" b="1" dirty="0">
+                <a:solidFill>
+                  <a:srgbClr val="111111"/>
+                </a:solidFill>
+                <a:latin typeface="Pretendard" pitchFamily="34" charset="0"/>
+                <a:ea typeface="Pretendard" pitchFamily="34" charset="-122"/>
+                <a:cs typeface="Pretendard" pitchFamily="34" charset="-120"/>
+              </a:rPr>
+              <a:t>02</a:t>
+            </a:r>
+            <a:endParaRPr lang="en-US" sz="1150" dirty="0"/>
+          </a:p>
+        </p:txBody>
+      </p:sp>
+      <p:sp>
+        <p:nvSpPr>
+          <p:cNvPr id="17" name="Text 15"/>
+          <p:cNvSpPr/>
+          <p:nvPr/>
+        </p:nvSpPr>
+        <p:spPr>
+          <a:xfrm>
+            <a:off x="4783226" y="2505456"/>
+            <a:ext cx="2625242" cy="457200"/>
+          </a:xfrm>
+          <a:prstGeom prst="rect">
+            <a:avLst/>
+          </a:prstGeom>
+          <a:noFill/>
+          <a:ln/>
+        </p:spPr>
+        <p:txBody>
+          <a:bodyPr wrap="square" lIns="0" tIns="0" rIns="0" bIns="0" rtlCol="0" anchor="t"/>
+          <a:lstStyle/>
+          <a:p>
+            <a:pPr indent="0" marL="0">
+              <a:lnSpc>
+                <a:spcPct val="114000"/>
+              </a:lnSpc>
+              <a:buNone/>
+            </a:pPr>
+            <a:r>
+              <a:rPr lang="en-US" sz="1700" dirty="0">
+                <a:solidFill>
+                  <a:srgbClr val="111111"/>
+                </a:solidFill>
+                <a:latin typeface="Pretendard SemiBold" pitchFamily="34" charset="0"/>
+                <a:ea typeface="Pretendard SemiBold" pitchFamily="34" charset="-122"/>
+                <a:cs typeface="Pretendard SemiBold" pitchFamily="34" charset="-120"/>
+              </a:rPr>
+              <a:t>칼럼</a:t>
+            </a:r>
+            <a:endParaRPr lang="en-US" sz="1700" dirty="0"/>
+          </a:p>
+        </p:txBody>
+      </p:sp>
+      <p:sp>
+        <p:nvSpPr>
+          <p:cNvPr id="18" name="Text 16"/>
+          <p:cNvSpPr/>
+          <p:nvPr/>
+        </p:nvSpPr>
+        <p:spPr>
+          <a:xfrm>
+            <a:off x="4783226" y="2999232"/>
+            <a:ext cx="2625242" cy="1645920"/>
+          </a:xfrm>
+          <a:prstGeom prst="rect">
+            <a:avLst/>
+          </a:prstGeom>
+          <a:noFill/>
+          <a:ln/>
+        </p:spPr>
+        <p:txBody>
+          <a:bodyPr wrap="square" lIns="0" tIns="0" rIns="0" bIns="0" rtlCol="0" anchor="t"/>
+          <a:lstStyle/>
+          <a:p>
+            <a:pPr indent="0" marL="0">
+              <a:lnSpc>
+                <a:spcPct val="130000"/>
+              </a:lnSpc>
+              <a:buNone/>
+            </a:pPr>
+            <a:r>
+              <a:rPr lang="en-US" sz="1150" dirty="0">
+                <a:solidFill>
+                  <a:srgbClr val="6E6E6E"/>
+                </a:solidFill>
+                <a:latin typeface="Pretendard" pitchFamily="34" charset="0"/>
+                <a:ea typeface="Pretendard" pitchFamily="34" charset="-122"/>
+                <a:cs typeface="Pretendard" pitchFamily="34" charset="-120"/>
+              </a:rPr>
+              <a:t>가로 분할. 12칼럼이면 2·3·4·6단으로 나눠 쓸 수 있어 유연합니다. 8칼럼도 무난합니다.</a:t>
+            </a:r>
+            <a:endParaRPr lang="en-US" sz="1150" dirty="0"/>
+          </a:p>
+        </p:txBody>
+      </p:sp>
+      <p:sp>
+        <p:nvSpPr>
+          <p:cNvPr id="19" name="Shape 17"/>
+          <p:cNvSpPr/>
+          <p:nvPr/>
+        </p:nvSpPr>
+        <p:spPr>
+          <a:xfrm>
+            <a:off x="8158277" y="1737360"/>
+            <a:ext cx="3393338" cy="3035808"/>
+          </a:xfrm>
+          <a:prstGeom prst="rect">
+            <a:avLst/>
+          </a:prstGeom>
+          <a:solidFill>
+            <a:srgbClr val="FFFFFF"/>
+          </a:solidFill>
+          <a:ln w="12700">
+            <a:solidFill>
+              <a:srgbClr val="DCDCDC"/>
+            </a:solidFill>
+            <a:prstDash val="solid"/>
+          </a:ln>
+        </p:spPr>
+      </p:sp>
+      <p:sp>
+        <p:nvSpPr>
+          <p:cNvPr id="20" name="Shape 18"/>
+          <p:cNvSpPr/>
+          <p:nvPr/>
+        </p:nvSpPr>
+        <p:spPr>
+          <a:xfrm>
+            <a:off x="8542325" y="2011680"/>
+            <a:ext cx="365760" cy="365760"/>
+          </a:xfrm>
+          <a:prstGeom prst="ellipse">
+            <a:avLst/>
+          </a:prstGeom>
+          <a:solidFill>
+            <a:srgbClr val="FFFFFF"/>
+          </a:solidFill>
+          <a:ln w="12700">
+            <a:solidFill>
+              <a:srgbClr val="111111"/>
+            </a:solidFill>
+            <a:prstDash val="solid"/>
+          </a:ln>
+        </p:spPr>
+      </p:sp>
+      <p:sp>
+        <p:nvSpPr>
+          <p:cNvPr id="21" name="Text 19"/>
+          <p:cNvSpPr/>
+          <p:nvPr/>
+        </p:nvSpPr>
+        <p:spPr>
+          <a:xfrm>
+            <a:off x="8542325" y="2011680"/>
+            <a:ext cx="365760" cy="365760"/>
+          </a:xfrm>
+          <a:prstGeom prst="rect">
+            <a:avLst/>
+          </a:prstGeom>
+          <a:noFill/>
+          <a:ln/>
+        </p:spPr>
+        <p:txBody>
+          <a:bodyPr wrap="square" lIns="0" tIns="0" rIns="0" bIns="0" rtlCol="0" anchor="ctr"/>
+          <a:lstStyle/>
+          <a:p>
+            <a:pPr algn="ctr" indent="0" marL="0">
+              <a:buNone/>
+            </a:pPr>
+            <a:r>
+              <a:rPr lang="en-US" sz="1150" b="1" dirty="0">
+                <a:solidFill>
+                  <a:srgbClr val="111111"/>
+                </a:solidFill>
+                <a:latin typeface="Pretendard" pitchFamily="34" charset="0"/>
+                <a:ea typeface="Pretendard" pitchFamily="34" charset="-122"/>
+                <a:cs typeface="Pretendard" pitchFamily="34" charset="-120"/>
+              </a:rPr>
+              <a:t>03</a:t>
+            </a:r>
+            <a:endParaRPr lang="en-US" sz="1150" dirty="0"/>
+          </a:p>
+        </p:txBody>
+      </p:sp>
+      <p:sp>
+        <p:nvSpPr>
+          <p:cNvPr id="22" name="Text 20"/>
+          <p:cNvSpPr/>
+          <p:nvPr/>
+        </p:nvSpPr>
+        <p:spPr>
+          <a:xfrm>
+            <a:off x="8542325" y="2505456"/>
+            <a:ext cx="2625242" cy="457200"/>
+          </a:xfrm>
+          <a:prstGeom prst="rect">
+            <a:avLst/>
+          </a:prstGeom>
+          <a:noFill/>
+          <a:ln/>
+        </p:spPr>
+        <p:txBody>
+          <a:bodyPr wrap="square" lIns="0" tIns="0" rIns="0" bIns="0" rtlCol="0" anchor="t"/>
+          <a:lstStyle/>
+          <a:p>
+            <a:pPr indent="0" marL="0">
+              <a:lnSpc>
+                <a:spcPct val="114000"/>
+              </a:lnSpc>
+              <a:buNone/>
+            </a:pPr>
+            <a:r>
+              <a:rPr lang="en-US" sz="1700" dirty="0">
+                <a:solidFill>
+                  <a:srgbClr val="111111"/>
+                </a:solidFill>
+                <a:latin typeface="Pretendard SemiBold" pitchFamily="34" charset="0"/>
+                <a:ea typeface="Pretendard SemiBold" pitchFamily="34" charset="-122"/>
+                <a:cs typeface="Pretendard SemiBold" pitchFamily="34" charset="-120"/>
+              </a:rPr>
+              <a:t>기준선</a:t>
+            </a:r>
+            <a:endParaRPr lang="en-US" sz="1700" dirty="0"/>
+          </a:p>
+        </p:txBody>
+      </p:sp>
+      <p:sp>
+        <p:nvSpPr>
+          <p:cNvPr id="23" name="Text 21"/>
+          <p:cNvSpPr/>
+          <p:nvPr/>
+        </p:nvSpPr>
+        <p:spPr>
+          <a:xfrm>
+            <a:off x="8542325" y="2999232"/>
+            <a:ext cx="2625242" cy="1645920"/>
+          </a:xfrm>
+          <a:prstGeom prst="rect">
+            <a:avLst/>
+          </a:prstGeom>
+          <a:noFill/>
+          <a:ln/>
+        </p:spPr>
+        <p:txBody>
+          <a:bodyPr wrap="square" lIns="0" tIns="0" rIns="0" bIns="0" rtlCol="0" anchor="t"/>
+          <a:lstStyle/>
+          <a:p>
+            <a:pPr indent="0" marL="0">
+              <a:lnSpc>
+                <a:spcPct val="130000"/>
+              </a:lnSpc>
+              <a:buNone/>
+            </a:pPr>
+            <a:r>
+              <a:rPr lang="en-US" sz="1150" dirty="0">
+                <a:solidFill>
+                  <a:srgbClr val="6E6E6E"/>
+                </a:solidFill>
+                <a:latin typeface="Pretendard" pitchFamily="34" charset="0"/>
+                <a:ea typeface="Pretendard" pitchFamily="34" charset="-122"/>
+                <a:cs typeface="Pretendard" pitchFamily="34" charset="-120"/>
+              </a:rPr>
+              <a:t>요소들이 걸리는 가로선. 제목 위치·이미지 상단을 여기 맞추면 페이지가 넘어가도 흔들리지 않습니다.</a:t>
+            </a:r>
+            <a:endParaRPr lang="en-US" sz="1150" dirty="0"/>
+          </a:p>
+        </p:txBody>
+      </p:sp>
+      <p:sp>
+        <p:nvSpPr>
+          <p:cNvPr id="24" name="Shape 22"/>
+          <p:cNvSpPr/>
+          <p:nvPr/>
+        </p:nvSpPr>
+        <p:spPr>
+          <a:xfrm>
+            <a:off x="640080" y="5084064"/>
             <a:ext cx="10911535" cy="7315"/>
           </a:xfrm>
           <a:prstGeom prst="rect">
@@ -6584,55 +6610,33 @@
       </p:sp>
       <p:sp>
         <p:nvSpPr>
-          <p:cNvPr id="10" name="Shape 8"/>
-          <p:cNvSpPr/>
-          <p:nvPr/>
-        </p:nvSpPr>
-        <p:spPr>
-          <a:xfrm>
-            <a:off x="640080" y="1810512"/>
-            <a:ext cx="310896" cy="310896"/>
-          </a:xfrm>
-          <a:prstGeom prst="ellipse">
-            <a:avLst/>
-          </a:prstGeom>
-          <a:solidFill>
-            <a:srgbClr val="FFFFFF"/>
-          </a:solidFill>
-          <a:ln w="12700">
-            <a:solidFill>
-              <a:srgbClr val="111111"/>
-            </a:solidFill>
-            <a:prstDash val="solid"/>
-          </a:ln>
-        </p:spPr>
-      </p:sp>
-      <p:sp>
-        <p:nvSpPr>
-          <p:cNvPr id="11" name="Text 9"/>
-          <p:cNvSpPr/>
-          <p:nvPr/>
-        </p:nvSpPr>
-        <p:spPr>
-          <a:xfrm>
-            <a:off x="640080" y="1810512"/>
-            <a:ext cx="310896" cy="310896"/>
-          </a:xfrm>
-          <a:prstGeom prst="rect">
-            <a:avLst/>
-          </a:prstGeom>
-          <a:noFill/>
-          <a:ln/>
-        </p:spPr>
-        <p:txBody>
-          <a:bodyPr wrap="square" lIns="0" tIns="0" rIns="0" bIns="0" rtlCol="0" anchor="ctr"/>
-          <a:lstStyle/>
-          <a:p>
-            <a:pPr algn="ctr" indent="0" marL="0">
-              <a:buNone/>
-            </a:pPr>
-            <a:r>
-              <a:rPr lang="en-US" sz="1000" b="1" dirty="0">
+          <p:cNvPr id="25" name="Text 23"/>
+          <p:cNvSpPr/>
+          <p:nvPr/>
+        </p:nvSpPr>
+        <p:spPr>
+          <a:xfrm>
+            <a:off x="640080" y="5193792"/>
+            <a:ext cx="10911535" cy="438912"/>
+          </a:xfrm>
+          <a:prstGeom prst="rect">
+            <a:avLst/>
+          </a:prstGeom>
+          <a:noFill/>
+          <a:ln/>
+        </p:spPr>
+        <p:txBody>
+          <a:bodyPr wrap="square" lIns="0" tIns="0" rIns="0" bIns="0" rtlCol="0" anchor="t"/>
+          <a:lstStyle/>
+          <a:p>
+            <a:pPr indent="0" marL="0">
+              <a:lnSpc>
+                <a:spcPct val="120000"/>
+              </a:lnSpc>
+              <a:buNone/>
+            </a:pPr>
+            <a:r>
+              <a:rPr lang="en-US" sz="1300" b="1" dirty="0">
                 <a:solidFill>
                   <a:srgbClr val="111111"/>
                 </a:solidFill>
@@ -6640,138 +6644,21 @@
                 <a:ea typeface="Pretendard" pitchFamily="34" charset="-122"/>
                 <a:cs typeface="Pretendard" pitchFamily="34" charset="-120"/>
               </a:rPr>
-              <a:t>1</a:t>
-            </a:r>
-            <a:endParaRPr lang="en-US" sz="1000" dirty="0"/>
-          </a:p>
-        </p:txBody>
-      </p:sp>
-      <p:sp>
-        <p:nvSpPr>
-          <p:cNvPr id="12" name="Text 10"/>
-          <p:cNvSpPr/>
-          <p:nvPr/>
-        </p:nvSpPr>
-        <p:spPr>
-          <a:xfrm>
-            <a:off x="1188720" y="1719072"/>
-            <a:ext cx="7498080" cy="310896"/>
-          </a:xfrm>
-          <a:prstGeom prst="rect">
-            <a:avLst/>
-          </a:prstGeom>
-          <a:noFill/>
-          <a:ln/>
-        </p:spPr>
-        <p:txBody>
-          <a:bodyPr wrap="square" lIns="0" tIns="0" rIns="0" bIns="0" rtlCol="0" anchor="ctr"/>
-          <a:lstStyle/>
-          <a:p>
-            <a:pPr indent="0" marL="0">
-              <a:buNone/>
-            </a:pPr>
-            <a:r>
-              <a:rPr lang="en-US" sz="1450" dirty="0">
-                <a:solidFill>
-                  <a:srgbClr val="111111"/>
-                </a:solidFill>
-                <a:latin typeface="Pretendard SemiBold" pitchFamily="34" charset="0"/>
-                <a:ea typeface="Pretendard SemiBold" pitchFamily="34" charset="-122"/>
-                <a:cs typeface="Pretendard SemiBold" pitchFamily="34" charset="-120"/>
-              </a:rPr>
-              <a:t>제목</a:t>
-            </a:r>
-            <a:endParaRPr lang="en-US" sz="1450" dirty="0"/>
-          </a:p>
-        </p:txBody>
-      </p:sp>
-      <p:sp>
-        <p:nvSpPr>
-          <p:cNvPr id="13" name="Text 11"/>
-          <p:cNvSpPr/>
-          <p:nvPr/>
-        </p:nvSpPr>
-        <p:spPr>
-          <a:xfrm>
-            <a:off x="1188720" y="2029968"/>
-            <a:ext cx="7498080" cy="292608"/>
-          </a:xfrm>
-          <a:prstGeom prst="rect">
-            <a:avLst/>
-          </a:prstGeom>
-          <a:noFill/>
-          <a:ln/>
-        </p:spPr>
-        <p:txBody>
-          <a:bodyPr wrap="square" lIns="0" tIns="0" rIns="0" bIns="0" rtlCol="0" anchor="ctr"/>
-          <a:lstStyle/>
-          <a:p>
-            <a:pPr indent="0" marL="0">
-              <a:buNone/>
-            </a:pPr>
-            <a:r>
-              <a:rPr lang="en-US" sz="1100" dirty="0">
-                <a:solidFill>
-                  <a:srgbClr val="6E6E6E"/>
-                </a:solidFill>
-                <a:latin typeface="Pretendard" pitchFamily="34" charset="0"/>
-                <a:ea typeface="Pretendard" pitchFamily="34" charset="-122"/>
-                <a:cs typeface="Pretendard" pitchFamily="34" charset="-120"/>
-              </a:rPr>
-              <a:t>페이지에서 가장 큰 것. 프로젝트명과 문제 문장에 씁니다</a:t>
-            </a:r>
-            <a:endParaRPr lang="en-US" sz="1100" dirty="0"/>
-          </a:p>
-        </p:txBody>
-      </p:sp>
-      <p:sp>
-        <p:nvSpPr>
-          <p:cNvPr id="14" name="Text 12"/>
-          <p:cNvSpPr/>
-          <p:nvPr/>
-        </p:nvSpPr>
-        <p:spPr>
-          <a:xfrm>
-            <a:off x="9357055" y="1810512"/>
-            <a:ext cx="2194560" cy="310896"/>
-          </a:xfrm>
-          <a:prstGeom prst="rect">
-            <a:avLst/>
-          </a:prstGeom>
-          <a:noFill/>
-          <a:ln/>
-        </p:spPr>
-        <p:txBody>
-          <a:bodyPr wrap="square" lIns="0" tIns="0" rIns="0" bIns="0" rtlCol="0" anchor="ctr"/>
-          <a:lstStyle/>
-          <a:p>
-            <a:pPr algn="r" indent="0" marL="0">
-              <a:buNone/>
-            </a:pPr>
-            <a:r>
-              <a:rPr lang="en-US" sz="1050" b="1" spc="120" kern="0" dirty="0">
-                <a:solidFill>
-                  <a:srgbClr val="111111"/>
-                </a:solidFill>
-                <a:latin typeface="Pretendard" pitchFamily="34" charset="0"/>
-                <a:ea typeface="Pretendard" pitchFamily="34" charset="-122"/>
-                <a:cs typeface="Pretendard" pitchFamily="34" charset="-120"/>
-              </a:rPr>
-              <a:t>1단계</a:t>
-            </a:r>
-            <a:endParaRPr lang="en-US" sz="1050" dirty="0"/>
-          </a:p>
-        </p:txBody>
-      </p:sp>
-      <p:sp>
-        <p:nvSpPr>
-          <p:cNvPr id="15" name="Shape 13"/>
-          <p:cNvSpPr/>
-          <p:nvPr/>
-        </p:nvSpPr>
-        <p:spPr>
-          <a:xfrm>
-            <a:off x="640080" y="2596896"/>
+              <a:t>그리드는 지키기 위한 것이지만, 의도적으로 깨는 페이지 하나쯤은 강조가 됩니다. 다만 의도가 있어야 합니다.</a:t>
+            </a:r>
+            <a:endParaRPr lang="en-US" sz="1300" dirty="0"/>
+          </a:p>
+        </p:txBody>
+      </p:sp>
+      <p:sp>
+        <p:nvSpPr>
+          <p:cNvPr id="26" name="Shape 24"/>
+          <p:cNvSpPr/>
+          <p:nvPr/>
+        </p:nvSpPr>
+        <p:spPr>
+          <a:xfrm>
+            <a:off x="640080" y="6291072"/>
             <a:ext cx="10911535" cy="7315"/>
           </a:xfrm>
           <a:prstGeom prst="rect">
@@ -6790,653 +6677,7 @@
       </p:sp>
       <p:sp>
         <p:nvSpPr>
-          <p:cNvPr id="16" name="Shape 14"/>
-          <p:cNvSpPr/>
-          <p:nvPr/>
-        </p:nvSpPr>
-        <p:spPr>
-          <a:xfrm>
-            <a:off x="640080" y="2761488"/>
-            <a:ext cx="310896" cy="310896"/>
-          </a:xfrm>
-          <a:prstGeom prst="ellipse">
-            <a:avLst/>
-          </a:prstGeom>
-          <a:solidFill>
-            <a:srgbClr val="FFFFFF"/>
-          </a:solidFill>
-          <a:ln w="12700">
-            <a:solidFill>
-              <a:srgbClr val="111111"/>
-            </a:solidFill>
-            <a:prstDash val="solid"/>
-          </a:ln>
-        </p:spPr>
-      </p:sp>
-      <p:sp>
-        <p:nvSpPr>
-          <p:cNvPr id="17" name="Text 15"/>
-          <p:cNvSpPr/>
-          <p:nvPr/>
-        </p:nvSpPr>
-        <p:spPr>
-          <a:xfrm>
-            <a:off x="640080" y="2761488"/>
-            <a:ext cx="310896" cy="310896"/>
-          </a:xfrm>
-          <a:prstGeom prst="rect">
-            <a:avLst/>
-          </a:prstGeom>
-          <a:noFill/>
-          <a:ln/>
-        </p:spPr>
-        <p:txBody>
-          <a:bodyPr wrap="square" lIns="0" tIns="0" rIns="0" bIns="0" rtlCol="0" anchor="ctr"/>
-          <a:lstStyle/>
-          <a:p>
-            <a:pPr algn="ctr" indent="0" marL="0">
-              <a:buNone/>
-            </a:pPr>
-            <a:r>
-              <a:rPr lang="en-US" sz="1000" b="1" dirty="0">
-                <a:solidFill>
-                  <a:srgbClr val="111111"/>
-                </a:solidFill>
-                <a:latin typeface="Pretendard" pitchFamily="34" charset="0"/>
-                <a:ea typeface="Pretendard" pitchFamily="34" charset="-122"/>
-                <a:cs typeface="Pretendard" pitchFamily="34" charset="-120"/>
-              </a:rPr>
-              <a:t>2</a:t>
-            </a:r>
-            <a:endParaRPr lang="en-US" sz="1000" dirty="0"/>
-          </a:p>
-        </p:txBody>
-      </p:sp>
-      <p:sp>
-        <p:nvSpPr>
-          <p:cNvPr id="18" name="Text 16"/>
-          <p:cNvSpPr/>
-          <p:nvPr/>
-        </p:nvSpPr>
-        <p:spPr>
-          <a:xfrm>
-            <a:off x="1188720" y="2670048"/>
-            <a:ext cx="7498080" cy="310896"/>
-          </a:xfrm>
-          <a:prstGeom prst="rect">
-            <a:avLst/>
-          </a:prstGeom>
-          <a:noFill/>
-          <a:ln/>
-        </p:spPr>
-        <p:txBody>
-          <a:bodyPr wrap="square" lIns="0" tIns="0" rIns="0" bIns="0" rtlCol="0" anchor="ctr"/>
-          <a:lstStyle/>
-          <a:p>
-            <a:pPr indent="0" marL="0">
-              <a:buNone/>
-            </a:pPr>
-            <a:r>
-              <a:rPr lang="en-US" sz="1450" dirty="0">
-                <a:solidFill>
-                  <a:srgbClr val="111111"/>
-                </a:solidFill>
-                <a:latin typeface="Pretendard SemiBold" pitchFamily="34" charset="0"/>
-                <a:ea typeface="Pretendard SemiBold" pitchFamily="34" charset="-122"/>
-                <a:cs typeface="Pretendard SemiBold" pitchFamily="34" charset="-120"/>
-              </a:rPr>
-              <a:t>본문</a:t>
-            </a:r>
-            <a:endParaRPr lang="en-US" sz="1450" dirty="0"/>
-          </a:p>
-        </p:txBody>
-      </p:sp>
-      <p:sp>
-        <p:nvSpPr>
-          <p:cNvPr id="19" name="Text 17"/>
-          <p:cNvSpPr/>
-          <p:nvPr/>
-        </p:nvSpPr>
-        <p:spPr>
-          <a:xfrm>
-            <a:off x="1188720" y="2980944"/>
-            <a:ext cx="7498080" cy="292608"/>
-          </a:xfrm>
-          <a:prstGeom prst="rect">
-            <a:avLst/>
-          </a:prstGeom>
-          <a:noFill/>
-          <a:ln/>
-        </p:spPr>
-        <p:txBody>
-          <a:bodyPr wrap="square" lIns="0" tIns="0" rIns="0" bIns="0" rtlCol="0" anchor="ctr"/>
-          <a:lstStyle/>
-          <a:p>
-            <a:pPr indent="0" marL="0">
-              <a:buNone/>
-            </a:pPr>
-            <a:r>
-              <a:rPr lang="en-US" sz="1100" dirty="0">
-                <a:solidFill>
-                  <a:srgbClr val="6E6E6E"/>
-                </a:solidFill>
-                <a:latin typeface="Pretendard" pitchFamily="34" charset="0"/>
-                <a:ea typeface="Pretendard" pitchFamily="34" charset="-122"/>
-                <a:cs typeface="Pretendard" pitchFamily="34" charset="-120"/>
-              </a:rPr>
-              <a:t>설명 글. 읽기 편한 크기와 줄간격이 우선입니다</a:t>
-            </a:r>
-            <a:endParaRPr lang="en-US" sz="1100" dirty="0"/>
-          </a:p>
-        </p:txBody>
-      </p:sp>
-      <p:sp>
-        <p:nvSpPr>
-          <p:cNvPr id="20" name="Text 18"/>
-          <p:cNvSpPr/>
-          <p:nvPr/>
-        </p:nvSpPr>
-        <p:spPr>
-          <a:xfrm>
-            <a:off x="9357055" y="2761488"/>
-            <a:ext cx="2194560" cy="310896"/>
-          </a:xfrm>
-          <a:prstGeom prst="rect">
-            <a:avLst/>
-          </a:prstGeom>
-          <a:noFill/>
-          <a:ln/>
-        </p:spPr>
-        <p:txBody>
-          <a:bodyPr wrap="square" lIns="0" tIns="0" rIns="0" bIns="0" rtlCol="0" anchor="ctr"/>
-          <a:lstStyle/>
-          <a:p>
-            <a:pPr algn="r" indent="0" marL="0">
-              <a:buNone/>
-            </a:pPr>
-            <a:r>
-              <a:rPr lang="en-US" sz="1050" b="1" spc="120" kern="0" dirty="0">
-                <a:solidFill>
-                  <a:srgbClr val="111111"/>
-                </a:solidFill>
-                <a:latin typeface="Pretendard" pitchFamily="34" charset="0"/>
-                <a:ea typeface="Pretendard" pitchFamily="34" charset="-122"/>
-                <a:cs typeface="Pretendard" pitchFamily="34" charset="-120"/>
-              </a:rPr>
-              <a:t>2단계</a:t>
-            </a:r>
-            <a:endParaRPr lang="en-US" sz="1050" dirty="0"/>
-          </a:p>
-        </p:txBody>
-      </p:sp>
-      <p:sp>
-        <p:nvSpPr>
-          <p:cNvPr id="21" name="Shape 19"/>
-          <p:cNvSpPr/>
-          <p:nvPr/>
-        </p:nvSpPr>
-        <p:spPr>
-          <a:xfrm>
-            <a:off x="640080" y="3547872"/>
-            <a:ext cx="10911535" cy="7315"/>
-          </a:xfrm>
-          <a:prstGeom prst="rect">
-            <a:avLst/>
-          </a:prstGeom>
-          <a:solidFill>
-            <a:srgbClr val="DCDCDC"/>
-          </a:solidFill>
-          <a:ln w="12700">
-            <a:solidFill>
-              <a:srgbClr val="DCDCDC"/>
-            </a:solidFill>
-            <a:prstDash val="solid"/>
-          </a:ln>
-        </p:spPr>
-      </p:sp>
-      <p:sp>
-        <p:nvSpPr>
-          <p:cNvPr id="22" name="Shape 20"/>
-          <p:cNvSpPr/>
-          <p:nvPr/>
-        </p:nvSpPr>
-        <p:spPr>
-          <a:xfrm>
-            <a:off x="640080" y="3712464"/>
-            <a:ext cx="310896" cy="310896"/>
-          </a:xfrm>
-          <a:prstGeom prst="ellipse">
-            <a:avLst/>
-          </a:prstGeom>
-          <a:solidFill>
-            <a:srgbClr val="FFFFFF"/>
-          </a:solidFill>
-          <a:ln w="12700">
-            <a:solidFill>
-              <a:srgbClr val="111111"/>
-            </a:solidFill>
-            <a:prstDash val="solid"/>
-          </a:ln>
-        </p:spPr>
-      </p:sp>
-      <p:sp>
-        <p:nvSpPr>
-          <p:cNvPr id="23" name="Text 21"/>
-          <p:cNvSpPr/>
-          <p:nvPr/>
-        </p:nvSpPr>
-        <p:spPr>
-          <a:xfrm>
-            <a:off x="640080" y="3712464"/>
-            <a:ext cx="310896" cy="310896"/>
-          </a:xfrm>
-          <a:prstGeom prst="rect">
-            <a:avLst/>
-          </a:prstGeom>
-          <a:noFill/>
-          <a:ln/>
-        </p:spPr>
-        <p:txBody>
-          <a:bodyPr wrap="square" lIns="0" tIns="0" rIns="0" bIns="0" rtlCol="0" anchor="ctr"/>
-          <a:lstStyle/>
-          <a:p>
-            <a:pPr algn="ctr" indent="0" marL="0">
-              <a:buNone/>
-            </a:pPr>
-            <a:r>
-              <a:rPr lang="en-US" sz="1000" b="1" dirty="0">
-                <a:solidFill>
-                  <a:srgbClr val="111111"/>
-                </a:solidFill>
-                <a:latin typeface="Pretendard" pitchFamily="34" charset="0"/>
-                <a:ea typeface="Pretendard" pitchFamily="34" charset="-122"/>
-                <a:cs typeface="Pretendard" pitchFamily="34" charset="-120"/>
-              </a:rPr>
-              <a:t>3</a:t>
-            </a:r>
-            <a:endParaRPr lang="en-US" sz="1000" dirty="0"/>
-          </a:p>
-        </p:txBody>
-      </p:sp>
-      <p:sp>
-        <p:nvSpPr>
-          <p:cNvPr id="24" name="Text 22"/>
-          <p:cNvSpPr/>
-          <p:nvPr/>
-        </p:nvSpPr>
-        <p:spPr>
-          <a:xfrm>
-            <a:off x="1188720" y="3621024"/>
-            <a:ext cx="7498080" cy="310896"/>
-          </a:xfrm>
-          <a:prstGeom prst="rect">
-            <a:avLst/>
-          </a:prstGeom>
-          <a:noFill/>
-          <a:ln/>
-        </p:spPr>
-        <p:txBody>
-          <a:bodyPr wrap="square" lIns="0" tIns="0" rIns="0" bIns="0" rtlCol="0" anchor="ctr"/>
-          <a:lstStyle/>
-          <a:p>
-            <a:pPr indent="0" marL="0">
-              <a:buNone/>
-            </a:pPr>
-            <a:r>
-              <a:rPr lang="en-US" sz="1450" dirty="0">
-                <a:solidFill>
-                  <a:srgbClr val="111111"/>
-                </a:solidFill>
-                <a:latin typeface="Pretendard SemiBold" pitchFamily="34" charset="0"/>
-                <a:ea typeface="Pretendard SemiBold" pitchFamily="34" charset="-122"/>
-                <a:cs typeface="Pretendard SemiBold" pitchFamily="34" charset="-120"/>
-              </a:rPr>
-              <a:t>캡션</a:t>
-            </a:r>
-            <a:endParaRPr lang="en-US" sz="1450" dirty="0"/>
-          </a:p>
-        </p:txBody>
-      </p:sp>
-      <p:sp>
-        <p:nvSpPr>
-          <p:cNvPr id="25" name="Text 23"/>
-          <p:cNvSpPr/>
-          <p:nvPr/>
-        </p:nvSpPr>
-        <p:spPr>
-          <a:xfrm>
-            <a:off x="1188720" y="3931920"/>
-            <a:ext cx="7498080" cy="292608"/>
-          </a:xfrm>
-          <a:prstGeom prst="rect">
-            <a:avLst/>
-          </a:prstGeom>
-          <a:noFill/>
-          <a:ln/>
-        </p:spPr>
-        <p:txBody>
-          <a:bodyPr wrap="square" lIns="0" tIns="0" rIns="0" bIns="0" rtlCol="0" anchor="ctr"/>
-          <a:lstStyle/>
-          <a:p>
-            <a:pPr indent="0" marL="0">
-              <a:buNone/>
-            </a:pPr>
-            <a:r>
-              <a:rPr lang="en-US" sz="1100" dirty="0">
-                <a:solidFill>
-                  <a:srgbClr val="6E6E6E"/>
-                </a:solidFill>
-                <a:latin typeface="Pretendard" pitchFamily="34" charset="0"/>
-                <a:ea typeface="Pretendard" pitchFamily="34" charset="-122"/>
-                <a:cs typeface="Pretendard" pitchFamily="34" charset="-120"/>
-              </a:rPr>
-              <a:t>이미지 설명 · 연도 · 역할 표기. 작고 옅게</a:t>
-            </a:r>
-            <a:endParaRPr lang="en-US" sz="1100" dirty="0"/>
-          </a:p>
-        </p:txBody>
-      </p:sp>
-      <p:sp>
-        <p:nvSpPr>
-          <p:cNvPr id="26" name="Text 24"/>
-          <p:cNvSpPr/>
-          <p:nvPr/>
-        </p:nvSpPr>
-        <p:spPr>
-          <a:xfrm>
-            <a:off x="9357055" y="3712464"/>
-            <a:ext cx="2194560" cy="310896"/>
-          </a:xfrm>
-          <a:prstGeom prst="rect">
-            <a:avLst/>
-          </a:prstGeom>
-          <a:noFill/>
-          <a:ln/>
-        </p:spPr>
-        <p:txBody>
-          <a:bodyPr wrap="square" lIns="0" tIns="0" rIns="0" bIns="0" rtlCol="0" anchor="ctr"/>
-          <a:lstStyle/>
-          <a:p>
-            <a:pPr algn="r" indent="0" marL="0">
-              <a:buNone/>
-            </a:pPr>
-            <a:r>
-              <a:rPr lang="en-US" sz="1050" b="1" spc="120" kern="0" dirty="0">
-                <a:solidFill>
-                  <a:srgbClr val="111111"/>
-                </a:solidFill>
-                <a:latin typeface="Pretendard" pitchFamily="34" charset="0"/>
-                <a:ea typeface="Pretendard" pitchFamily="34" charset="-122"/>
-                <a:cs typeface="Pretendard" pitchFamily="34" charset="-120"/>
-              </a:rPr>
-              <a:t>3단계</a:t>
-            </a:r>
-            <a:endParaRPr lang="en-US" sz="1050" dirty="0"/>
-          </a:p>
-        </p:txBody>
-      </p:sp>
-      <p:sp>
-        <p:nvSpPr>
-          <p:cNvPr id="27" name="Shape 25"/>
-          <p:cNvSpPr/>
-          <p:nvPr/>
-        </p:nvSpPr>
-        <p:spPr>
-          <a:xfrm>
-            <a:off x="640080" y="4498848"/>
-            <a:ext cx="10911535" cy="7315"/>
-          </a:xfrm>
-          <a:prstGeom prst="rect">
-            <a:avLst/>
-          </a:prstGeom>
-          <a:solidFill>
-            <a:srgbClr val="DCDCDC"/>
-          </a:solidFill>
-          <a:ln w="12700">
-            <a:solidFill>
-              <a:srgbClr val="DCDCDC"/>
-            </a:solidFill>
-            <a:prstDash val="solid"/>
-          </a:ln>
-        </p:spPr>
-      </p:sp>
-      <p:sp>
-        <p:nvSpPr>
-          <p:cNvPr id="28" name="Shape 26"/>
-          <p:cNvSpPr/>
-          <p:nvPr/>
-        </p:nvSpPr>
-        <p:spPr>
-          <a:xfrm>
-            <a:off x="640080" y="4663440"/>
-            <a:ext cx="310896" cy="310896"/>
-          </a:xfrm>
-          <a:prstGeom prst="ellipse">
-            <a:avLst/>
-          </a:prstGeom>
-          <a:solidFill>
-            <a:srgbClr val="FFFFFF"/>
-          </a:solidFill>
-          <a:ln w="12700">
-            <a:solidFill>
-              <a:srgbClr val="111111"/>
-            </a:solidFill>
-            <a:prstDash val="solid"/>
-          </a:ln>
-        </p:spPr>
-      </p:sp>
-      <p:sp>
-        <p:nvSpPr>
-          <p:cNvPr id="29" name="Text 27"/>
-          <p:cNvSpPr/>
-          <p:nvPr/>
-        </p:nvSpPr>
-        <p:spPr>
-          <a:xfrm>
-            <a:off x="640080" y="4663440"/>
-            <a:ext cx="310896" cy="310896"/>
-          </a:xfrm>
-          <a:prstGeom prst="rect">
-            <a:avLst/>
-          </a:prstGeom>
-          <a:noFill/>
-          <a:ln/>
-        </p:spPr>
-        <p:txBody>
-          <a:bodyPr wrap="square" lIns="0" tIns="0" rIns="0" bIns="0" rtlCol="0" anchor="ctr"/>
-          <a:lstStyle/>
-          <a:p>
-            <a:pPr algn="ctr" indent="0" marL="0">
-              <a:buNone/>
-            </a:pPr>
-            <a:r>
-              <a:rPr lang="en-US" sz="1000" b="1" dirty="0">
-                <a:solidFill>
-                  <a:srgbClr val="111111"/>
-                </a:solidFill>
-                <a:latin typeface="Pretendard" pitchFamily="34" charset="0"/>
-                <a:ea typeface="Pretendard" pitchFamily="34" charset="-122"/>
-                <a:cs typeface="Pretendard" pitchFamily="34" charset="-120"/>
-              </a:rPr>
-              <a:t>4</a:t>
-            </a:r>
-            <a:endParaRPr lang="en-US" sz="1000" dirty="0"/>
-          </a:p>
-        </p:txBody>
-      </p:sp>
-      <p:sp>
-        <p:nvSpPr>
-          <p:cNvPr id="30" name="Text 28"/>
-          <p:cNvSpPr/>
-          <p:nvPr/>
-        </p:nvSpPr>
-        <p:spPr>
-          <a:xfrm>
-            <a:off x="1188720" y="4572000"/>
-            <a:ext cx="9875520" cy="310896"/>
-          </a:xfrm>
-          <a:prstGeom prst="rect">
-            <a:avLst/>
-          </a:prstGeom>
-          <a:noFill/>
-          <a:ln/>
-        </p:spPr>
-        <p:txBody>
-          <a:bodyPr wrap="square" lIns="0" tIns="0" rIns="0" bIns="0" rtlCol="0" anchor="ctr"/>
-          <a:lstStyle/>
-          <a:p>
-            <a:pPr indent="0" marL="0">
-              <a:buNone/>
-            </a:pPr>
-            <a:r>
-              <a:rPr lang="en-US" sz="1450" dirty="0">
-                <a:solidFill>
-                  <a:srgbClr val="111111"/>
-                </a:solidFill>
-                <a:latin typeface="Pretendard SemiBold" pitchFamily="34" charset="0"/>
-                <a:ea typeface="Pretendard SemiBold" pitchFamily="34" charset="-122"/>
-                <a:cs typeface="Pretendard SemiBold" pitchFamily="34" charset="-120"/>
-              </a:rPr>
-              <a:t>서체는 한 벌, 많아야 두 벌</a:t>
-            </a:r>
-            <a:endParaRPr lang="en-US" sz="1450" dirty="0"/>
-          </a:p>
-        </p:txBody>
-      </p:sp>
-      <p:sp>
-        <p:nvSpPr>
-          <p:cNvPr id="31" name="Text 29"/>
-          <p:cNvSpPr/>
-          <p:nvPr/>
-        </p:nvSpPr>
-        <p:spPr>
-          <a:xfrm>
-            <a:off x="1188720" y="4882896"/>
-            <a:ext cx="9875520" cy="292608"/>
-          </a:xfrm>
-          <a:prstGeom prst="rect">
-            <a:avLst/>
-          </a:prstGeom>
-          <a:noFill/>
-          <a:ln/>
-        </p:spPr>
-        <p:txBody>
-          <a:bodyPr wrap="square" lIns="0" tIns="0" rIns="0" bIns="0" rtlCol="0" anchor="ctr"/>
-          <a:lstStyle/>
-          <a:p>
-            <a:pPr indent="0" marL="0">
-              <a:buNone/>
-            </a:pPr>
-            <a:r>
-              <a:rPr lang="en-US" sz="1100" dirty="0">
-                <a:solidFill>
-                  <a:srgbClr val="6E6E6E"/>
-                </a:solidFill>
-                <a:latin typeface="Pretendard" pitchFamily="34" charset="0"/>
-                <a:ea typeface="Pretendard" pitchFamily="34" charset="-122"/>
-                <a:cs typeface="Pretendard" pitchFamily="34" charset="-120"/>
-              </a:rPr>
-              <a:t>한글 서체 하나로 굵기 차이만 써도 충분합니다. 두 벌을 쓴다면 제목용과 본문용으로 역할을 나눕니다</a:t>
-            </a:r>
-            <a:endParaRPr lang="en-US" sz="1100" dirty="0"/>
-          </a:p>
-        </p:txBody>
-      </p:sp>
-      <p:sp>
-        <p:nvSpPr>
-          <p:cNvPr id="32" name="Shape 30"/>
-          <p:cNvSpPr/>
-          <p:nvPr/>
-        </p:nvSpPr>
-        <p:spPr>
-          <a:xfrm>
-            <a:off x="640080" y="5522976"/>
-            <a:ext cx="10911535" cy="7315"/>
-          </a:xfrm>
-          <a:prstGeom prst="rect">
-            <a:avLst/>
-          </a:prstGeom>
-          <a:solidFill>
-            <a:srgbClr val="111111"/>
-          </a:solidFill>
-          <a:ln w="12700">
-            <a:solidFill>
-              <a:srgbClr val="111111"/>
-            </a:solidFill>
-            <a:prstDash val="solid"/>
-          </a:ln>
-        </p:spPr>
-      </p:sp>
-      <p:sp>
-        <p:nvSpPr>
-          <p:cNvPr id="33" name="Text 31"/>
-          <p:cNvSpPr/>
-          <p:nvPr/>
-        </p:nvSpPr>
-        <p:spPr>
-          <a:xfrm>
-            <a:off x="640080" y="5632704"/>
-            <a:ext cx="10911535" cy="402336"/>
-          </a:xfrm>
-          <a:prstGeom prst="rect">
-            <a:avLst/>
-          </a:prstGeom>
-          <a:noFill/>
-          <a:ln/>
-        </p:spPr>
-        <p:txBody>
-          <a:bodyPr wrap="square" lIns="0" tIns="0" rIns="0" bIns="0" rtlCol="0" anchor="t"/>
-          <a:lstStyle/>
-          <a:p>
-            <a:pPr indent="0" marL="0">
-              <a:lnSpc>
-                <a:spcPct val="120000"/>
-              </a:lnSpc>
-              <a:buNone/>
-            </a:pPr>
-            <a:r>
-              <a:rPr lang="en-US" sz="1250" b="1" dirty="0">
-                <a:solidFill>
-                  <a:srgbClr val="111111"/>
-                </a:solidFill>
-                <a:latin typeface="Pretendard" pitchFamily="34" charset="0"/>
-                <a:ea typeface="Pretendard" pitchFamily="34" charset="-122"/>
-                <a:cs typeface="Pretendard" pitchFamily="34" charset="-120"/>
-              </a:rPr>
-              <a:t>세 단계의 크기 차이는 확실하게 두세요. 애매하면 위계가 없는 것과 같습니다.</a:t>
-            </a:r>
-            <a:endParaRPr lang="en-US" sz="1250" dirty="0"/>
-          </a:p>
-        </p:txBody>
-      </p:sp>
-      <p:sp>
-        <p:nvSpPr>
-          <p:cNvPr id="34" name="Shape 32"/>
-          <p:cNvSpPr/>
-          <p:nvPr/>
-        </p:nvSpPr>
-        <p:spPr>
-          <a:xfrm>
-            <a:off x="640080" y="6291072"/>
-            <a:ext cx="10911535" cy="7315"/>
-          </a:xfrm>
-          <a:prstGeom prst="rect">
-            <a:avLst/>
-          </a:prstGeom>
-          <a:solidFill>
-            <a:srgbClr val="DCDCDC"/>
-          </a:solidFill>
-          <a:ln w="12700">
-            <a:solidFill>
-              <a:srgbClr val="DCDCDC"/>
-            </a:solidFill>
-            <a:prstDash val="solid"/>
-          </a:ln>
-        </p:spPr>
-      </p:sp>
-      <p:sp>
-        <p:nvSpPr>
-          <p:cNvPr id="35" name="Text 33"/>
+          <p:cNvPr id="27" name="Text 25"/>
           <p:cNvSpPr/>
           <p:nvPr/>
         </p:nvSpPr>
@@ -7475,7 +6716,7 @@
       </p:sp>
       <p:sp>
         <p:nvSpPr>
-          <p:cNvPr id="36" name="Text 34"/>
+          <p:cNvPr id="28" name="Text 26"/>
           <p:cNvSpPr/>
           <p:nvPr/>
         </p:nvSpPr>
@@ -7507,472 +6748,6 @@
                 <a:cs typeface="Pretendard" pitchFamily="34" charset="-120"/>
               </a:rPr>
               <a:t>P.03</a:t>
-            </a:r>
-            <a:endParaRPr lang="en-US" sz="850" dirty="0"/>
-          </a:p>
-        </p:txBody>
-      </p:sp>
-    </p:spTree>
-  </p:cSld>
-  <p:clrMapOvr>
-    <a:masterClrMapping/>
-  </p:clrMapOvr>
-</p:sld>
-</file>
-
-<file path=ppt/slides/slide7.xml><?xml version="1.0" encoding="utf-8"?>
-<p:sld xmlns:a="http://schemas.openxmlformats.org/drawingml/2006/main" xmlns:r="http://schemas.openxmlformats.org/officeDocument/2006/relationships" xmlns:p="http://schemas.openxmlformats.org/presentationml/2006/main">
-  <p:cSld name="Slide 7">
-    <p:bg>
-      <p:bgPr>
-        <a:solidFill>
-          <a:srgbClr val="111111"/>
-        </a:solidFill>
-      </p:bgPr>
-    </p:bg>
-    <p:spTree>
-      <p:nvGrpSpPr>
-        <p:cNvPr id="1" name=""/>
-        <p:cNvGrpSpPr/>
-        <p:nvPr/>
-      </p:nvGrpSpPr>
-      <p:grpSpPr>
-        <a:xfrm>
-          <a:off x="0" y="0"/>
-          <a:ext cx="0" cy="0"/>
-          <a:chOff x="0" y="0"/>
-          <a:chExt cx="0" cy="0"/>
-        </a:xfrm>
-      </p:grpSpPr>
-      <p:sp>
-        <p:nvSpPr>
-          <p:cNvPr id="2" name="Text 0"/>
-          <p:cNvSpPr/>
-          <p:nvPr/>
-        </p:nvSpPr>
-        <p:spPr>
-          <a:xfrm>
-            <a:off x="640080" y="274320"/>
-            <a:ext cx="3657600" cy="219456"/>
-          </a:xfrm>
-          <a:prstGeom prst="rect">
-            <a:avLst/>
-          </a:prstGeom>
-          <a:noFill/>
-          <a:ln/>
-        </p:spPr>
-        <p:txBody>
-          <a:bodyPr wrap="square" lIns="0" tIns="0" rIns="0" bIns="0" rtlCol="0" anchor="ctr"/>
-          <a:lstStyle/>
-          <a:p>
-            <a:pPr indent="0" marL="0">
-              <a:buNone/>
-            </a:pPr>
-            <a:r>
-              <a:rPr lang="en-US" sz="900" spc="120" kern="0" dirty="0">
-                <a:solidFill>
-                  <a:srgbClr val="9A9A9A"/>
-                </a:solidFill>
-                <a:latin typeface="Pretendard" pitchFamily="34" charset="0"/>
-                <a:ea typeface="Pretendard" pitchFamily="34" charset="-122"/>
-                <a:cs typeface="Pretendard" pitchFamily="34" charset="-120"/>
-              </a:rPr>
-              <a:t>포트폴리오제작</a:t>
-            </a:r>
-            <a:endParaRPr lang="en-US" sz="900" dirty="0"/>
-          </a:p>
-        </p:txBody>
-      </p:sp>
-      <p:sp>
-        <p:nvSpPr>
-          <p:cNvPr id="3" name="Text 1"/>
-          <p:cNvSpPr/>
-          <p:nvPr/>
-        </p:nvSpPr>
-        <p:spPr>
-          <a:xfrm>
-            <a:off x="4480560" y="274320"/>
-            <a:ext cx="4572000" cy="219456"/>
-          </a:xfrm>
-          <a:prstGeom prst="rect">
-            <a:avLst/>
-          </a:prstGeom>
-          <a:noFill/>
-          <a:ln/>
-        </p:spPr>
-        <p:txBody>
-          <a:bodyPr wrap="square" lIns="0" tIns="0" rIns="0" bIns="0" rtlCol="0" anchor="ctr"/>
-          <a:lstStyle/>
-          <a:p>
-            <a:pPr algn="ctr" indent="0" marL="0">
-              <a:buNone/>
-            </a:pPr>
-            <a:r>
-              <a:rPr lang="en-US" sz="900" spc="120" kern="0" dirty="0">
-                <a:solidFill>
-                  <a:srgbClr val="9A9A9A"/>
-                </a:solidFill>
-                <a:latin typeface="Pretendard" pitchFamily="34" charset="0"/>
-                <a:ea typeface="Pretendard" pitchFamily="34" charset="-122"/>
-                <a:cs typeface="Pretendard" pitchFamily="34" charset="-120"/>
-              </a:rPr>
-              <a:t>PHASE 2 콘텐츠 구조화와 비주얼 시스템</a:t>
-            </a:r>
-            <a:endParaRPr lang="en-US" sz="900" dirty="0"/>
-          </a:p>
-        </p:txBody>
-      </p:sp>
-      <p:sp>
-        <p:nvSpPr>
-          <p:cNvPr id="4" name="Text 2"/>
-          <p:cNvSpPr/>
-          <p:nvPr/>
-        </p:nvSpPr>
-        <p:spPr>
-          <a:xfrm>
-            <a:off x="8808415" y="274320"/>
-            <a:ext cx="2743200" cy="219456"/>
-          </a:xfrm>
-          <a:prstGeom prst="rect">
-            <a:avLst/>
-          </a:prstGeom>
-          <a:noFill/>
-          <a:ln/>
-        </p:spPr>
-        <p:txBody>
-          <a:bodyPr wrap="square" lIns="0" tIns="0" rIns="0" bIns="0" rtlCol="0" anchor="ctr"/>
-          <a:lstStyle/>
-          <a:p>
-            <a:pPr algn="r" indent="0" marL="0">
-              <a:buNone/>
-            </a:pPr>
-            <a:r>
-              <a:rPr lang="en-US" sz="900" spc="200" kern="0" dirty="0">
-                <a:solidFill>
-                  <a:srgbClr val="9A9A9A"/>
-                </a:solidFill>
-                <a:latin typeface="Pretendard" pitchFamily="34" charset="0"/>
-                <a:ea typeface="Pretendard" pitchFamily="34" charset="-122"/>
-                <a:cs typeface="Pretendard" pitchFamily="34" charset="-120"/>
-              </a:rPr>
-              <a:t>WEEK 09</a:t>
-            </a:r>
-            <a:endParaRPr lang="en-US" sz="900" dirty="0"/>
-          </a:p>
-        </p:txBody>
-      </p:sp>
-      <p:sp>
-        <p:nvSpPr>
-          <p:cNvPr id="5" name="Shape 3"/>
-          <p:cNvSpPr/>
-          <p:nvPr/>
-        </p:nvSpPr>
-        <p:spPr>
-          <a:xfrm>
-            <a:off x="640080" y="548640"/>
-            <a:ext cx="10911535" cy="7315"/>
-          </a:xfrm>
-          <a:prstGeom prst="rect">
-            <a:avLst/>
-          </a:prstGeom>
-          <a:solidFill>
-            <a:srgbClr val="333333"/>
-          </a:solidFill>
-          <a:ln w="12700">
-            <a:solidFill>
-              <a:srgbClr val="333333"/>
-            </a:solidFill>
-            <a:prstDash val="solid"/>
-          </a:ln>
-        </p:spPr>
-      </p:sp>
-      <p:sp>
-        <p:nvSpPr>
-          <p:cNvPr id="6" name="Text 4"/>
-          <p:cNvSpPr/>
-          <p:nvPr/>
-        </p:nvSpPr>
-        <p:spPr>
-          <a:xfrm>
-            <a:off x="7345375" y="1737360"/>
-            <a:ext cx="4206240" cy="3291840"/>
-          </a:xfrm>
-          <a:prstGeom prst="rect">
-            <a:avLst/>
-          </a:prstGeom>
-          <a:noFill/>
-          <a:ln/>
-        </p:spPr>
-        <p:txBody>
-          <a:bodyPr wrap="square" lIns="0" tIns="0" rIns="0" bIns="0" rtlCol="0" anchor="ctr"/>
-          <a:lstStyle/>
-          <a:p>
-            <a:pPr algn="r" indent="0" marL="0">
-              <a:buNone/>
-            </a:pPr>
-            <a:r>
-              <a:rPr lang="en-US" sz="20000" dirty="0">
-                <a:solidFill>
-                  <a:srgbClr val="1B1B1B"/>
-                </a:solidFill>
-                <a:latin typeface="Pretendard SemiBold" pitchFamily="34" charset="0"/>
-                <a:ea typeface="Pretendard SemiBold" pitchFamily="34" charset="-122"/>
-                <a:cs typeface="Pretendard SemiBold" pitchFamily="34" charset="-120"/>
-              </a:rPr>
-              <a:t>02</a:t>
-            </a:r>
-            <a:endParaRPr lang="en-US" sz="20000" dirty="0"/>
-          </a:p>
-        </p:txBody>
-      </p:sp>
-      <p:sp>
-        <p:nvSpPr>
-          <p:cNvPr id="7" name="Shape 5"/>
-          <p:cNvSpPr/>
-          <p:nvPr/>
-        </p:nvSpPr>
-        <p:spPr>
-          <a:xfrm>
-            <a:off x="941832" y="1371600"/>
-            <a:ext cx="0" cy="603504"/>
-          </a:xfrm>
-          <a:prstGeom prst="line">
-            <a:avLst/>
-          </a:prstGeom>
-          <a:noFill/>
-          <a:ln w="15875">
-            <a:solidFill>
-              <a:srgbClr val="FFFFFF"/>
-            </a:solidFill>
-            <a:prstDash val="solid"/>
-          </a:ln>
-        </p:spPr>
-      </p:sp>
-      <p:sp>
-        <p:nvSpPr>
-          <p:cNvPr id="8" name="Shape 6"/>
-          <p:cNvSpPr/>
-          <p:nvPr/>
-        </p:nvSpPr>
-        <p:spPr>
-          <a:xfrm>
-            <a:off x="640080" y="1733702"/>
-            <a:ext cx="301752" cy="241402"/>
-          </a:xfrm>
-          <a:prstGeom prst="line">
-            <a:avLst/>
-          </a:prstGeom>
-          <a:noFill/>
-          <a:ln w="15875">
-            <a:solidFill>
-              <a:srgbClr val="FFFFFF"/>
-            </a:solidFill>
-            <a:prstDash val="solid"/>
-          </a:ln>
-        </p:spPr>
-      </p:sp>
-      <p:sp>
-        <p:nvSpPr>
-          <p:cNvPr id="9" name="Shape 7"/>
-          <p:cNvSpPr/>
-          <p:nvPr/>
-        </p:nvSpPr>
-        <p:spPr>
-          <a:xfrm flipV="1">
-            <a:off x="941832" y="1733702"/>
-            <a:ext cx="301752" cy="241402"/>
-          </a:xfrm>
-          <a:prstGeom prst="line">
-            <a:avLst/>
-          </a:prstGeom>
-          <a:noFill/>
-          <a:ln w="15875">
-            <a:solidFill>
-              <a:srgbClr val="FFFFFF"/>
-            </a:solidFill>
-            <a:prstDash val="solid"/>
-          </a:ln>
-        </p:spPr>
-      </p:sp>
-      <p:sp>
-        <p:nvSpPr>
-          <p:cNvPr id="10" name="Text 8"/>
-          <p:cNvSpPr/>
-          <p:nvPr/>
-        </p:nvSpPr>
-        <p:spPr>
-          <a:xfrm>
-            <a:off x="640080" y="2615184"/>
-            <a:ext cx="7863840" cy="256032"/>
-          </a:xfrm>
-          <a:prstGeom prst="rect">
-            <a:avLst/>
-          </a:prstGeom>
-          <a:noFill/>
-          <a:ln/>
-        </p:spPr>
-        <p:txBody>
-          <a:bodyPr wrap="square" lIns="0" tIns="0" rIns="0" bIns="0" rtlCol="0" anchor="ctr"/>
-          <a:lstStyle/>
-          <a:p>
-            <a:pPr indent="0" marL="0">
-              <a:buNone/>
-            </a:pPr>
-            <a:r>
-              <a:rPr lang="en-US" sz="950" spc="280" kern="0" dirty="0">
-                <a:solidFill>
-                  <a:srgbClr val="9A9A9A"/>
-                </a:solidFill>
-                <a:latin typeface="Pretendard" pitchFamily="34" charset="0"/>
-                <a:ea typeface="Pretendard" pitchFamily="34" charset="-122"/>
-                <a:cs typeface="Pretendard" pitchFamily="34" charset="-120"/>
-              </a:rPr>
-              <a:t>PART 02</a:t>
-            </a:r>
-            <a:endParaRPr lang="en-US" sz="950" dirty="0"/>
-          </a:p>
-        </p:txBody>
-      </p:sp>
-      <p:sp>
-        <p:nvSpPr>
-          <p:cNvPr id="11" name="Text 9"/>
-          <p:cNvSpPr/>
-          <p:nvPr/>
-        </p:nvSpPr>
-        <p:spPr>
-          <a:xfrm>
-            <a:off x="640080" y="2889504"/>
-            <a:ext cx="7863840" cy="786384"/>
-          </a:xfrm>
-          <a:prstGeom prst="rect">
-            <a:avLst/>
-          </a:prstGeom>
-          <a:noFill/>
-          <a:ln/>
-        </p:spPr>
-        <p:txBody>
-          <a:bodyPr wrap="square" lIns="0" tIns="0" rIns="0" bIns="0" rtlCol="0" anchor="ctr"/>
-          <a:lstStyle/>
-          <a:p>
-            <a:pPr indent="0" marL="0">
-              <a:buNone/>
-            </a:pPr>
-            <a:r>
-              <a:rPr lang="en-US" sz="4600" dirty="0">
-                <a:solidFill>
-                  <a:srgbClr val="FFFFFF"/>
-                </a:solidFill>
-                <a:latin typeface="Pretendard SemiBold" pitchFamily="34" charset="0"/>
-                <a:ea typeface="Pretendard SemiBold" pitchFamily="34" charset="-122"/>
-                <a:cs typeface="Pretendard SemiBold" pitchFamily="34" charset="-120"/>
-              </a:rPr>
-              <a:t>그리드 시스템</a:t>
-            </a:r>
-            <a:endParaRPr lang="en-US" sz="4600" dirty="0"/>
-          </a:p>
-        </p:txBody>
-      </p:sp>
-      <p:sp>
-        <p:nvSpPr>
-          <p:cNvPr id="12" name="Shape 10"/>
-          <p:cNvSpPr/>
-          <p:nvPr/>
-        </p:nvSpPr>
-        <p:spPr>
-          <a:xfrm>
-            <a:off x="640080" y="3803904"/>
-            <a:ext cx="2194560" cy="7315"/>
-          </a:xfrm>
-          <a:prstGeom prst="rect">
-            <a:avLst/>
-          </a:prstGeom>
-          <a:solidFill>
-            <a:srgbClr val="FFFFFF"/>
-          </a:solidFill>
-          <a:ln w="12700">
-            <a:solidFill>
-              <a:srgbClr val="FFFFFF"/>
-            </a:solidFill>
-            <a:prstDash val="solid"/>
-          </a:ln>
-        </p:spPr>
-      </p:sp>
-      <p:sp>
-        <p:nvSpPr>
-          <p:cNvPr id="13" name="Text 11"/>
-          <p:cNvSpPr/>
-          <p:nvPr/>
-        </p:nvSpPr>
-        <p:spPr>
-          <a:xfrm>
-            <a:off x="640080" y="4005072"/>
-            <a:ext cx="6949440" cy="731520"/>
-          </a:xfrm>
-          <a:prstGeom prst="rect">
-            <a:avLst/>
-          </a:prstGeom>
-          <a:noFill/>
-          <a:ln/>
-        </p:spPr>
-        <p:txBody>
-          <a:bodyPr wrap="square" lIns="0" tIns="0" rIns="0" bIns="0" rtlCol="0" anchor="t"/>
-          <a:lstStyle/>
-          <a:p>
-            <a:pPr indent="0" marL="0">
-              <a:lnSpc>
-                <a:spcPct val="134000"/>
-              </a:lnSpc>
-              <a:buNone/>
-            </a:pPr>
-            <a:r>
-              <a:rPr lang="en-US" sz="1350" dirty="0">
-                <a:solidFill>
-                  <a:srgbClr val="B8B8B8"/>
-                </a:solidFill>
-                <a:latin typeface="Pretendard Light" pitchFamily="34" charset="0"/>
-                <a:ea typeface="Pretendard Light" pitchFamily="34" charset="-122"/>
-                <a:cs typeface="Pretendard Light" pitchFamily="34" charset="-120"/>
-              </a:rPr>
-              <a:t>정렬을 매번 눈으로 맞추지 않기 위한 장치입니다.</a:t>
-            </a:r>
-            <a:endParaRPr lang="en-US" sz="1350" dirty="0"/>
-          </a:p>
-        </p:txBody>
-      </p:sp>
-      <p:sp>
-        <p:nvSpPr>
-          <p:cNvPr id="14" name="Text 12"/>
-          <p:cNvSpPr/>
-          <p:nvPr/>
-        </p:nvSpPr>
-        <p:spPr>
-          <a:xfrm rot="16200000">
-            <a:off x="10436047" y="3291840"/>
-            <a:ext cx="2743200" cy="274320"/>
-          </a:xfrm>
-          <a:prstGeom prst="rect">
-            <a:avLst/>
-          </a:prstGeom>
-          <a:noFill/>
-          <a:ln/>
-        </p:spPr>
-        <p:txBody>
-          <a:bodyPr wrap="square" lIns="0" tIns="0" rIns="0" bIns="0" rtlCol="0" anchor="ctr"/>
-          <a:lstStyle/>
-          <a:p>
-            <a:pPr algn="ctr" indent="0" marL="0">
-              <a:buNone/>
-            </a:pPr>
-            <a:r>
-              <a:rPr lang="en-US" sz="850" spc="260" kern="0" dirty="0">
-                <a:solidFill>
-                  <a:srgbClr val="7A7A7A"/>
-                </a:solidFill>
-                <a:latin typeface="Pretendard" pitchFamily="34" charset="0"/>
-                <a:ea typeface="Pretendard" pitchFamily="34" charset="-122"/>
-                <a:cs typeface="Pretendard" pitchFamily="34" charset="-120"/>
-              </a:rPr>
-              <a:t>SECTION 02</a:t>
             </a:r>
             <a:endParaRPr lang="en-US" sz="850" dirty="0"/>
           </a:p>
@@ -8185,7 +6960,7 @@
                 <a:ea typeface="Pretendard" pitchFamily="34" charset="-122"/>
                 <a:cs typeface="Pretendard" pitchFamily="34" charset="-120"/>
               </a:rPr>
-              <a:t>GRID</a:t>
+              <a:t>WORKSHOP</a:t>
             </a:r>
             <a:endParaRPr lang="en-US" sz="950" dirty="0"/>
           </a:p>
@@ -8224,7 +6999,7 @@
                 <a:ea typeface="Pretendard SemiBold" pitchFamily="34" charset="-122"/>
                 <a:cs typeface="Pretendard SemiBold" pitchFamily="34" charset="-120"/>
               </a:rPr>
-              <a:t>그리드에서 정할 것 셋</a:t>
+              <a:t>실습 · 무드보드와 그리드</a:t>
             </a:r>
             <a:endParaRPr lang="en-US" sz="3000" dirty="0"/>
           </a:p>
@@ -8263,7 +7038,7 @@
                 <a:ea typeface="Pretendard" pitchFamily="34" charset="-122"/>
                 <a:cs typeface="Pretendard" pitchFamily="34" charset="-120"/>
               </a:rPr>
-              <a:t>한 번 정하면 모든 페이지에 그대로 씁니다.</a:t>
+              <a:t>개인 작업 — 두 개를 이어서 만듭니다.</a:t>
             </a:r>
             <a:endParaRPr lang="en-US" sz="1150" dirty="0"/>
           </a:p>
@@ -8277,8 +7052,8 @@
         </p:nvSpPr>
         <p:spPr>
           <a:xfrm>
-            <a:off x="640080" y="1737360"/>
-            <a:ext cx="3393338" cy="3035808"/>
+            <a:off x="640080" y="1719072"/>
+            <a:ext cx="10911535" cy="822960"/>
           </a:xfrm>
           <a:prstGeom prst="rect">
             <a:avLst/>
@@ -8296,97 +7071,30 @@
       </p:sp>
       <p:sp>
         <p:nvSpPr>
-          <p:cNvPr id="10" name="Shape 8"/>
-          <p:cNvSpPr/>
-          <p:nvPr/>
-        </p:nvSpPr>
-        <p:spPr>
-          <a:xfrm>
-            <a:off x="1024128" y="2011680"/>
-            <a:ext cx="365760" cy="365760"/>
-          </a:xfrm>
-          <a:prstGeom prst="ellipse">
-            <a:avLst/>
-          </a:prstGeom>
-          <a:solidFill>
-            <a:srgbClr val="FFFFFF"/>
-          </a:solidFill>
-          <a:ln w="12700">
-            <a:solidFill>
-              <a:srgbClr val="111111"/>
-            </a:solidFill>
-            <a:prstDash val="solid"/>
-          </a:ln>
-        </p:spPr>
-      </p:sp>
-      <p:sp>
-        <p:nvSpPr>
-          <p:cNvPr id="11" name="Text 9"/>
-          <p:cNvSpPr/>
-          <p:nvPr/>
-        </p:nvSpPr>
-        <p:spPr>
-          <a:xfrm>
-            <a:off x="1024128" y="2011680"/>
-            <a:ext cx="365760" cy="365760"/>
-          </a:xfrm>
-          <a:prstGeom prst="rect">
-            <a:avLst/>
-          </a:prstGeom>
-          <a:noFill/>
-          <a:ln/>
-        </p:spPr>
-        <p:txBody>
-          <a:bodyPr wrap="square" lIns="0" tIns="0" rIns="0" bIns="0" rtlCol="0" anchor="ctr"/>
-          <a:lstStyle/>
-          <a:p>
-            <a:pPr algn="ctr" indent="0" marL="0">
-              <a:buNone/>
-            </a:pPr>
-            <a:r>
-              <a:rPr lang="en-US" sz="1150" b="1" dirty="0">
-                <a:solidFill>
-                  <a:srgbClr val="111111"/>
-                </a:solidFill>
-                <a:latin typeface="Pretendard" pitchFamily="34" charset="0"/>
-                <a:ea typeface="Pretendard" pitchFamily="34" charset="-122"/>
-                <a:cs typeface="Pretendard" pitchFamily="34" charset="-120"/>
-              </a:rPr>
-              <a:t>01</a:t>
-            </a:r>
-            <a:endParaRPr lang="en-US" sz="1150" dirty="0"/>
-          </a:p>
-        </p:txBody>
-      </p:sp>
-      <p:sp>
-        <p:nvSpPr>
-          <p:cNvPr id="12" name="Text 10"/>
-          <p:cNvSpPr/>
-          <p:nvPr/>
-        </p:nvSpPr>
-        <p:spPr>
-          <a:xfrm>
-            <a:off x="1024128" y="2505456"/>
-            <a:ext cx="2625242" cy="457200"/>
-          </a:xfrm>
-          <a:prstGeom prst="rect">
-            <a:avLst/>
-          </a:prstGeom>
-          <a:noFill/>
-          <a:ln/>
-        </p:spPr>
-        <p:txBody>
-          <a:bodyPr wrap="square" lIns="0" tIns="0" rIns="0" bIns="0" rtlCol="0" anchor="t"/>
+          <p:cNvPr id="10" name="Text 8"/>
+          <p:cNvSpPr/>
+          <p:nvPr/>
+        </p:nvSpPr>
+        <p:spPr>
+          <a:xfrm>
+            <a:off x="1097280" y="1810512"/>
+            <a:ext cx="3291840" cy="640080"/>
+          </a:xfrm>
+          <a:prstGeom prst="rect">
+            <a:avLst/>
+          </a:prstGeom>
+          <a:noFill/>
+          <a:ln/>
+        </p:spPr>
+        <p:txBody>
+          <a:bodyPr wrap="square" lIns="0" tIns="0" rIns="0" bIns="0" rtlCol="0" anchor="ctr"/>
           <a:lstStyle/>
           <a:p>
             <a:pPr indent="0" marL="0">
-              <a:lnSpc>
-                <a:spcPct val="114000"/>
-              </a:lnSpc>
-              <a:buNone/>
-            </a:pPr>
-            <a:r>
-              <a:rPr lang="en-US" sz="1700" dirty="0">
+              <a:buNone/>
+            </a:pPr>
+            <a:r>
+              <a:rPr lang="en-US" sz="1450" dirty="0">
                 <a:solidFill>
                   <a:srgbClr val="111111"/>
                 </a:solidFill>
@@ -8394,36 +7102,36 @@
                 <a:ea typeface="Pretendard SemiBold" pitchFamily="34" charset="-122"/>
                 <a:cs typeface="Pretendard SemiBold" pitchFamily="34" charset="-120"/>
               </a:rPr>
-              <a:t>마진</a:t>
-            </a:r>
-            <a:endParaRPr lang="en-US" sz="1700" dirty="0"/>
-          </a:p>
-        </p:txBody>
-      </p:sp>
-      <p:sp>
-        <p:nvSpPr>
-          <p:cNvPr id="13" name="Text 11"/>
-          <p:cNvSpPr/>
-          <p:nvPr/>
-        </p:nvSpPr>
-        <p:spPr>
-          <a:xfrm>
-            <a:off x="1024128" y="2999232"/>
-            <a:ext cx="2625242" cy="1645920"/>
-          </a:xfrm>
-          <a:prstGeom prst="rect">
-            <a:avLst/>
-          </a:prstGeom>
-          <a:noFill/>
-          <a:ln/>
-        </p:spPr>
-        <p:txBody>
-          <a:bodyPr wrap="square" lIns="0" tIns="0" rIns="0" bIns="0" rtlCol="0" anchor="t"/>
+              <a:t>톤 한 단어</a:t>
+            </a:r>
+            <a:endParaRPr lang="en-US" sz="1450" dirty="0"/>
+          </a:p>
+        </p:txBody>
+      </p:sp>
+      <p:sp>
+        <p:nvSpPr>
+          <p:cNvPr id="11" name="Text 9"/>
+          <p:cNvSpPr/>
+          <p:nvPr/>
+        </p:nvSpPr>
+        <p:spPr>
+          <a:xfrm>
+            <a:off x="4480560" y="1810512"/>
+            <a:ext cx="6705295" cy="640080"/>
+          </a:xfrm>
+          <a:prstGeom prst="rect">
+            <a:avLst/>
+          </a:prstGeom>
+          <a:noFill/>
+          <a:ln/>
+        </p:spPr>
+        <p:txBody>
+          <a:bodyPr wrap="square" lIns="0" tIns="0" rIns="0" bIns="0" rtlCol="0" anchor="ctr"/>
           <a:lstStyle/>
           <a:p>
             <a:pPr indent="0" marL="0">
               <a:lnSpc>
-                <a:spcPct val="130000"/>
+                <a:spcPct val="124000"/>
               </a:lnSpc>
               <a:buNone/>
             </a:pPr>
@@ -8436,7 +7144,7 @@
                 <a:ea typeface="Pretendard" pitchFamily="34" charset="-122"/>
                 <a:cs typeface="Pretendard" pitchFamily="34" charset="-120"/>
               </a:rPr>
-              <a:t>지면 가장자리 여백. 상하좌우를 정하고 예외를 두지 않습니다. 전면 이미지만 예외로 허용합니다.</a:t>
+              <a:t>가져온 레퍼런스 20장을 늘어놓고 반복되는 인상을 한 단어로 뽑습니다.</a:t>
             </a:r>
             <a:endParaRPr lang="en-US" sz="1150" dirty="0"/>
           </a:p>
@@ -8444,14 +7152,14 @@
       </p:sp>
       <p:sp>
         <p:nvSpPr>
-          <p:cNvPr id="14" name="Shape 12"/>
-          <p:cNvSpPr/>
-          <p:nvPr/>
-        </p:nvSpPr>
-        <p:spPr>
-          <a:xfrm>
-            <a:off x="4399178" y="1737360"/>
-            <a:ext cx="3393338" cy="3035808"/>
+          <p:cNvPr id="12" name="Shape 10"/>
+          <p:cNvSpPr/>
+          <p:nvPr/>
+        </p:nvSpPr>
+        <p:spPr>
+          <a:xfrm>
+            <a:off x="640080" y="2688336"/>
+            <a:ext cx="10911535" cy="822960"/>
           </a:xfrm>
           <a:prstGeom prst="rect">
             <a:avLst/>
@@ -8469,97 +7177,30 @@
       </p:sp>
       <p:sp>
         <p:nvSpPr>
-          <p:cNvPr id="15" name="Shape 13"/>
-          <p:cNvSpPr/>
-          <p:nvPr/>
-        </p:nvSpPr>
-        <p:spPr>
-          <a:xfrm>
-            <a:off x="4783226" y="2011680"/>
-            <a:ext cx="365760" cy="365760"/>
-          </a:xfrm>
-          <a:prstGeom prst="ellipse">
-            <a:avLst/>
-          </a:prstGeom>
-          <a:solidFill>
-            <a:srgbClr val="FFFFFF"/>
-          </a:solidFill>
-          <a:ln w="12700">
-            <a:solidFill>
-              <a:srgbClr val="111111"/>
-            </a:solidFill>
-            <a:prstDash val="solid"/>
-          </a:ln>
-        </p:spPr>
-      </p:sp>
-      <p:sp>
-        <p:nvSpPr>
-          <p:cNvPr id="16" name="Text 14"/>
-          <p:cNvSpPr/>
-          <p:nvPr/>
-        </p:nvSpPr>
-        <p:spPr>
-          <a:xfrm>
-            <a:off x="4783226" y="2011680"/>
-            <a:ext cx="365760" cy="365760"/>
-          </a:xfrm>
-          <a:prstGeom prst="rect">
-            <a:avLst/>
-          </a:prstGeom>
-          <a:noFill/>
-          <a:ln/>
-        </p:spPr>
-        <p:txBody>
-          <a:bodyPr wrap="square" lIns="0" tIns="0" rIns="0" bIns="0" rtlCol="0" anchor="ctr"/>
-          <a:lstStyle/>
-          <a:p>
-            <a:pPr algn="ctr" indent="0" marL="0">
-              <a:buNone/>
-            </a:pPr>
-            <a:r>
-              <a:rPr lang="en-US" sz="1150" b="1" dirty="0">
-                <a:solidFill>
-                  <a:srgbClr val="111111"/>
-                </a:solidFill>
-                <a:latin typeface="Pretendard" pitchFamily="34" charset="0"/>
-                <a:ea typeface="Pretendard" pitchFamily="34" charset="-122"/>
-                <a:cs typeface="Pretendard" pitchFamily="34" charset="-120"/>
-              </a:rPr>
-              <a:t>02</a:t>
-            </a:r>
-            <a:endParaRPr lang="en-US" sz="1150" dirty="0"/>
-          </a:p>
-        </p:txBody>
-      </p:sp>
-      <p:sp>
-        <p:nvSpPr>
-          <p:cNvPr id="17" name="Text 15"/>
-          <p:cNvSpPr/>
-          <p:nvPr/>
-        </p:nvSpPr>
-        <p:spPr>
-          <a:xfrm>
-            <a:off x="4783226" y="2505456"/>
-            <a:ext cx="2625242" cy="457200"/>
-          </a:xfrm>
-          <a:prstGeom prst="rect">
-            <a:avLst/>
-          </a:prstGeom>
-          <a:noFill/>
-          <a:ln/>
-        </p:spPr>
-        <p:txBody>
-          <a:bodyPr wrap="square" lIns="0" tIns="0" rIns="0" bIns="0" rtlCol="0" anchor="t"/>
+          <p:cNvPr id="13" name="Text 11"/>
+          <p:cNvSpPr/>
+          <p:nvPr/>
+        </p:nvSpPr>
+        <p:spPr>
+          <a:xfrm>
+            <a:off x="1097280" y="2779776"/>
+            <a:ext cx="3291840" cy="640080"/>
+          </a:xfrm>
+          <a:prstGeom prst="rect">
+            <a:avLst/>
+          </a:prstGeom>
+          <a:noFill/>
+          <a:ln/>
+        </p:spPr>
+        <p:txBody>
+          <a:bodyPr wrap="square" lIns="0" tIns="0" rIns="0" bIns="0" rtlCol="0" anchor="ctr"/>
           <a:lstStyle/>
           <a:p>
             <a:pPr indent="0" marL="0">
-              <a:lnSpc>
-                <a:spcPct val="114000"/>
-              </a:lnSpc>
-              <a:buNone/>
-            </a:pPr>
-            <a:r>
-              <a:rPr lang="en-US" sz="1700" dirty="0">
+              <a:buNone/>
+            </a:pPr>
+            <a:r>
+              <a:rPr lang="en-US" sz="1450" dirty="0">
                 <a:solidFill>
                   <a:srgbClr val="111111"/>
                 </a:solidFill>
@@ -8567,36 +7208,36 @@
                 <a:ea typeface="Pretendard SemiBold" pitchFamily="34" charset="-122"/>
                 <a:cs typeface="Pretendard SemiBold" pitchFamily="34" charset="-120"/>
               </a:rPr>
-              <a:t>칼럼</a:t>
-            </a:r>
-            <a:endParaRPr lang="en-US" sz="1700" dirty="0"/>
-          </a:p>
-        </p:txBody>
-      </p:sp>
-      <p:sp>
-        <p:nvSpPr>
-          <p:cNvPr id="18" name="Text 16"/>
-          <p:cNvSpPr/>
-          <p:nvPr/>
-        </p:nvSpPr>
-        <p:spPr>
-          <a:xfrm>
-            <a:off x="4783226" y="2999232"/>
-            <a:ext cx="2625242" cy="1645920"/>
-          </a:xfrm>
-          <a:prstGeom prst="rect">
-            <a:avLst/>
-          </a:prstGeom>
-          <a:noFill/>
-          <a:ln/>
-        </p:spPr>
-        <p:txBody>
-          <a:bodyPr wrap="square" lIns="0" tIns="0" rIns="0" bIns="0" rtlCol="0" anchor="t"/>
+              <a:t>무드보드</a:t>
+            </a:r>
+            <a:endParaRPr lang="en-US" sz="1450" dirty="0"/>
+          </a:p>
+        </p:txBody>
+      </p:sp>
+      <p:sp>
+        <p:nvSpPr>
+          <p:cNvPr id="14" name="Text 12"/>
+          <p:cNvSpPr/>
+          <p:nvPr/>
+        </p:nvSpPr>
+        <p:spPr>
+          <a:xfrm>
+            <a:off x="4480560" y="2779776"/>
+            <a:ext cx="6705295" cy="640080"/>
+          </a:xfrm>
+          <a:prstGeom prst="rect">
+            <a:avLst/>
+          </a:prstGeom>
+          <a:noFill/>
+          <a:ln/>
+        </p:spPr>
+        <p:txBody>
+          <a:bodyPr wrap="square" lIns="0" tIns="0" rIns="0" bIns="0" rtlCol="0" anchor="ctr"/>
           <a:lstStyle/>
           <a:p>
             <a:pPr indent="0" marL="0">
               <a:lnSpc>
-                <a:spcPct val="130000"/>
+                <a:spcPct val="124000"/>
               </a:lnSpc>
               <a:buNone/>
             </a:pPr>
@@ -8609,7 +7250,7 @@
                 <a:ea typeface="Pretendard" pitchFamily="34" charset="-122"/>
                 <a:cs typeface="Pretendard" pitchFamily="34" charset="-120"/>
               </a:rPr>
-              <a:t>가로 분할. 12칼럼이면 2·3·4·6단으로 나눠 쓸 수 있어 유연합니다. 8칼럼도 무난합니다.</a:t>
+              <a:t>레퍼런스에서 컬러 3개와 서체 후보를 뽑아 한 장으로 정리합니다. 타이포 3단계 크기도 정합니다.</a:t>
             </a:r>
             <a:endParaRPr lang="en-US" sz="1150" dirty="0"/>
           </a:p>
@@ -8617,14 +7258,14 @@
       </p:sp>
       <p:sp>
         <p:nvSpPr>
-          <p:cNvPr id="19" name="Shape 17"/>
-          <p:cNvSpPr/>
-          <p:nvPr/>
-        </p:nvSpPr>
-        <p:spPr>
-          <a:xfrm>
-            <a:off x="8158277" y="1737360"/>
-            <a:ext cx="3393338" cy="3035808"/>
+          <p:cNvPr id="15" name="Shape 13"/>
+          <p:cNvSpPr/>
+          <p:nvPr/>
+        </p:nvSpPr>
+        <p:spPr>
+          <a:xfrm>
+            <a:off x="640080" y="3657600"/>
+            <a:ext cx="10911535" cy="822960"/>
           </a:xfrm>
           <a:prstGeom prst="rect">
             <a:avLst/>
@@ -8642,97 +7283,30 @@
       </p:sp>
       <p:sp>
         <p:nvSpPr>
-          <p:cNvPr id="20" name="Shape 18"/>
-          <p:cNvSpPr/>
-          <p:nvPr/>
-        </p:nvSpPr>
-        <p:spPr>
-          <a:xfrm>
-            <a:off x="8542325" y="2011680"/>
-            <a:ext cx="365760" cy="365760"/>
-          </a:xfrm>
-          <a:prstGeom prst="ellipse">
-            <a:avLst/>
-          </a:prstGeom>
-          <a:solidFill>
-            <a:srgbClr val="FFFFFF"/>
-          </a:solidFill>
-          <a:ln w="12700">
-            <a:solidFill>
-              <a:srgbClr val="111111"/>
-            </a:solidFill>
-            <a:prstDash val="solid"/>
-          </a:ln>
-        </p:spPr>
-      </p:sp>
-      <p:sp>
-        <p:nvSpPr>
-          <p:cNvPr id="21" name="Text 19"/>
-          <p:cNvSpPr/>
-          <p:nvPr/>
-        </p:nvSpPr>
-        <p:spPr>
-          <a:xfrm>
-            <a:off x="8542325" y="2011680"/>
-            <a:ext cx="365760" cy="365760"/>
-          </a:xfrm>
-          <a:prstGeom prst="rect">
-            <a:avLst/>
-          </a:prstGeom>
-          <a:noFill/>
-          <a:ln/>
-        </p:spPr>
-        <p:txBody>
-          <a:bodyPr wrap="square" lIns="0" tIns="0" rIns="0" bIns="0" rtlCol="0" anchor="ctr"/>
-          <a:lstStyle/>
-          <a:p>
-            <a:pPr algn="ctr" indent="0" marL="0">
-              <a:buNone/>
-            </a:pPr>
-            <a:r>
-              <a:rPr lang="en-US" sz="1150" b="1" dirty="0">
-                <a:solidFill>
-                  <a:srgbClr val="111111"/>
-                </a:solidFill>
-                <a:latin typeface="Pretendard" pitchFamily="34" charset="0"/>
-                <a:ea typeface="Pretendard" pitchFamily="34" charset="-122"/>
-                <a:cs typeface="Pretendard" pitchFamily="34" charset="-120"/>
-              </a:rPr>
-              <a:t>03</a:t>
-            </a:r>
-            <a:endParaRPr lang="en-US" sz="1150" dirty="0"/>
-          </a:p>
-        </p:txBody>
-      </p:sp>
-      <p:sp>
-        <p:nvSpPr>
-          <p:cNvPr id="22" name="Text 20"/>
-          <p:cNvSpPr/>
-          <p:nvPr/>
-        </p:nvSpPr>
-        <p:spPr>
-          <a:xfrm>
-            <a:off x="8542325" y="2505456"/>
-            <a:ext cx="2625242" cy="457200"/>
-          </a:xfrm>
-          <a:prstGeom prst="rect">
-            <a:avLst/>
-          </a:prstGeom>
-          <a:noFill/>
-          <a:ln/>
-        </p:spPr>
-        <p:txBody>
-          <a:bodyPr wrap="square" lIns="0" tIns="0" rIns="0" bIns="0" rtlCol="0" anchor="t"/>
+          <p:cNvPr id="16" name="Text 14"/>
+          <p:cNvSpPr/>
+          <p:nvPr/>
+        </p:nvSpPr>
+        <p:spPr>
+          <a:xfrm>
+            <a:off x="1097280" y="3749040"/>
+            <a:ext cx="3291840" cy="640080"/>
+          </a:xfrm>
+          <a:prstGeom prst="rect">
+            <a:avLst/>
+          </a:prstGeom>
+          <a:noFill/>
+          <a:ln/>
+        </p:spPr>
+        <p:txBody>
+          <a:bodyPr wrap="square" lIns="0" tIns="0" rIns="0" bIns="0" rtlCol="0" anchor="ctr"/>
           <a:lstStyle/>
           <a:p>
             <a:pPr indent="0" marL="0">
-              <a:lnSpc>
-                <a:spcPct val="114000"/>
-              </a:lnSpc>
-              <a:buNone/>
-            </a:pPr>
-            <a:r>
-              <a:rPr lang="en-US" sz="1700" dirty="0">
+              <a:buNone/>
+            </a:pPr>
+            <a:r>
+              <a:rPr lang="en-US" sz="1450" dirty="0">
                 <a:solidFill>
                   <a:srgbClr val="111111"/>
                 </a:solidFill>
@@ -8740,36 +7314,36 @@
                 <a:ea typeface="Pretendard SemiBold" pitchFamily="34" charset="-122"/>
                 <a:cs typeface="Pretendard SemiBold" pitchFamily="34" charset="-120"/>
               </a:rPr>
-              <a:t>기준선</a:t>
-            </a:r>
-            <a:endParaRPr lang="en-US" sz="1700" dirty="0"/>
-          </a:p>
-        </p:txBody>
-      </p:sp>
-      <p:sp>
-        <p:nvSpPr>
-          <p:cNvPr id="23" name="Text 21"/>
-          <p:cNvSpPr/>
-          <p:nvPr/>
-        </p:nvSpPr>
-        <p:spPr>
-          <a:xfrm>
-            <a:off x="8542325" y="2999232"/>
-            <a:ext cx="2625242" cy="1645920"/>
-          </a:xfrm>
-          <a:prstGeom prst="rect">
-            <a:avLst/>
-          </a:prstGeom>
-          <a:noFill/>
-          <a:ln/>
-        </p:spPr>
-        <p:txBody>
-          <a:bodyPr wrap="square" lIns="0" tIns="0" rIns="0" bIns="0" rtlCol="0" anchor="t"/>
+              <a:t>그리드 만들기</a:t>
+            </a:r>
+            <a:endParaRPr lang="en-US" sz="1450" dirty="0"/>
+          </a:p>
+        </p:txBody>
+      </p:sp>
+      <p:sp>
+        <p:nvSpPr>
+          <p:cNvPr id="17" name="Text 15"/>
+          <p:cNvSpPr/>
+          <p:nvPr/>
+        </p:nvSpPr>
+        <p:spPr>
+          <a:xfrm>
+            <a:off x="4480560" y="3749040"/>
+            <a:ext cx="6705295" cy="640080"/>
+          </a:xfrm>
+          <a:prstGeom prst="rect">
+            <a:avLst/>
+          </a:prstGeom>
+          <a:noFill/>
+          <a:ln/>
+        </p:spPr>
+        <p:txBody>
+          <a:bodyPr wrap="square" lIns="0" tIns="0" rIns="0" bIns="0" rtlCol="0" anchor="ctr"/>
           <a:lstStyle/>
           <a:p>
             <a:pPr indent="0" marL="0">
               <a:lnSpc>
-                <a:spcPct val="130000"/>
+                <a:spcPct val="124000"/>
               </a:lnSpc>
               <a:buNone/>
             </a:pPr>
@@ -8782,7 +7356,7 @@
                 <a:ea typeface="Pretendard" pitchFamily="34" charset="-122"/>
                 <a:cs typeface="Pretendard" pitchFamily="34" charset="-120"/>
               </a:rPr>
-              <a:t>요소들이 걸리는 가로선. 제목 위치·이미지 상단을 여기 맞추면 페이지가 넘어가도 흔들리지 않습니다.</a:t>
+              <a:t>템플릿에서 마진과 칼럼을 조정합니다. 가로형/세로형 중 포맷을 먼저 정하세요.</a:t>
             </a:r>
             <a:endParaRPr lang="en-US" sz="1150" dirty="0"/>
           </a:p>
@@ -8790,14 +7364,14 @@
       </p:sp>
       <p:sp>
         <p:nvSpPr>
-          <p:cNvPr id="24" name="Shape 22"/>
-          <p:cNvSpPr/>
-          <p:nvPr/>
-        </p:nvSpPr>
-        <p:spPr>
-          <a:xfrm>
-            <a:off x="640080" y="5084064"/>
-            <a:ext cx="10911535" cy="7315"/>
+          <p:cNvPr id="18" name="Shape 16"/>
+          <p:cNvSpPr/>
+          <p:nvPr/>
+        </p:nvSpPr>
+        <p:spPr>
+          <a:xfrm>
+            <a:off x="640080" y="4626864"/>
+            <a:ext cx="10911535" cy="822960"/>
           </a:xfrm>
           <a:prstGeom prst="rect">
             <a:avLst/>
@@ -8815,49 +7389,88 @@
       </p:sp>
       <p:sp>
         <p:nvSpPr>
-          <p:cNvPr id="25" name="Text 23"/>
-          <p:cNvSpPr/>
-          <p:nvPr/>
-        </p:nvSpPr>
-        <p:spPr>
-          <a:xfrm>
-            <a:off x="640080" y="5193792"/>
-            <a:ext cx="10911535" cy="438912"/>
-          </a:xfrm>
-          <a:prstGeom prst="rect">
-            <a:avLst/>
-          </a:prstGeom>
-          <a:noFill/>
-          <a:ln/>
-        </p:spPr>
-        <p:txBody>
-          <a:bodyPr wrap="square" lIns="0" tIns="0" rIns="0" bIns="0" rtlCol="0" anchor="t"/>
+          <p:cNvPr id="19" name="Text 17"/>
+          <p:cNvSpPr/>
+          <p:nvPr/>
+        </p:nvSpPr>
+        <p:spPr>
+          <a:xfrm>
+            <a:off x="1097280" y="4718304"/>
+            <a:ext cx="3291840" cy="640080"/>
+          </a:xfrm>
+          <a:prstGeom prst="rect">
+            <a:avLst/>
+          </a:prstGeom>
+          <a:noFill/>
+          <a:ln/>
+        </p:spPr>
+        <p:txBody>
+          <a:bodyPr wrap="square" lIns="0" tIns="0" rIns="0" bIns="0" rtlCol="0" anchor="ctr"/>
+          <a:lstStyle/>
+          <a:p>
+            <a:pPr indent="0" marL="0">
+              <a:buNone/>
+            </a:pPr>
+            <a:r>
+              <a:rPr lang="en-US" sz="1450" dirty="0">
+                <a:solidFill>
+                  <a:srgbClr val="FFFFFF"/>
+                </a:solidFill>
+                <a:latin typeface="Pretendard SemiBold" pitchFamily="34" charset="0"/>
+                <a:ea typeface="Pretendard SemiBold" pitchFamily="34" charset="-122"/>
+                <a:cs typeface="Pretendard SemiBold" pitchFamily="34" charset="-120"/>
+              </a:rPr>
+              <a:t>적용 테스트</a:t>
+            </a:r>
+            <a:endParaRPr lang="en-US" sz="1450" dirty="0"/>
+          </a:p>
+        </p:txBody>
+      </p:sp>
+      <p:sp>
+        <p:nvSpPr>
+          <p:cNvPr id="20" name="Text 18"/>
+          <p:cNvSpPr/>
+          <p:nvPr/>
+        </p:nvSpPr>
+        <p:spPr>
+          <a:xfrm>
+            <a:off x="4480560" y="4718304"/>
+            <a:ext cx="6705295" cy="640080"/>
+          </a:xfrm>
+          <a:prstGeom prst="rect">
+            <a:avLst/>
+          </a:prstGeom>
+          <a:noFill/>
+          <a:ln/>
+        </p:spPr>
+        <p:txBody>
+          <a:bodyPr wrap="square" lIns="0" tIns="0" rIns="0" bIns="0" rtlCol="0" anchor="ctr"/>
           <a:lstStyle/>
           <a:p>
             <a:pPr indent="0" marL="0">
               <a:lnSpc>
-                <a:spcPct val="120000"/>
+                <a:spcPct val="124000"/>
               </a:lnSpc>
               <a:buNone/>
             </a:pPr>
             <a:r>
-              <a:rPr lang="en-US" sz="1300" b="1" dirty="0">
-                <a:solidFill>
-                  <a:srgbClr val="111111"/>
-                </a:solidFill>
-                <a:latin typeface="Pretendard" pitchFamily="34" charset="0"/>
-                <a:ea typeface="Pretendard" pitchFamily="34" charset="-122"/>
-                <a:cs typeface="Pretendard" pitchFamily="34" charset="-120"/>
-              </a:rPr>
-              <a:t>그리드는 지키기 위한 것이지만, 의도적으로 깨는 페이지 하나쯤은 강조가 됩니다. 다만 의도가 있어야 합니다.</a:t>
-            </a:r>
-            <a:endParaRPr lang="en-US" sz="1300" dirty="0"/>
-          </a:p>
-        </p:txBody>
-      </p:sp>
-      <p:sp>
-        <p:nvSpPr>
-          <p:cNvPr id="26" name="Shape 24"/>
+              <a:rPr lang="en-US" sz="1150" dirty="0">
+                <a:solidFill>
+                  <a:srgbClr val="B8B8B8"/>
+                </a:solidFill>
+                <a:latin typeface="Pretendard" pitchFamily="34" charset="0"/>
+                <a:ea typeface="Pretendard" pitchFamily="34" charset="-122"/>
+                <a:cs typeface="Pretendard" pitchFamily="34" charset="-120"/>
+              </a:rPr>
+              <a:t>만든 그리드에 6주차 리서치 페이지를 얹어 봅니다. 안 맞으면 그리드를 고칩니다.</a:t>
+            </a:r>
+            <a:endParaRPr lang="en-US" sz="1150" dirty="0"/>
+          </a:p>
+        </p:txBody>
+      </p:sp>
+      <p:sp>
+        <p:nvSpPr>
+          <p:cNvPr id="21" name="Shape 19"/>
           <p:cNvSpPr/>
           <p:nvPr/>
         </p:nvSpPr>
@@ -8882,7 +7495,7 @@
       </p:sp>
       <p:sp>
         <p:nvSpPr>
-          <p:cNvPr id="27" name="Text 25"/>
+          <p:cNvPr id="22" name="Text 20"/>
           <p:cNvSpPr/>
           <p:nvPr/>
         </p:nvSpPr>
@@ -8921,7 +7534,7 @@
       </p:sp>
       <p:sp>
         <p:nvSpPr>
-          <p:cNvPr id="28" name="Text 26"/>
+          <p:cNvPr id="23" name="Text 21"/>
           <p:cNvSpPr/>
           <p:nvPr/>
         </p:nvSpPr>
@@ -9165,7 +7778,7 @@
                 <a:ea typeface="Pretendard" pitchFamily="34" charset="-122"/>
                 <a:cs typeface="Pretendard" pitchFamily="34" charset="-120"/>
               </a:rPr>
-              <a:t>WORKSHOP</a:t>
+              <a:t>HOMEWORK</a:t>
             </a:r>
             <a:endParaRPr lang="en-US" sz="950" dirty="0"/>
           </a:p>
@@ -9204,7 +7817,7 @@
                 <a:ea typeface="Pretendard SemiBold" pitchFamily="34" charset="-122"/>
                 <a:cs typeface="Pretendard SemiBold" pitchFamily="34" charset="-120"/>
               </a:rPr>
-              <a:t>실습 · 무드보드와 그리드</a:t>
+              <a:t>과제와 다음 주</a:t>
             </a:r>
             <a:endParaRPr lang="en-US" sz="3000" dirty="0"/>
           </a:p>
@@ -9243,7 +7856,7 @@
                 <a:ea typeface="Pretendard" pitchFamily="34" charset="-122"/>
                 <a:cs typeface="Pretendard" pitchFamily="34" charset="-120"/>
               </a:rPr>
-              <a:t>75분 · 개인 — 두 개를 이어서 만듭니다. 사이에 휴식이 한 번 들어갑니다.</a:t>
+              <a:t>10주차부터 실제 페이지를 만듭니다.</a:t>
             </a:r>
             <a:endParaRPr lang="en-US" sz="1150" dirty="0"/>
           </a:p>
@@ -9258,7 +7871,7 @@
         <p:spPr>
           <a:xfrm>
             <a:off x="640080" y="1719072"/>
-            <a:ext cx="10911535" cy="822960"/>
+            <a:ext cx="6309360" cy="896112"/>
           </a:xfrm>
           <a:prstGeom prst="rect">
             <a:avLst/>
@@ -9276,14 +7889,78 @@
       </p:sp>
       <p:sp>
         <p:nvSpPr>
-          <p:cNvPr id="10" name="Text 8"/>
-          <p:cNvSpPr/>
-          <p:nvPr/>
-        </p:nvSpPr>
-        <p:spPr>
-          <a:xfrm>
-            <a:off x="1097280" y="1810512"/>
-            <a:ext cx="3291840" cy="640080"/>
+          <p:cNvPr id="10" name="Shape 8"/>
+          <p:cNvSpPr/>
+          <p:nvPr/>
+        </p:nvSpPr>
+        <p:spPr>
+          <a:xfrm>
+            <a:off x="969264" y="1993392"/>
+            <a:ext cx="329184" cy="329184"/>
+          </a:xfrm>
+          <a:prstGeom prst="ellipse">
+            <a:avLst/>
+          </a:prstGeom>
+          <a:solidFill>
+            <a:srgbClr val="111111"/>
+          </a:solidFill>
+          <a:ln w="12700">
+            <a:solidFill>
+              <a:srgbClr val="111111"/>
+            </a:solidFill>
+            <a:prstDash val="solid"/>
+          </a:ln>
+        </p:spPr>
+      </p:sp>
+      <p:sp>
+        <p:nvSpPr>
+          <p:cNvPr id="11" name="Text 9"/>
+          <p:cNvSpPr/>
+          <p:nvPr/>
+        </p:nvSpPr>
+        <p:spPr>
+          <a:xfrm>
+            <a:off x="969264" y="1993392"/>
+            <a:ext cx="329184" cy="329184"/>
+          </a:xfrm>
+          <a:prstGeom prst="rect">
+            <a:avLst/>
+          </a:prstGeom>
+          <a:noFill/>
+          <a:ln/>
+        </p:spPr>
+        <p:txBody>
+          <a:bodyPr wrap="square" lIns="0" tIns="0" rIns="0" bIns="0" rtlCol="0" anchor="ctr"/>
+          <a:lstStyle/>
+          <a:p>
+            <a:pPr algn="ctr" indent="0" marL="0">
+              <a:buNone/>
+            </a:pPr>
+            <a:r>
+              <a:rPr lang="en-US" sz="1100" b="1" dirty="0">
+                <a:solidFill>
+                  <a:srgbClr val="FFFFFF"/>
+                </a:solidFill>
+                <a:latin typeface="Pretendard" pitchFamily="34" charset="0"/>
+                <a:ea typeface="Pretendard" pitchFamily="34" charset="-122"/>
+                <a:cs typeface="Pretendard" pitchFamily="34" charset="-120"/>
+              </a:rPr>
+              <a:t>1</a:t>
+            </a:r>
+            <a:endParaRPr lang="en-US" sz="1100" dirty="0"/>
+          </a:p>
+        </p:txBody>
+      </p:sp>
+      <p:sp>
+        <p:nvSpPr>
+          <p:cNvPr id="12" name="Text 10"/>
+          <p:cNvSpPr/>
+          <p:nvPr/>
+        </p:nvSpPr>
+        <p:spPr>
+          <a:xfrm>
+            <a:off x="1426464" y="1810512"/>
+            <a:ext cx="5175504" cy="329184"/>
           </a:xfrm>
           <a:prstGeom prst="rect">
             <a:avLst/>
@@ -9299,7 +7976,7 @@
               <a:buNone/>
             </a:pPr>
             <a:r>
-              <a:rPr lang="en-US" sz="1450" dirty="0">
+              <a:rPr lang="en-US" sz="1400" dirty="0">
                 <a:solidFill>
                   <a:srgbClr val="111111"/>
                 </a:solidFill>
@@ -9307,41 +7984,41 @@
                 <a:ea typeface="Pretendard SemiBold" pitchFamily="34" charset="-122"/>
                 <a:cs typeface="Pretendard SemiBold" pitchFamily="34" charset="-120"/>
               </a:rPr>
-              <a:t>톤 한 단어</a:t>
-            </a:r>
-            <a:endParaRPr lang="en-US" sz="1450" dirty="0"/>
-          </a:p>
-        </p:txBody>
-      </p:sp>
-      <p:sp>
-        <p:nvSpPr>
-          <p:cNvPr id="11" name="Text 9"/>
-          <p:cNvSpPr/>
-          <p:nvPr/>
-        </p:nvSpPr>
-        <p:spPr>
-          <a:xfrm>
-            <a:off x="4480560" y="1810512"/>
-            <a:ext cx="6705295" cy="640080"/>
-          </a:xfrm>
-          <a:prstGeom prst="rect">
-            <a:avLst/>
-          </a:prstGeom>
-          <a:noFill/>
-          <a:ln/>
-        </p:spPr>
-        <p:txBody>
-          <a:bodyPr wrap="square" lIns="0" tIns="0" rIns="0" bIns="0" rtlCol="0" anchor="ctr"/>
+              <a:t>무드보드 · 레이아웃 시스템 제작</a:t>
+            </a:r>
+            <a:endParaRPr lang="en-US" sz="1400" dirty="0"/>
+          </a:p>
+        </p:txBody>
+      </p:sp>
+      <p:sp>
+        <p:nvSpPr>
+          <p:cNvPr id="13" name="Text 11"/>
+          <p:cNvSpPr/>
+          <p:nvPr/>
+        </p:nvSpPr>
+        <p:spPr>
+          <a:xfrm>
+            <a:off x="1426464" y="2121408"/>
+            <a:ext cx="5175504" cy="420624"/>
+          </a:xfrm>
+          <a:prstGeom prst="rect">
+            <a:avLst/>
+          </a:prstGeom>
+          <a:noFill/>
+          <a:ln/>
+        </p:spPr>
+        <p:txBody>
+          <a:bodyPr wrap="square" lIns="0" tIns="0" rIns="0" bIns="0" rtlCol="0" anchor="t"/>
           <a:lstStyle/>
           <a:p>
             <a:pPr indent="0" marL="0">
               <a:lnSpc>
-                <a:spcPct val="124000"/>
+                <a:spcPct val="122000"/>
               </a:lnSpc>
               <a:buNone/>
             </a:pPr>
             <a:r>
-              <a:rPr lang="en-US" sz="1150" dirty="0">
+              <a:rPr lang="en-US" sz="1100" dirty="0">
                 <a:solidFill>
                   <a:srgbClr val="6E6E6E"/>
                 </a:solidFill>
@@ -9349,22 +8026,22 @@
                 <a:ea typeface="Pretendard" pitchFamily="34" charset="-122"/>
                 <a:cs typeface="Pretendard" pitchFamily="34" charset="-120"/>
               </a:rPr>
-              <a:t>가져온 레퍼런스 20장을 늘어놓고 반복되는 인상을 한 단어로 뽑습니다.</a:t>
-            </a:r>
-            <a:endParaRPr lang="en-US" sz="1150" dirty="0"/>
-          </a:p>
-        </p:txBody>
-      </p:sp>
-      <p:sp>
-        <p:nvSpPr>
-          <p:cNvPr id="12" name="Shape 10"/>
-          <p:cNvSpPr/>
-          <p:nvPr/>
-        </p:nvSpPr>
-        <p:spPr>
-          <a:xfrm>
-            <a:off x="640080" y="2688336"/>
-            <a:ext cx="10911535" cy="822960"/>
+              <a:t>컬러 팔레트 · 타이포 스케일 · 그리드 규격을 한 장으로 정리합니다. 이 한 장이 학기 후반의 기준 문서입니다.</a:t>
+            </a:r>
+            <a:endParaRPr lang="en-US" sz="1100" dirty="0"/>
+          </a:p>
+        </p:txBody>
+      </p:sp>
+      <p:sp>
+        <p:nvSpPr>
+          <p:cNvPr id="14" name="Shape 12"/>
+          <p:cNvSpPr/>
+          <p:nvPr/>
+        </p:nvSpPr>
+        <p:spPr>
+          <a:xfrm>
+            <a:off x="640080" y="2743200"/>
+            <a:ext cx="6309360" cy="896112"/>
           </a:xfrm>
           <a:prstGeom prst="rect">
             <a:avLst/>
@@ -9382,203 +8059,16 @@
       </p:sp>
       <p:sp>
         <p:nvSpPr>
-          <p:cNvPr id="13" name="Text 11"/>
-          <p:cNvSpPr/>
-          <p:nvPr/>
-        </p:nvSpPr>
-        <p:spPr>
-          <a:xfrm>
-            <a:off x="1097280" y="2779776"/>
-            <a:ext cx="3291840" cy="640080"/>
-          </a:xfrm>
-          <a:prstGeom prst="rect">
-            <a:avLst/>
-          </a:prstGeom>
-          <a:noFill/>
-          <a:ln/>
-        </p:spPr>
-        <p:txBody>
-          <a:bodyPr wrap="square" lIns="0" tIns="0" rIns="0" bIns="0" rtlCol="0" anchor="ctr"/>
-          <a:lstStyle/>
-          <a:p>
-            <a:pPr indent="0" marL="0">
-              <a:buNone/>
-            </a:pPr>
-            <a:r>
-              <a:rPr lang="en-US" sz="1450" dirty="0">
-                <a:solidFill>
-                  <a:srgbClr val="111111"/>
-                </a:solidFill>
-                <a:latin typeface="Pretendard SemiBold" pitchFamily="34" charset="0"/>
-                <a:ea typeface="Pretendard SemiBold" pitchFamily="34" charset="-122"/>
-                <a:cs typeface="Pretendard SemiBold" pitchFamily="34" charset="-120"/>
-              </a:rPr>
-              <a:t>무드보드</a:t>
-            </a:r>
-            <a:endParaRPr lang="en-US" sz="1450" dirty="0"/>
-          </a:p>
-        </p:txBody>
-      </p:sp>
-      <p:sp>
-        <p:nvSpPr>
-          <p:cNvPr id="14" name="Text 12"/>
-          <p:cNvSpPr/>
-          <p:nvPr/>
-        </p:nvSpPr>
-        <p:spPr>
-          <a:xfrm>
-            <a:off x="4480560" y="2779776"/>
-            <a:ext cx="6705295" cy="640080"/>
-          </a:xfrm>
-          <a:prstGeom prst="rect">
-            <a:avLst/>
-          </a:prstGeom>
-          <a:noFill/>
-          <a:ln/>
-        </p:spPr>
-        <p:txBody>
-          <a:bodyPr wrap="square" lIns="0" tIns="0" rIns="0" bIns="0" rtlCol="0" anchor="ctr"/>
-          <a:lstStyle/>
-          <a:p>
-            <a:pPr indent="0" marL="0">
-              <a:lnSpc>
-                <a:spcPct val="124000"/>
-              </a:lnSpc>
-              <a:buNone/>
-            </a:pPr>
-            <a:r>
-              <a:rPr lang="en-US" sz="1150" dirty="0">
-                <a:solidFill>
-                  <a:srgbClr val="6E6E6E"/>
-                </a:solidFill>
-                <a:latin typeface="Pretendard" pitchFamily="34" charset="0"/>
-                <a:ea typeface="Pretendard" pitchFamily="34" charset="-122"/>
-                <a:cs typeface="Pretendard" pitchFamily="34" charset="-120"/>
-              </a:rPr>
-              <a:t>레퍼런스에서 컬러 3개와 서체 후보를 뽑아 한 장으로 정리합니다. 타이포 3단계 크기도 정합니다.</a:t>
-            </a:r>
-            <a:endParaRPr lang="en-US" sz="1150" dirty="0"/>
-          </a:p>
-        </p:txBody>
-      </p:sp>
-      <p:sp>
-        <p:nvSpPr>
           <p:cNvPr id="15" name="Shape 13"/>
           <p:cNvSpPr/>
           <p:nvPr/>
         </p:nvSpPr>
         <p:spPr>
           <a:xfrm>
-            <a:off x="640080" y="3657600"/>
-            <a:ext cx="10911535" cy="822960"/>
-          </a:xfrm>
-          <a:prstGeom prst="rect">
-            <a:avLst/>
-          </a:prstGeom>
-          <a:solidFill>
-            <a:srgbClr val="FFFFFF"/>
-          </a:solidFill>
-          <a:ln w="12700">
-            <a:solidFill>
-              <a:srgbClr val="DCDCDC"/>
-            </a:solidFill>
-            <a:prstDash val="solid"/>
-          </a:ln>
-        </p:spPr>
-      </p:sp>
-      <p:sp>
-        <p:nvSpPr>
-          <p:cNvPr id="16" name="Text 14"/>
-          <p:cNvSpPr/>
-          <p:nvPr/>
-        </p:nvSpPr>
-        <p:spPr>
-          <a:xfrm>
-            <a:off x="1097280" y="3749040"/>
-            <a:ext cx="3291840" cy="640080"/>
-          </a:xfrm>
-          <a:prstGeom prst="rect">
-            <a:avLst/>
-          </a:prstGeom>
-          <a:noFill/>
-          <a:ln/>
-        </p:spPr>
-        <p:txBody>
-          <a:bodyPr wrap="square" lIns="0" tIns="0" rIns="0" bIns="0" rtlCol="0" anchor="ctr"/>
-          <a:lstStyle/>
-          <a:p>
-            <a:pPr indent="0" marL="0">
-              <a:buNone/>
-            </a:pPr>
-            <a:r>
-              <a:rPr lang="en-US" sz="1450" dirty="0">
-                <a:solidFill>
-                  <a:srgbClr val="111111"/>
-                </a:solidFill>
-                <a:latin typeface="Pretendard SemiBold" pitchFamily="34" charset="0"/>
-                <a:ea typeface="Pretendard SemiBold" pitchFamily="34" charset="-122"/>
-                <a:cs typeface="Pretendard SemiBold" pitchFamily="34" charset="-120"/>
-              </a:rPr>
-              <a:t>그리드 만들기</a:t>
-            </a:r>
-            <a:endParaRPr lang="en-US" sz="1450" dirty="0"/>
-          </a:p>
-        </p:txBody>
-      </p:sp>
-      <p:sp>
-        <p:nvSpPr>
-          <p:cNvPr id="17" name="Text 15"/>
-          <p:cNvSpPr/>
-          <p:nvPr/>
-        </p:nvSpPr>
-        <p:spPr>
-          <a:xfrm>
-            <a:off x="4480560" y="3749040"/>
-            <a:ext cx="6705295" cy="640080"/>
-          </a:xfrm>
-          <a:prstGeom prst="rect">
-            <a:avLst/>
-          </a:prstGeom>
-          <a:noFill/>
-          <a:ln/>
-        </p:spPr>
-        <p:txBody>
-          <a:bodyPr wrap="square" lIns="0" tIns="0" rIns="0" bIns="0" rtlCol="0" anchor="ctr"/>
-          <a:lstStyle/>
-          <a:p>
-            <a:pPr indent="0" marL="0">
-              <a:lnSpc>
-                <a:spcPct val="124000"/>
-              </a:lnSpc>
-              <a:buNone/>
-            </a:pPr>
-            <a:r>
-              <a:rPr lang="en-US" sz="1150" dirty="0">
-                <a:solidFill>
-                  <a:srgbClr val="6E6E6E"/>
-                </a:solidFill>
-                <a:latin typeface="Pretendard" pitchFamily="34" charset="0"/>
-                <a:ea typeface="Pretendard" pitchFamily="34" charset="-122"/>
-                <a:cs typeface="Pretendard" pitchFamily="34" charset="-120"/>
-              </a:rPr>
-              <a:t>템플릿에서 마진과 칼럼을 조정합니다. 가로형/세로형 중 포맷을 먼저 정하세요.</a:t>
-            </a:r>
-            <a:endParaRPr lang="en-US" sz="1150" dirty="0"/>
-          </a:p>
-        </p:txBody>
-      </p:sp>
-      <p:sp>
-        <p:nvSpPr>
-          <p:cNvPr id="18" name="Shape 16"/>
-          <p:cNvSpPr/>
-          <p:nvPr/>
-        </p:nvSpPr>
-        <p:spPr>
-          <a:xfrm>
-            <a:off x="640080" y="4626864"/>
-            <a:ext cx="10911535" cy="822960"/>
-          </a:xfrm>
-          <a:prstGeom prst="rect">
+            <a:off x="969264" y="3017520"/>
+            <a:ext cx="329184" cy="329184"/>
+          </a:xfrm>
+          <a:prstGeom prst="ellipse">
             <a:avLst/>
           </a:prstGeom>
           <a:solidFill>
@@ -9594,14 +8084,53 @@
       </p:sp>
       <p:sp>
         <p:nvSpPr>
-          <p:cNvPr id="19" name="Text 17"/>
-          <p:cNvSpPr/>
-          <p:nvPr/>
-        </p:nvSpPr>
-        <p:spPr>
-          <a:xfrm>
-            <a:off x="1097280" y="4718304"/>
-            <a:ext cx="3291840" cy="640080"/>
+          <p:cNvPr id="16" name="Text 14"/>
+          <p:cNvSpPr/>
+          <p:nvPr/>
+        </p:nvSpPr>
+        <p:spPr>
+          <a:xfrm>
+            <a:off x="969264" y="3017520"/>
+            <a:ext cx="329184" cy="329184"/>
+          </a:xfrm>
+          <a:prstGeom prst="rect">
+            <a:avLst/>
+          </a:prstGeom>
+          <a:noFill/>
+          <a:ln/>
+        </p:spPr>
+        <p:txBody>
+          <a:bodyPr wrap="square" lIns="0" tIns="0" rIns="0" bIns="0" rtlCol="0" anchor="ctr"/>
+          <a:lstStyle/>
+          <a:p>
+            <a:pPr algn="ctr" indent="0" marL="0">
+              <a:buNone/>
+            </a:pPr>
+            <a:r>
+              <a:rPr lang="en-US" sz="1100" b="1" dirty="0">
+                <a:solidFill>
+                  <a:srgbClr val="FFFFFF"/>
+                </a:solidFill>
+                <a:latin typeface="Pretendard" pitchFamily="34" charset="0"/>
+                <a:ea typeface="Pretendard" pitchFamily="34" charset="-122"/>
+                <a:cs typeface="Pretendard" pitchFamily="34" charset="-120"/>
+              </a:rPr>
+              <a:t>2</a:t>
+            </a:r>
+            <a:endParaRPr lang="en-US" sz="1100" dirty="0"/>
+          </a:p>
+        </p:txBody>
+      </p:sp>
+      <p:sp>
+        <p:nvSpPr>
+          <p:cNvPr id="17" name="Text 15"/>
+          <p:cNvSpPr/>
+          <p:nvPr/>
+        </p:nvSpPr>
+        <p:spPr>
+          <a:xfrm>
+            <a:off x="1426464" y="2834640"/>
+            <a:ext cx="5175504" cy="329184"/>
           </a:xfrm>
           <a:prstGeom prst="rect">
             <a:avLst/>
@@ -9617,65 +8146,523 @@
               <a:buNone/>
             </a:pPr>
             <a:r>
-              <a:rPr lang="en-US" sz="1450" dirty="0">
-                <a:solidFill>
-                  <a:srgbClr val="FFFFFF"/>
+              <a:rPr lang="en-US" sz="1400" dirty="0">
+                <a:solidFill>
+                  <a:srgbClr val="111111"/>
                 </a:solidFill>
                 <a:latin typeface="Pretendard SemiBold" pitchFamily="34" charset="0"/>
                 <a:ea typeface="Pretendard SemiBold" pitchFamily="34" charset="-122"/>
                 <a:cs typeface="Pretendard SemiBold" pitchFamily="34" charset="-120"/>
               </a:rPr>
-              <a:t>적용 테스트</a:t>
-            </a:r>
-            <a:endParaRPr lang="en-US" sz="1450" dirty="0"/>
-          </a:p>
-        </p:txBody>
-      </p:sp>
-      <p:sp>
-        <p:nvSpPr>
-          <p:cNvPr id="20" name="Text 18"/>
-          <p:cNvSpPr/>
-          <p:nvPr/>
-        </p:nvSpPr>
-        <p:spPr>
-          <a:xfrm>
-            <a:off x="4480560" y="4718304"/>
-            <a:ext cx="6705295" cy="640080"/>
-          </a:xfrm>
-          <a:prstGeom prst="rect">
-            <a:avLst/>
-          </a:prstGeom>
-          <a:noFill/>
-          <a:ln/>
-        </p:spPr>
-        <p:txBody>
-          <a:bodyPr wrap="square" lIns="0" tIns="0" rIns="0" bIns="0" rtlCol="0" anchor="ctr"/>
+              <a:t>표지와 소개 페이지 시안</a:t>
+            </a:r>
+            <a:endParaRPr lang="en-US" sz="1400" dirty="0"/>
+          </a:p>
+        </p:txBody>
+      </p:sp>
+      <p:sp>
+        <p:nvSpPr>
+          <p:cNvPr id="18" name="Text 16"/>
+          <p:cNvSpPr/>
+          <p:nvPr/>
+        </p:nvSpPr>
+        <p:spPr>
+          <a:xfrm>
+            <a:off x="1426464" y="3145536"/>
+            <a:ext cx="5175504" cy="420624"/>
+          </a:xfrm>
+          <a:prstGeom prst="rect">
+            <a:avLst/>
+          </a:prstGeom>
+          <a:noFill/>
+          <a:ln/>
+        </p:spPr>
+        <p:txBody>
+          <a:bodyPr wrap="square" lIns="0" tIns="0" rIns="0" bIns="0" rtlCol="0" anchor="t"/>
           <a:lstStyle/>
           <a:p>
             <a:pPr indent="0" marL="0">
               <a:lnSpc>
-                <a:spcPct val="124000"/>
+                <a:spcPct val="122000"/>
               </a:lnSpc>
               <a:buNone/>
             </a:pPr>
             <a:r>
+              <a:rPr lang="en-US" sz="1100" dirty="0">
+                <a:solidFill>
+                  <a:srgbClr val="6E6E6E"/>
+                </a:solidFill>
+                <a:latin typeface="Pretendard" pitchFamily="34" charset="0"/>
+                <a:ea typeface="Pretendard" pitchFamily="34" charset="-122"/>
+                <a:cs typeface="Pretendard" pitchFamily="34" charset="-120"/>
+              </a:rPr>
+              <a:t>만든 시스템을 적용해 표지 1장, 소개 1장을 만들어 봅니다. 시스템이 실제로 작동하는지 확인하는 용도입니다.</a:t>
+            </a:r>
+            <a:endParaRPr lang="en-US" sz="1100" dirty="0"/>
+          </a:p>
+        </p:txBody>
+      </p:sp>
+      <p:sp>
+        <p:nvSpPr>
+          <p:cNvPr id="19" name="Shape 17"/>
+          <p:cNvSpPr/>
+          <p:nvPr/>
+        </p:nvSpPr>
+        <p:spPr>
+          <a:xfrm>
+            <a:off x="640080" y="3785616"/>
+            <a:ext cx="6309360" cy="7315"/>
+          </a:xfrm>
+          <a:prstGeom prst="rect">
+            <a:avLst/>
+          </a:prstGeom>
+          <a:solidFill>
+            <a:srgbClr val="111111"/>
+          </a:solidFill>
+          <a:ln w="12700">
+            <a:solidFill>
+              <a:srgbClr val="111111"/>
+            </a:solidFill>
+            <a:prstDash val="solid"/>
+          </a:ln>
+        </p:spPr>
+      </p:sp>
+      <p:sp>
+        <p:nvSpPr>
+          <p:cNvPr id="20" name="Text 18"/>
+          <p:cNvSpPr/>
+          <p:nvPr/>
+        </p:nvSpPr>
+        <p:spPr>
+          <a:xfrm>
+            <a:off x="640080" y="3877056"/>
+            <a:ext cx="6309360" cy="329184"/>
+          </a:xfrm>
+          <a:prstGeom prst="rect">
+            <a:avLst/>
+          </a:prstGeom>
+          <a:noFill/>
+          <a:ln/>
+        </p:spPr>
+        <p:txBody>
+          <a:bodyPr wrap="square" lIns="0" tIns="0" rIns="0" bIns="0" rtlCol="0" anchor="ctr"/>
+          <a:lstStyle/>
+          <a:p>
+            <a:pPr indent="0" marL="0">
+              <a:buNone/>
+            </a:pPr>
+            <a:r>
+              <a:rPr lang="en-US" sz="1200" b="1" dirty="0">
+                <a:solidFill>
+                  <a:srgbClr val="111111"/>
+                </a:solidFill>
+                <a:latin typeface="Pretendard" pitchFamily="34" charset="0"/>
+                <a:ea typeface="Pretendard" pitchFamily="34" charset="-122"/>
+                <a:cs typeface="Pretendard" pitchFamily="34" charset="-120"/>
+              </a:rPr>
+              <a:t>제출 — 10주차 수업 전까지 · 클래스룸 업로드</a:t>
+            </a:r>
+            <a:endParaRPr lang="en-US" sz="1200" dirty="0"/>
+          </a:p>
+        </p:txBody>
+      </p:sp>
+      <p:sp>
+        <p:nvSpPr>
+          <p:cNvPr id="21" name="Shape 19"/>
+          <p:cNvSpPr/>
+          <p:nvPr/>
+        </p:nvSpPr>
+        <p:spPr>
+          <a:xfrm>
+            <a:off x="7351776" y="1719072"/>
+            <a:ext cx="4199839" cy="3803904"/>
+          </a:xfrm>
+          <a:prstGeom prst="rect">
+            <a:avLst/>
+          </a:prstGeom>
+          <a:solidFill>
+            <a:srgbClr val="111111"/>
+          </a:solidFill>
+          <a:ln w="12700">
+            <a:solidFill>
+              <a:srgbClr val="111111"/>
+            </a:solidFill>
+            <a:prstDash val="solid"/>
+          </a:ln>
+        </p:spPr>
+      </p:sp>
+      <p:sp>
+        <p:nvSpPr>
+          <p:cNvPr id="22" name="Text 20"/>
+          <p:cNvSpPr/>
+          <p:nvPr/>
+        </p:nvSpPr>
+        <p:spPr>
+          <a:xfrm>
+            <a:off x="7735824" y="1993392"/>
+            <a:ext cx="3431743" cy="256032"/>
+          </a:xfrm>
+          <a:prstGeom prst="rect">
+            <a:avLst/>
+          </a:prstGeom>
+          <a:noFill/>
+          <a:ln/>
+        </p:spPr>
+        <p:txBody>
+          <a:bodyPr wrap="square" lIns="0" tIns="0" rIns="0" bIns="0" rtlCol="0" anchor="ctr"/>
+          <a:lstStyle/>
+          <a:p>
+            <a:pPr indent="0" marL="0">
+              <a:buNone/>
+            </a:pPr>
+            <a:r>
+              <a:rPr lang="en-US" sz="950" spc="260" kern="0" dirty="0">
+                <a:solidFill>
+                  <a:srgbClr val="9A9A9A"/>
+                </a:solidFill>
+                <a:latin typeface="Pretendard" pitchFamily="34" charset="0"/>
+                <a:ea typeface="Pretendard" pitchFamily="34" charset="-122"/>
+                <a:cs typeface="Pretendard" pitchFamily="34" charset="-120"/>
+              </a:rPr>
+              <a:t>NEXT WEEK</a:t>
+            </a:r>
+            <a:endParaRPr lang="en-US" sz="950" dirty="0"/>
+          </a:p>
+        </p:txBody>
+      </p:sp>
+      <p:sp>
+        <p:nvSpPr>
+          <p:cNvPr id="23" name="Text 21"/>
+          <p:cNvSpPr/>
+          <p:nvPr/>
+        </p:nvSpPr>
+        <p:spPr>
+          <a:xfrm>
+            <a:off x="7735824" y="2286000"/>
+            <a:ext cx="3431743" cy="402336"/>
+          </a:xfrm>
+          <a:prstGeom prst="rect">
+            <a:avLst/>
+          </a:prstGeom>
+          <a:noFill/>
+          <a:ln/>
+        </p:spPr>
+        <p:txBody>
+          <a:bodyPr wrap="square" lIns="0" tIns="0" rIns="0" bIns="0" rtlCol="0" anchor="ctr"/>
+          <a:lstStyle/>
+          <a:p>
+            <a:pPr indent="0" marL="0">
+              <a:buNone/>
+            </a:pPr>
+            <a:r>
+              <a:rPr lang="en-US" sz="2600" dirty="0">
+                <a:solidFill>
+                  <a:srgbClr val="FFFFFF"/>
+                </a:solidFill>
+                <a:latin typeface="Pretendard Light" pitchFamily="34" charset="0"/>
+                <a:ea typeface="Pretendard Light" pitchFamily="34" charset="-122"/>
+                <a:cs typeface="Pretendard Light" pitchFamily="34" charset="-120"/>
+              </a:rPr>
+              <a:t>10주차</a:t>
+            </a:r>
+            <a:endParaRPr lang="en-US" sz="2600" dirty="0"/>
+          </a:p>
+        </p:txBody>
+      </p:sp>
+      <p:sp>
+        <p:nvSpPr>
+          <p:cNvPr id="24" name="Text 22"/>
+          <p:cNvSpPr/>
+          <p:nvPr/>
+        </p:nvSpPr>
+        <p:spPr>
+          <a:xfrm>
+            <a:off x="7735824" y="2743200"/>
+            <a:ext cx="3431743" cy="512064"/>
+          </a:xfrm>
+          <a:prstGeom prst="rect">
+            <a:avLst/>
+          </a:prstGeom>
+          <a:noFill/>
+          <a:ln/>
+        </p:spPr>
+        <p:txBody>
+          <a:bodyPr wrap="square" lIns="0" tIns="0" rIns="0" bIns="0" rtlCol="0" anchor="t"/>
+          <a:lstStyle/>
+          <a:p>
+            <a:pPr indent="0" marL="0">
+              <a:lnSpc>
+                <a:spcPct val="116000"/>
+              </a:lnSpc>
+              <a:buNone/>
+            </a:pPr>
+            <a:r>
+              <a:rPr lang="en-US" sz="1700" dirty="0">
+                <a:solidFill>
+                  <a:srgbClr val="FFFFFF"/>
+                </a:solidFill>
+                <a:latin typeface="Pretendard SemiBold" pitchFamily="34" charset="0"/>
+                <a:ea typeface="Pretendard SemiBold" pitchFamily="34" charset="-122"/>
+                <a:cs typeface="Pretendard SemiBold" pitchFamily="34" charset="-120"/>
+              </a:rPr>
+              <a:t>편집디자인 실습 Ⅰ</a:t>
+            </a:r>
+            <a:endParaRPr lang="en-US" sz="1700" dirty="0"/>
+          </a:p>
+        </p:txBody>
+      </p:sp>
+      <p:sp>
+        <p:nvSpPr>
+          <p:cNvPr id="25" name="Shape 23"/>
+          <p:cNvSpPr/>
+          <p:nvPr/>
+        </p:nvSpPr>
+        <p:spPr>
+          <a:xfrm>
+            <a:off x="7735824" y="3346704"/>
+            <a:ext cx="3431743" cy="7315"/>
+          </a:xfrm>
+          <a:prstGeom prst="rect">
+            <a:avLst/>
+          </a:prstGeom>
+          <a:solidFill>
+            <a:srgbClr val="333333"/>
+          </a:solidFill>
+          <a:ln w="12700">
+            <a:solidFill>
+              <a:srgbClr val="333333"/>
+            </a:solidFill>
+            <a:prstDash val="solid"/>
+          </a:ln>
+        </p:spPr>
+      </p:sp>
+      <p:sp>
+        <p:nvSpPr>
+          <p:cNvPr id="26" name="Text 24"/>
+          <p:cNvSpPr/>
+          <p:nvPr/>
+        </p:nvSpPr>
+        <p:spPr>
+          <a:xfrm>
+            <a:off x="7735824" y="3493008"/>
+            <a:ext cx="3431743" cy="1170432"/>
+          </a:xfrm>
+          <a:prstGeom prst="rect">
+            <a:avLst/>
+          </a:prstGeom>
+          <a:noFill/>
+          <a:ln/>
+        </p:spPr>
+        <p:txBody>
+          <a:bodyPr wrap="square" lIns="0" tIns="0" rIns="0" bIns="0" rtlCol="0" anchor="t"/>
+          <a:lstStyle/>
+          <a:p>
+            <a:pPr marL="177800" indent="-177800">
+              <a:lnSpc>
+                <a:spcPct val="120000"/>
+              </a:lnSpc>
+              <a:spcAft>
+                <a:spcPts val="600"/>
+              </a:spcAft>
+              <a:buSzPct val="100000"/>
+              <a:buChar char="•"/>
+            </a:pPr>
+            <a:r>
               <a:rPr lang="en-US" sz="1150" dirty="0">
                 <a:solidFill>
-                  <a:srgbClr val="B8B8B8"/>
-                </a:solidFill>
-                <a:latin typeface="Pretendard" pitchFamily="34" charset="0"/>
-                <a:ea typeface="Pretendard" pitchFamily="34" charset="-122"/>
-                <a:cs typeface="Pretendard" pitchFamily="34" charset="-120"/>
-              </a:rPr>
-              <a:t>만든 그리드에 6주차 리서치 페이지를 얹어 봅니다. 안 맞으면 그리드를 고칩니다.</a:t>
+                  <a:srgbClr val="DDDDDD"/>
+                </a:solidFill>
+                <a:latin typeface="Pretendard" pitchFamily="34" charset="0"/>
+                <a:ea typeface="Pretendard" pitchFamily="34" charset="-122"/>
+                <a:cs typeface="Pretendard" pitchFamily="34" charset="-120"/>
+              </a:rPr>
+              <a:t>타이포그래피 위계 — 제목 · 본문 · 캡션</a:t>
             </a:r>
             <a:endParaRPr lang="en-US" sz="1150" dirty="0"/>
           </a:p>
-        </p:txBody>
-      </p:sp>
-      <p:sp>
-        <p:nvSpPr>
-          <p:cNvPr id="21" name="Shape 19"/>
+          <a:p>
+            <a:pPr marL="177800" indent="-177800">
+              <a:lnSpc>
+                <a:spcPct val="120000"/>
+              </a:lnSpc>
+              <a:spcAft>
+                <a:spcPts val="600"/>
+              </a:spcAft>
+              <a:buSzPct val="100000"/>
+              <a:buChar char="•"/>
+            </a:pPr>
+            <a:r>
+              <a:rPr lang="en-US" sz="1150" dirty="0">
+                <a:solidFill>
+                  <a:srgbClr val="DDDDDD"/>
+                </a:solidFill>
+                <a:latin typeface="Pretendard" pitchFamily="34" charset="0"/>
+                <a:ea typeface="Pretendard" pitchFamily="34" charset="-122"/>
+                <a:cs typeface="Pretendard" pitchFamily="34" charset="-120"/>
+              </a:rPr>
+              <a:t>그리드 적용 실습</a:t>
+            </a:r>
+            <a:endParaRPr lang="en-US" sz="1150" dirty="0"/>
+          </a:p>
+          <a:p>
+            <a:pPr marL="177800" indent="-177800">
+              <a:lnSpc>
+                <a:spcPct val="120000"/>
+              </a:lnSpc>
+              <a:spcAft>
+                <a:spcPts val="600"/>
+              </a:spcAft>
+              <a:buSzPct val="100000"/>
+              <a:buChar char="•"/>
+            </a:pPr>
+            <a:r>
+              <a:rPr lang="en-US" sz="1150" dirty="0">
+                <a:solidFill>
+                  <a:srgbClr val="DDDDDD"/>
+                </a:solidFill>
+                <a:latin typeface="Pretendard" pitchFamily="34" charset="0"/>
+                <a:ea typeface="Pretendard" pitchFamily="34" charset="-122"/>
+                <a:cs typeface="Pretendard" pitchFamily="34" charset="-120"/>
+              </a:rPr>
+              <a:t>여백과 정렬</a:t>
+            </a:r>
+            <a:endParaRPr lang="en-US" sz="1150" dirty="0"/>
+          </a:p>
+          <a:p>
+            <a:pPr marL="177800" indent="-177800">
+              <a:lnSpc>
+                <a:spcPct val="120000"/>
+              </a:lnSpc>
+              <a:spcAft>
+                <a:spcPts val="600"/>
+              </a:spcAft>
+              <a:buSzPct val="100000"/>
+              <a:buChar char="•"/>
+            </a:pPr>
+            <a:r>
+              <a:rPr lang="en-US" sz="1150" dirty="0">
+                <a:solidFill>
+                  <a:srgbClr val="DDDDDD"/>
+                </a:solidFill>
+                <a:latin typeface="Pretendard" pitchFamily="34" charset="0"/>
+                <a:ea typeface="Pretendard" pitchFamily="34" charset="-122"/>
+                <a:cs typeface="Pretendard" pitchFamily="34" charset="-120"/>
+              </a:rPr>
+              <a:t>포트폴리오 페이지 3장 제작</a:t>
+            </a:r>
+            <a:endParaRPr lang="en-US" sz="1150" dirty="0"/>
+          </a:p>
+        </p:txBody>
+      </p:sp>
+      <p:sp>
+        <p:nvSpPr>
+          <p:cNvPr id="27" name="Shape 25"/>
+          <p:cNvSpPr/>
+          <p:nvPr/>
+        </p:nvSpPr>
+        <p:spPr>
+          <a:xfrm>
+            <a:off x="7735824" y="4700016"/>
+            <a:ext cx="3431743" cy="7315"/>
+          </a:xfrm>
+          <a:prstGeom prst="rect">
+            <a:avLst/>
+          </a:prstGeom>
+          <a:solidFill>
+            <a:srgbClr val="333333"/>
+          </a:solidFill>
+          <a:ln w="12700">
+            <a:solidFill>
+              <a:srgbClr val="333333"/>
+            </a:solidFill>
+            <a:prstDash val="solid"/>
+          </a:ln>
+        </p:spPr>
+      </p:sp>
+      <p:sp>
+        <p:nvSpPr>
+          <p:cNvPr id="28" name="Text 26"/>
+          <p:cNvSpPr/>
+          <p:nvPr/>
+        </p:nvSpPr>
+        <p:spPr>
+          <a:xfrm>
+            <a:off x="7735824" y="4809744"/>
+            <a:ext cx="3431743" cy="237744"/>
+          </a:xfrm>
+          <a:prstGeom prst="rect">
+            <a:avLst/>
+          </a:prstGeom>
+          <a:noFill/>
+          <a:ln/>
+        </p:spPr>
+        <p:txBody>
+          <a:bodyPr wrap="square" lIns="0" tIns="0" rIns="0" bIns="0" rtlCol="0" anchor="ctr"/>
+          <a:lstStyle/>
+          <a:p>
+            <a:pPr indent="0" marL="0">
+              <a:buNone/>
+            </a:pPr>
+            <a:r>
+              <a:rPr lang="en-US" sz="900" spc="160" kern="0" dirty="0">
+                <a:solidFill>
+                  <a:srgbClr val="9B9B9B"/>
+                </a:solidFill>
+                <a:latin typeface="Pretendard" pitchFamily="34" charset="0"/>
+                <a:ea typeface="Pretendard" pitchFamily="34" charset="-122"/>
+                <a:cs typeface="Pretendard" pitchFamily="34" charset="-120"/>
+              </a:rPr>
+              <a:t>미리 준비할 것</a:t>
+            </a:r>
+            <a:endParaRPr lang="en-US" sz="900" dirty="0"/>
+          </a:p>
+        </p:txBody>
+      </p:sp>
+      <p:sp>
+        <p:nvSpPr>
+          <p:cNvPr id="29" name="Text 27"/>
+          <p:cNvSpPr/>
+          <p:nvPr/>
+        </p:nvSpPr>
+        <p:spPr>
+          <a:xfrm>
+            <a:off x="7735824" y="5065776"/>
+            <a:ext cx="3431743" cy="457200"/>
+          </a:xfrm>
+          <a:prstGeom prst="rect">
+            <a:avLst/>
+          </a:prstGeom>
+          <a:noFill/>
+          <a:ln/>
+        </p:spPr>
+        <p:txBody>
+          <a:bodyPr wrap="square" lIns="0" tIns="0" rIns="0" bIns="0" rtlCol="0" anchor="t"/>
+          <a:lstStyle/>
+          <a:p>
+            <a:pPr indent="0" marL="0">
+              <a:lnSpc>
+                <a:spcPct val="120000"/>
+              </a:lnSpc>
+              <a:buNone/>
+            </a:pPr>
+            <a:r>
+              <a:rPr lang="en-US" sz="1100" b="1" dirty="0">
+                <a:solidFill>
+                  <a:srgbClr val="FFFFFF"/>
+                </a:solidFill>
+                <a:latin typeface="Pretendard" pitchFamily="34" charset="0"/>
+                <a:ea typeface="Pretendard" pitchFamily="34" charset="-122"/>
+                <a:cs typeface="Pretendard" pitchFamily="34" charset="-120"/>
+              </a:rPr>
+              <a:t>무드보드 · 그리드 시스템 · 프로젝트 자료 · 노트북</a:t>
+            </a:r>
+            <a:endParaRPr lang="en-US" sz="1100" dirty="0"/>
+          </a:p>
+        </p:txBody>
+      </p:sp>
+      <p:sp>
+        <p:nvSpPr>
+          <p:cNvPr id="30" name="Shape 28"/>
           <p:cNvSpPr/>
           <p:nvPr/>
         </p:nvSpPr>
@@ -9700,7 +8687,7 @@
       </p:sp>
       <p:sp>
         <p:nvSpPr>
-          <p:cNvPr id="22" name="Text 20"/>
+          <p:cNvPr id="31" name="Text 29"/>
           <p:cNvSpPr/>
           <p:nvPr/>
         </p:nvSpPr>
@@ -9739,7 +8726,7 @@
       </p:sp>
       <p:sp>
         <p:nvSpPr>
-          <p:cNvPr id="23" name="Text 21"/>
+          <p:cNvPr id="32" name="Text 30"/>
           <p:cNvSpPr/>
           <p:nvPr/>
         </p:nvSpPr>
